--- a/mypaper_answers.pptx
+++ b/mypaper_answers.pptx
@@ -3458,7 +3458,7 @@
                   <p:par>
                     <p:cTn id="3" fill="hold">
                       <p:stCondLst>
-                        <p:cond delay="0"/>
+                        <p:cond delay="indefinite"/>
                       </p:stCondLst>
                       <p:childTnLst>
                         <p:par>
@@ -3481,7 +3481,7 @@
                                   <p:strVal val="visible"/>
                                 </p:to>
                               </p:set>
-                              <p:animEffect transition="in" filter="fly" prLst="dir=l">
+                              <p:animEffect transition="in" filter="fly(l)" prLst="dir=l">
                                 <p:cBhvr>
                                   <p:cTn id="6" dur="500"/>
                                   <p:tgtEl>
@@ -3498,7 +3498,7 @@
                   <p:par>
                     <p:cTn id="7" fill="hold">
                       <p:stCondLst>
-                        <p:cond delay="0"/>
+                        <p:cond delay="indefinite"/>
                       </p:stCondLst>
                       <p:childTnLst>
                         <p:par>
@@ -3521,7 +3521,7 @@
                                   <p:strVal val="visible"/>
                                 </p:to>
                               </p:set>
-                              <p:animEffect transition="in" filter="fly" prLst="dir=l">
+                              <p:animEffect transition="in" filter="fly(l)" prLst="dir=l">
                                 <p:cBhvr>
                                   <p:cTn id="10" dur="500"/>
                                   <p:tgtEl>
@@ -3543,8 +3543,8 @@
       </p:par>
     </p:tnLst>
     <p:bldLst>
-      <p:bldP spid="4" grpId="0"/>
-      <p:bldP spid="6" grpId="0"/>
+      <p:bldP spid="4" grpId="0" build="allAtOnce"/>
+      <p:bldP spid="6" grpId="0" build="allAtOnce"/>
     </p:bldLst>
   </p:timing>
 </p:sld>
@@ -3863,7 +3863,7 @@
                   <p:par>
                     <p:cTn id="3" fill="hold">
                       <p:stCondLst>
-                        <p:cond delay="0"/>
+                        <p:cond delay="indefinite"/>
                       </p:stCondLst>
                       <p:childTnLst>
                         <p:par>
@@ -3886,7 +3886,7 @@
                                   <p:strVal val="visible"/>
                                 </p:to>
                               </p:set>
-                              <p:animEffect transition="in" filter="fly" prLst="dir=l">
+                              <p:animEffect transition="in" filter="fly(l)" prLst="dir=l">
                                 <p:cBhvr>
                                   <p:cTn id="6" dur="500"/>
                                   <p:tgtEl>
@@ -3908,7 +3908,7 @@
       </p:par>
     </p:tnLst>
     <p:bldLst>
-      <p:bldP spid="3" grpId="0"/>
+      <p:bldP spid="3" grpId="0" build="allAtOnce"/>
     </p:bldLst>
   </p:timing>
 </p:sld>
@@ -4170,7 +4170,7 @@
                   <p:par>
                     <p:cTn id="3" fill="hold">
                       <p:stCondLst>
-                        <p:cond delay="0"/>
+                        <p:cond delay="indefinite"/>
                       </p:stCondLst>
                       <p:childTnLst>
                         <p:par>
@@ -4193,7 +4193,7 @@
                                   <p:strVal val="visible"/>
                                 </p:to>
                               </p:set>
-                              <p:animEffect transition="in" filter="fly" prLst="dir=l">
+                              <p:animEffect transition="in" filter="fly(l)" prLst="dir=l">
                                 <p:cBhvr>
                                   <p:cTn id="6" dur="500"/>
                                   <p:tgtEl>
@@ -4215,7 +4215,7 @@
       </p:par>
     </p:tnLst>
     <p:bldLst>
-      <p:bldP spid="3" grpId="0"/>
+      <p:bldP spid="3" grpId="0" build="allAtOnce"/>
     </p:bldLst>
   </p:timing>
 </p:sld>
@@ -4525,7 +4525,7 @@
                   <p:par>
                     <p:cTn id="3" fill="hold">
                       <p:stCondLst>
-                        <p:cond delay="0"/>
+                        <p:cond delay="indefinite"/>
                       </p:stCondLst>
                       <p:childTnLst>
                         <p:par>
@@ -4548,7 +4548,7 @@
                                   <p:strVal val="visible"/>
                                 </p:to>
                               </p:set>
-                              <p:animEffect transition="in" filter="fly" prLst="dir=l">
+                              <p:animEffect transition="in" filter="fly(l)" prLst="dir=l">
                                 <p:cBhvr>
                                   <p:cTn id="6" dur="500"/>
                                   <p:tgtEl>
@@ -4570,7 +4570,7 @@
       </p:par>
     </p:tnLst>
     <p:bldLst>
-      <p:bldP spid="3" grpId="0"/>
+      <p:bldP spid="3" grpId="0" build="allAtOnce"/>
     </p:bldLst>
   </p:timing>
 </p:sld>
@@ -4879,7 +4879,7 @@
                   <p:par>
                     <p:cTn id="3" fill="hold">
                       <p:stCondLst>
-                        <p:cond delay="0"/>
+                        <p:cond delay="indefinite"/>
                       </p:stCondLst>
                       <p:childTnLst>
                         <p:par>
@@ -4902,7 +4902,7 @@
                                   <p:strVal val="visible"/>
                                 </p:to>
                               </p:set>
-                              <p:animEffect transition="in" filter="fly" prLst="dir=l">
+                              <p:animEffect transition="in" filter="fly(l)" prLst="dir=l">
                                 <p:cBhvr>
                                   <p:cTn id="6" dur="500"/>
                                   <p:tgtEl>
@@ -4919,7 +4919,7 @@
                   <p:par>
                     <p:cTn id="7" fill="hold">
                       <p:stCondLst>
-                        <p:cond delay="0"/>
+                        <p:cond delay="indefinite"/>
                       </p:stCondLst>
                       <p:childTnLst>
                         <p:par>
@@ -4942,7 +4942,7 @@
                                   <p:strVal val="visible"/>
                                 </p:to>
                               </p:set>
-                              <p:animEffect transition="in" filter="fly" prLst="dir=l">
+                              <p:animEffect transition="in" filter="fly(l)" prLst="dir=l">
                                 <p:cBhvr>
                                   <p:cTn id="10" dur="500"/>
                                   <p:tgtEl>
@@ -4964,8 +4964,8 @@
       </p:par>
     </p:tnLst>
     <p:bldLst>
-      <p:bldP spid="4" grpId="0"/>
-      <p:bldP spid="6" grpId="0"/>
+      <p:bldP spid="4" grpId="0" build="allAtOnce"/>
+      <p:bldP spid="6" grpId="0" build="allAtOnce"/>
     </p:bldLst>
   </p:timing>
 </p:sld>
@@ -5276,7 +5276,7 @@
                   <p:par>
                     <p:cTn id="3" fill="hold">
                       <p:stCondLst>
-                        <p:cond delay="0"/>
+                        <p:cond delay="indefinite"/>
                       </p:stCondLst>
                       <p:childTnLst>
                         <p:par>
@@ -5299,7 +5299,7 @@
                                   <p:strVal val="visible"/>
                                 </p:to>
                               </p:set>
-                              <p:animEffect transition="in" filter="fly" prLst="dir=l">
+                              <p:animEffect transition="in" filter="fly(l)" prLst="dir=l">
                                 <p:cBhvr>
                                   <p:cTn id="6" dur="500"/>
                                   <p:tgtEl>
@@ -5316,7 +5316,7 @@
                   <p:par>
                     <p:cTn id="7" fill="hold">
                       <p:stCondLst>
-                        <p:cond delay="0"/>
+                        <p:cond delay="indefinite"/>
                       </p:stCondLst>
                       <p:childTnLst>
                         <p:par>
@@ -5339,7 +5339,7 @@
                                   <p:strVal val="visible"/>
                                 </p:to>
                               </p:set>
-                              <p:animEffect transition="in" filter="fly" prLst="dir=l">
+                              <p:animEffect transition="in" filter="fly(l)" prLst="dir=l">
                                 <p:cBhvr>
                                   <p:cTn id="10" dur="500"/>
                                   <p:tgtEl>
@@ -5361,8 +5361,8 @@
       </p:par>
     </p:tnLst>
     <p:bldLst>
-      <p:bldP spid="4" grpId="0"/>
-      <p:bldP spid="6" grpId="0"/>
+      <p:bldP spid="4" grpId="0" build="allAtOnce"/>
+      <p:bldP spid="6" grpId="0" build="allAtOnce"/>
     </p:bldLst>
   </p:timing>
 </p:sld>
@@ -5671,7 +5671,7 @@
                   <p:par>
                     <p:cTn id="3" fill="hold">
                       <p:stCondLst>
-                        <p:cond delay="0"/>
+                        <p:cond delay="indefinite"/>
                       </p:stCondLst>
                       <p:childTnLst>
                         <p:par>
@@ -5694,7 +5694,7 @@
                                   <p:strVal val="visible"/>
                                 </p:to>
                               </p:set>
-                              <p:animEffect transition="in" filter="fly" prLst="dir=l">
+                              <p:animEffect transition="in" filter="fly(l)" prLst="dir=l">
                                 <p:cBhvr>
                                   <p:cTn id="6" dur="500"/>
                                   <p:tgtEl>
@@ -5711,7 +5711,7 @@
                   <p:par>
                     <p:cTn id="7" fill="hold">
                       <p:stCondLst>
-                        <p:cond delay="0"/>
+                        <p:cond delay="indefinite"/>
                       </p:stCondLst>
                       <p:childTnLst>
                         <p:par>
@@ -5734,7 +5734,7 @@
                                   <p:strVal val="visible"/>
                                 </p:to>
                               </p:set>
-                              <p:animEffect transition="in" filter="fly" prLst="dir=l">
+                              <p:animEffect transition="in" filter="fly(l)" prLst="dir=l">
                                 <p:cBhvr>
                                   <p:cTn id="10" dur="500"/>
                                   <p:tgtEl>
@@ -5756,8 +5756,8 @@
       </p:par>
     </p:tnLst>
     <p:bldLst>
-      <p:bldP spid="4" grpId="0"/>
-      <p:bldP spid="6" grpId="0"/>
+      <p:bldP spid="4" grpId="0" build="allAtOnce"/>
+      <p:bldP spid="6" grpId="0" build="allAtOnce"/>
     </p:bldLst>
   </p:timing>
 </p:sld>
@@ -6067,7 +6067,7 @@
                   <p:par>
                     <p:cTn id="3" fill="hold">
                       <p:stCondLst>
-                        <p:cond delay="0"/>
+                        <p:cond delay="indefinite"/>
                       </p:stCondLst>
                       <p:childTnLst>
                         <p:par>
@@ -6090,7 +6090,7 @@
                                   <p:strVal val="visible"/>
                                 </p:to>
                               </p:set>
-                              <p:animEffect transition="in" filter="fly" prLst="dir=l">
+                              <p:animEffect transition="in" filter="fly(l)" prLst="dir=l">
                                 <p:cBhvr>
                                   <p:cTn id="6" dur="500"/>
                                   <p:tgtEl>
@@ -6107,7 +6107,7 @@
                   <p:par>
                     <p:cTn id="7" fill="hold">
                       <p:stCondLst>
-                        <p:cond delay="0"/>
+                        <p:cond delay="indefinite"/>
                       </p:stCondLst>
                       <p:childTnLst>
                         <p:par>
@@ -6130,7 +6130,7 @@
                                   <p:strVal val="visible"/>
                                 </p:to>
                               </p:set>
-                              <p:animEffect transition="in" filter="fly" prLst="dir=l">
+                              <p:animEffect transition="in" filter="fly(l)" prLst="dir=l">
                                 <p:cBhvr>
                                   <p:cTn id="10" dur="500"/>
                                   <p:tgtEl>
@@ -6152,8 +6152,8 @@
       </p:par>
     </p:tnLst>
     <p:bldLst>
-      <p:bldP spid="4" grpId="0"/>
-      <p:bldP spid="6" grpId="0"/>
+      <p:bldP spid="4" grpId="0" build="allAtOnce"/>
+      <p:bldP spid="6" grpId="0" build="allAtOnce"/>
     </p:bldLst>
   </p:timing>
 </p:sld>
@@ -6464,7 +6464,7 @@
                   <p:par>
                     <p:cTn id="3" fill="hold">
                       <p:stCondLst>
-                        <p:cond delay="0"/>
+                        <p:cond delay="indefinite"/>
                       </p:stCondLst>
                       <p:childTnLst>
                         <p:par>
@@ -6487,7 +6487,7 @@
                                   <p:strVal val="visible"/>
                                 </p:to>
                               </p:set>
-                              <p:animEffect transition="in" filter="fly" prLst="dir=l">
+                              <p:animEffect transition="in" filter="fly(l)" prLst="dir=l">
                                 <p:cBhvr>
                                   <p:cTn id="6" dur="500"/>
                                   <p:tgtEl>
@@ -6504,7 +6504,7 @@
                   <p:par>
                     <p:cTn id="7" fill="hold">
                       <p:stCondLst>
-                        <p:cond delay="0"/>
+                        <p:cond delay="indefinite"/>
                       </p:stCondLst>
                       <p:childTnLst>
                         <p:par>
@@ -6527,7 +6527,7 @@
                                   <p:strVal val="visible"/>
                                 </p:to>
                               </p:set>
-                              <p:animEffect transition="in" filter="fly" prLst="dir=l">
+                              <p:animEffect transition="in" filter="fly(l)" prLst="dir=l">
                                 <p:cBhvr>
                                   <p:cTn id="10" dur="500"/>
                                   <p:tgtEl>
@@ -6549,8 +6549,8 @@
       </p:par>
     </p:tnLst>
     <p:bldLst>
-      <p:bldP spid="4" grpId="0"/>
-      <p:bldP spid="6" grpId="0"/>
+      <p:bldP spid="4" grpId="0" build="allAtOnce"/>
+      <p:bldP spid="6" grpId="0" build="allAtOnce"/>
     </p:bldLst>
   </p:timing>
 </p:sld>
@@ -6858,7 +6858,7 @@
                   <p:par>
                     <p:cTn id="3" fill="hold">
                       <p:stCondLst>
-                        <p:cond delay="0"/>
+                        <p:cond delay="indefinite"/>
                       </p:stCondLst>
                       <p:childTnLst>
                         <p:par>
@@ -6881,7 +6881,7 @@
                                   <p:strVal val="visible"/>
                                 </p:to>
                               </p:set>
-                              <p:animEffect transition="in" filter="fly" prLst="dir=l">
+                              <p:animEffect transition="in" filter="fly(l)" prLst="dir=l">
                                 <p:cBhvr>
                                   <p:cTn id="6" dur="500"/>
                                   <p:tgtEl>
@@ -6898,7 +6898,7 @@
                   <p:par>
                     <p:cTn id="7" fill="hold">
                       <p:stCondLst>
-                        <p:cond delay="0"/>
+                        <p:cond delay="indefinite"/>
                       </p:stCondLst>
                       <p:childTnLst>
                         <p:par>
@@ -6921,7 +6921,7 @@
                                   <p:strVal val="visible"/>
                                 </p:to>
                               </p:set>
-                              <p:animEffect transition="in" filter="fly" prLst="dir=l">
+                              <p:animEffect transition="in" filter="fly(l)" prLst="dir=l">
                                 <p:cBhvr>
                                   <p:cTn id="10" dur="500"/>
                                   <p:tgtEl>
@@ -6943,8 +6943,8 @@
       </p:par>
     </p:tnLst>
     <p:bldLst>
-      <p:bldP spid="4" grpId="0"/>
-      <p:bldP spid="6" grpId="0"/>
+      <p:bldP spid="4" grpId="0" build="allAtOnce"/>
+      <p:bldP spid="6" grpId="0" build="allAtOnce"/>
     </p:bldLst>
   </p:timing>
 </p:sld>
@@ -7256,7 +7256,7 @@
                   <p:par>
                     <p:cTn id="3" fill="hold">
                       <p:stCondLst>
-                        <p:cond delay="0"/>
+                        <p:cond delay="indefinite"/>
                       </p:stCondLst>
                       <p:childTnLst>
                         <p:par>
@@ -7279,7 +7279,7 @@
                                   <p:strVal val="visible"/>
                                 </p:to>
                               </p:set>
-                              <p:animEffect transition="in" filter="fly" prLst="dir=l">
+                              <p:animEffect transition="in" filter="fly(l)" prLst="dir=l">
                                 <p:cBhvr>
                                   <p:cTn id="6" dur="500"/>
                                   <p:tgtEl>
@@ -7296,7 +7296,7 @@
                   <p:par>
                     <p:cTn id="7" fill="hold">
                       <p:stCondLst>
-                        <p:cond delay="0"/>
+                        <p:cond delay="indefinite"/>
                       </p:stCondLst>
                       <p:childTnLst>
                         <p:par>
@@ -7319,7 +7319,7 @@
                                   <p:strVal val="visible"/>
                                 </p:to>
                               </p:set>
-                              <p:animEffect transition="in" filter="fly" prLst="dir=l">
+                              <p:animEffect transition="in" filter="fly(l)" prLst="dir=l">
                                 <p:cBhvr>
                                   <p:cTn id="10" dur="500"/>
                                   <p:tgtEl>
@@ -7341,8 +7341,8 @@
       </p:par>
     </p:tnLst>
     <p:bldLst>
-      <p:bldP spid="4" grpId="0"/>
-      <p:bldP spid="6" grpId="0"/>
+      <p:bldP spid="4" grpId="0" build="allAtOnce"/>
+      <p:bldP spid="6" grpId="0" build="allAtOnce"/>
     </p:bldLst>
   </p:timing>
 </p:sld>
@@ -7656,7 +7656,7 @@
                   <p:par>
                     <p:cTn id="3" fill="hold">
                       <p:stCondLst>
-                        <p:cond delay="0"/>
+                        <p:cond delay="indefinite"/>
                       </p:stCondLst>
                       <p:childTnLst>
                         <p:par>
@@ -7679,7 +7679,7 @@
                                   <p:strVal val="visible"/>
                                 </p:to>
                               </p:set>
-                              <p:animEffect transition="in" filter="fly" prLst="dir=l">
+                              <p:animEffect transition="in" filter="fly(l)" prLst="dir=l">
                                 <p:cBhvr>
                                   <p:cTn id="6" dur="500"/>
                                   <p:tgtEl>
@@ -7696,7 +7696,7 @@
                   <p:par>
                     <p:cTn id="7" fill="hold">
                       <p:stCondLst>
-                        <p:cond delay="0"/>
+                        <p:cond delay="indefinite"/>
                       </p:stCondLst>
                       <p:childTnLst>
                         <p:par>
@@ -7719,7 +7719,7 @@
                                   <p:strVal val="visible"/>
                                 </p:to>
                               </p:set>
-                              <p:animEffect transition="in" filter="fly" prLst="dir=l">
+                              <p:animEffect transition="in" filter="fly(l)" prLst="dir=l">
                                 <p:cBhvr>
                                   <p:cTn id="10" dur="500"/>
                                   <p:tgtEl>
@@ -7741,8 +7741,8 @@
       </p:par>
     </p:tnLst>
     <p:bldLst>
-      <p:bldP spid="4" grpId="0"/>
-      <p:bldP spid="6" grpId="0"/>
+      <p:bldP spid="4" grpId="0" build="allAtOnce"/>
+      <p:bldP spid="6" grpId="0" build="allAtOnce"/>
     </p:bldLst>
   </p:timing>
 </p:sld>
@@ -8052,7 +8052,7 @@
                   <p:par>
                     <p:cTn id="3" fill="hold">
                       <p:stCondLst>
-                        <p:cond delay="0"/>
+                        <p:cond delay="indefinite"/>
                       </p:stCondLst>
                       <p:childTnLst>
                         <p:par>
@@ -8075,7 +8075,7 @@
                                   <p:strVal val="visible"/>
                                 </p:to>
                               </p:set>
-                              <p:animEffect transition="in" filter="fly" prLst="dir=l">
+                              <p:animEffect transition="in" filter="fly(l)" prLst="dir=l">
                                 <p:cBhvr>
                                   <p:cTn id="6" dur="500"/>
                                   <p:tgtEl>
@@ -8092,7 +8092,7 @@
                   <p:par>
                     <p:cTn id="7" fill="hold">
                       <p:stCondLst>
-                        <p:cond delay="0"/>
+                        <p:cond delay="indefinite"/>
                       </p:stCondLst>
                       <p:childTnLst>
                         <p:par>
@@ -8115,7 +8115,7 @@
                                   <p:strVal val="visible"/>
                                 </p:to>
                               </p:set>
-                              <p:animEffect transition="in" filter="fly" prLst="dir=l">
+                              <p:animEffect transition="in" filter="fly(l)" prLst="dir=l">
                                 <p:cBhvr>
                                   <p:cTn id="10" dur="500"/>
                                   <p:tgtEl>
@@ -8137,8 +8137,8 @@
       </p:par>
     </p:tnLst>
     <p:bldLst>
-      <p:bldP spid="4" grpId="0"/>
-      <p:bldP spid="6" grpId="0"/>
+      <p:bldP spid="4" grpId="0" build="allAtOnce"/>
+      <p:bldP spid="6" grpId="0" build="allAtOnce"/>
     </p:bldLst>
   </p:timing>
 </p:sld>
@@ -8449,7 +8449,7 @@
                   <p:par>
                     <p:cTn id="3" fill="hold">
                       <p:stCondLst>
-                        <p:cond delay="0"/>
+                        <p:cond delay="indefinite"/>
                       </p:stCondLst>
                       <p:childTnLst>
                         <p:par>
@@ -8472,7 +8472,7 @@
                                   <p:strVal val="visible"/>
                                 </p:to>
                               </p:set>
-                              <p:animEffect transition="in" filter="fly" prLst="dir=l">
+                              <p:animEffect transition="in" filter="fly(l)" prLst="dir=l">
                                 <p:cBhvr>
                                   <p:cTn id="6" dur="500"/>
                                   <p:tgtEl>
@@ -8489,7 +8489,7 @@
                   <p:par>
                     <p:cTn id="7" fill="hold">
                       <p:stCondLst>
-                        <p:cond delay="0"/>
+                        <p:cond delay="indefinite"/>
                       </p:stCondLst>
                       <p:childTnLst>
                         <p:par>
@@ -8512,7 +8512,7 @@
                                   <p:strVal val="visible"/>
                                 </p:to>
                               </p:set>
-                              <p:animEffect transition="in" filter="fly" prLst="dir=l">
+                              <p:animEffect transition="in" filter="fly(l)" prLst="dir=l">
                                 <p:cBhvr>
                                   <p:cTn id="10" dur="500"/>
                                   <p:tgtEl>
@@ -8534,8 +8534,8 @@
       </p:par>
     </p:tnLst>
     <p:bldLst>
-      <p:bldP spid="4" grpId="0"/>
-      <p:bldP spid="6" grpId="0"/>
+      <p:bldP spid="4" grpId="0" build="allAtOnce"/>
+      <p:bldP spid="6" grpId="0" build="allAtOnce"/>
     </p:bldLst>
   </p:timing>
 </p:sld>
@@ -8845,7 +8845,7 @@
                   <p:par>
                     <p:cTn id="3" fill="hold">
                       <p:stCondLst>
-                        <p:cond delay="0"/>
+                        <p:cond delay="indefinite"/>
                       </p:stCondLst>
                       <p:childTnLst>
                         <p:par>
@@ -8868,7 +8868,7 @@
                                   <p:strVal val="visible"/>
                                 </p:to>
                               </p:set>
-                              <p:animEffect transition="in" filter="fly" prLst="dir=l">
+                              <p:animEffect transition="in" filter="fly(l)" prLst="dir=l">
                                 <p:cBhvr>
                                   <p:cTn id="6" dur="500"/>
                                   <p:tgtEl>
@@ -8885,7 +8885,7 @@
                   <p:par>
                     <p:cTn id="7" fill="hold">
                       <p:stCondLst>
-                        <p:cond delay="0"/>
+                        <p:cond delay="indefinite"/>
                       </p:stCondLst>
                       <p:childTnLst>
                         <p:par>
@@ -8908,7 +8908,7 @@
                                   <p:strVal val="visible"/>
                                 </p:to>
                               </p:set>
-                              <p:animEffect transition="in" filter="fly" prLst="dir=l">
+                              <p:animEffect transition="in" filter="fly(l)" prLst="dir=l">
                                 <p:cBhvr>
                                   <p:cTn id="10" dur="500"/>
                                   <p:tgtEl>
@@ -8930,8 +8930,8 @@
       </p:par>
     </p:tnLst>
     <p:bldLst>
-      <p:bldP spid="4" grpId="0"/>
-      <p:bldP spid="6" grpId="0"/>
+      <p:bldP spid="4" grpId="0" build="allAtOnce"/>
+      <p:bldP spid="6" grpId="0" build="allAtOnce"/>
     </p:bldLst>
   </p:timing>
 </p:sld>
@@ -9240,7 +9240,7 @@
                   <p:par>
                     <p:cTn id="3" fill="hold">
                       <p:stCondLst>
-                        <p:cond delay="0"/>
+                        <p:cond delay="indefinite"/>
                       </p:stCondLst>
                       <p:childTnLst>
                         <p:par>
@@ -9263,7 +9263,7 @@
                                   <p:strVal val="visible"/>
                                 </p:to>
                               </p:set>
-                              <p:animEffect transition="in" filter="fly" prLst="dir=l">
+                              <p:animEffect transition="in" filter="fly(l)" prLst="dir=l">
                                 <p:cBhvr>
                                   <p:cTn id="6" dur="500"/>
                                   <p:tgtEl>
@@ -9280,7 +9280,7 @@
                   <p:par>
                     <p:cTn id="7" fill="hold">
                       <p:stCondLst>
-                        <p:cond delay="0"/>
+                        <p:cond delay="indefinite"/>
                       </p:stCondLst>
                       <p:childTnLst>
                         <p:par>
@@ -9303,7 +9303,7 @@
                                   <p:strVal val="visible"/>
                                 </p:to>
                               </p:set>
-                              <p:animEffect transition="in" filter="fly" prLst="dir=l">
+                              <p:animEffect transition="in" filter="fly(l)" prLst="dir=l">
                                 <p:cBhvr>
                                   <p:cTn id="10" dur="500"/>
                                   <p:tgtEl>
@@ -9325,8 +9325,8 @@
       </p:par>
     </p:tnLst>
     <p:bldLst>
-      <p:bldP spid="4" grpId="0"/>
-      <p:bldP spid="6" grpId="0"/>
+      <p:bldP spid="4" grpId="0" build="allAtOnce"/>
+      <p:bldP spid="6" grpId="0" build="allAtOnce"/>
     </p:bldLst>
   </p:timing>
 </p:sld>
@@ -9637,7 +9637,7 @@
                   <p:par>
                     <p:cTn id="3" fill="hold">
                       <p:stCondLst>
-                        <p:cond delay="0"/>
+                        <p:cond delay="indefinite"/>
                       </p:stCondLst>
                       <p:childTnLst>
                         <p:par>
@@ -9660,7 +9660,7 @@
                                   <p:strVal val="visible"/>
                                 </p:to>
                               </p:set>
-                              <p:animEffect transition="in" filter="fly" prLst="dir=l">
+                              <p:animEffect transition="in" filter="fly(l)" prLst="dir=l">
                                 <p:cBhvr>
                                   <p:cTn id="6" dur="500"/>
                                   <p:tgtEl>
@@ -9677,7 +9677,7 @@
                   <p:par>
                     <p:cTn id="7" fill="hold">
                       <p:stCondLst>
-                        <p:cond delay="0"/>
+                        <p:cond delay="indefinite"/>
                       </p:stCondLst>
                       <p:childTnLst>
                         <p:par>
@@ -9700,7 +9700,7 @@
                                   <p:strVal val="visible"/>
                                 </p:to>
                               </p:set>
-                              <p:animEffect transition="in" filter="fly" prLst="dir=l">
+                              <p:animEffect transition="in" filter="fly(l)" prLst="dir=l">
                                 <p:cBhvr>
                                   <p:cTn id="10" dur="500"/>
                                   <p:tgtEl>
@@ -9722,8 +9722,8 @@
       </p:par>
     </p:tnLst>
     <p:bldLst>
-      <p:bldP spid="4" grpId="0"/>
-      <p:bldP spid="6" grpId="0"/>
+      <p:bldP spid="4" grpId="0" build="allAtOnce"/>
+      <p:bldP spid="6" grpId="0" build="allAtOnce"/>
     </p:bldLst>
   </p:timing>
 </p:sld>
@@ -10033,7 +10033,7 @@
                   <p:par>
                     <p:cTn id="3" fill="hold">
                       <p:stCondLst>
-                        <p:cond delay="0"/>
+                        <p:cond delay="indefinite"/>
                       </p:stCondLst>
                       <p:childTnLst>
                         <p:par>
@@ -10056,7 +10056,7 @@
                                   <p:strVal val="visible"/>
                                 </p:to>
                               </p:set>
-                              <p:animEffect transition="in" filter="fly" prLst="dir=l">
+                              <p:animEffect transition="in" filter="fly(l)" prLst="dir=l">
                                 <p:cBhvr>
                                   <p:cTn id="6" dur="500"/>
                                   <p:tgtEl>
@@ -10073,7 +10073,7 @@
                   <p:par>
                     <p:cTn id="7" fill="hold">
                       <p:stCondLst>
-                        <p:cond delay="0"/>
+                        <p:cond delay="indefinite"/>
                       </p:stCondLst>
                       <p:childTnLst>
                         <p:par>
@@ -10096,7 +10096,7 @@
                                   <p:strVal val="visible"/>
                                 </p:to>
                               </p:set>
-                              <p:animEffect transition="in" filter="fly" prLst="dir=l">
+                              <p:animEffect transition="in" filter="fly(l)" prLst="dir=l">
                                 <p:cBhvr>
                                   <p:cTn id="10" dur="500"/>
                                   <p:tgtEl>
@@ -10118,8 +10118,8 @@
       </p:par>
     </p:tnLst>
     <p:bldLst>
-      <p:bldP spid="4" grpId="0"/>
-      <p:bldP spid="6" grpId="0"/>
+      <p:bldP spid="4" grpId="0" build="allAtOnce"/>
+      <p:bldP spid="6" grpId="0" build="allAtOnce"/>
     </p:bldLst>
   </p:timing>
 </p:sld>
@@ -10470,7 +10470,7 @@
                   <p:par>
                     <p:cTn id="3" fill="hold">
                       <p:stCondLst>
-                        <p:cond delay="0"/>
+                        <p:cond delay="indefinite"/>
                       </p:stCondLst>
                       <p:childTnLst>
                         <p:par>
@@ -10493,7 +10493,7 @@
                                   <p:strVal val="visible"/>
                                 </p:to>
                               </p:set>
-                              <p:animEffect transition="in" filter="fly" prLst="dir=l">
+                              <p:animEffect transition="in" filter="fly(l)" prLst="dir=l">
                                 <p:cBhvr>
                                   <p:cTn id="6" dur="500"/>
                                   <p:tgtEl>
@@ -10515,7 +10515,7 @@
       </p:par>
     </p:tnLst>
     <p:bldLst>
-      <p:bldP spid="3" grpId="0"/>
+      <p:bldP spid="3" grpId="0" build="allAtOnce"/>
     </p:bldLst>
   </p:timing>
 </p:sld>
@@ -10839,7 +10839,7 @@
                   <p:par>
                     <p:cTn id="3" fill="hold">
                       <p:stCondLst>
-                        <p:cond delay="0"/>
+                        <p:cond delay="indefinite"/>
                       </p:stCondLst>
                       <p:childTnLst>
                         <p:par>
@@ -10862,7 +10862,7 @@
                                   <p:strVal val="visible"/>
                                 </p:to>
                               </p:set>
-                              <p:animEffect transition="in" filter="fly" prLst="dir=l">
+                              <p:animEffect transition="in" filter="fly(l)" prLst="dir=l">
                                 <p:cBhvr>
                                   <p:cTn id="6" dur="500"/>
                                   <p:tgtEl>
@@ -10884,7 +10884,7 @@
       </p:par>
     </p:tnLst>
     <p:bldLst>
-      <p:bldP spid="3" grpId="0"/>
+      <p:bldP spid="3" grpId="0" build="allAtOnce"/>
     </p:bldLst>
   </p:timing>
 </p:sld>
@@ -11217,7 +11217,7 @@
                   <p:par>
                     <p:cTn id="3" fill="hold">
                       <p:stCondLst>
-                        <p:cond delay="0"/>
+                        <p:cond delay="indefinite"/>
                       </p:stCondLst>
                       <p:childTnLst>
                         <p:par>
@@ -11240,7 +11240,7 @@
                                   <p:strVal val="visible"/>
                                 </p:to>
                               </p:set>
-                              <p:animEffect transition="in" filter="fly" prLst="dir=l">
+                              <p:animEffect transition="in" filter="fly(l)" prLst="dir=l">
                                 <p:cBhvr>
                                   <p:cTn id="6" dur="500"/>
                                   <p:tgtEl>
@@ -11262,7 +11262,7 @@
       </p:par>
     </p:tnLst>
     <p:bldLst>
-      <p:bldP spid="3" grpId="0"/>
+      <p:bldP spid="3" grpId="0" build="allAtOnce"/>
     </p:bldLst>
   </p:timing>
 </p:sld>
@@ -11656,7 +11656,7 @@
                   <p:par>
                     <p:cTn id="3" fill="hold">
                       <p:stCondLst>
-                        <p:cond delay="0"/>
+                        <p:cond delay="indefinite"/>
                       </p:stCondLst>
                       <p:childTnLst>
                         <p:par>
@@ -11679,7 +11679,7 @@
                                   <p:strVal val="visible"/>
                                 </p:to>
                               </p:set>
-                              <p:animEffect transition="in" filter="fly" prLst="dir=l">
+                              <p:animEffect transition="in" filter="fly(l)" prLst="dir=l">
                                 <p:cBhvr>
                                   <p:cTn id="6" dur="500"/>
                                   <p:tgtEl>
@@ -11696,7 +11696,7 @@
                   <p:par>
                     <p:cTn id="7" fill="hold">
                       <p:stCondLst>
-                        <p:cond delay="0"/>
+                        <p:cond delay="indefinite"/>
                       </p:stCondLst>
                       <p:childTnLst>
                         <p:par>
@@ -11719,7 +11719,7 @@
                                   <p:strVal val="visible"/>
                                 </p:to>
                               </p:set>
-                              <p:animEffect transition="in" filter="fly" prLst="dir=l">
+                              <p:animEffect transition="in" filter="fly(l)" prLst="dir=l">
                                 <p:cBhvr>
                                   <p:cTn id="10" dur="500"/>
                                   <p:tgtEl>
@@ -11741,8 +11741,8 @@
       </p:par>
     </p:tnLst>
     <p:bldLst>
-      <p:bldP spid="4" grpId="0"/>
-      <p:bldP spid="6" grpId="0"/>
+      <p:bldP spid="4" grpId="0" build="allAtOnce"/>
+      <p:bldP spid="6" grpId="0" build="allAtOnce"/>
     </p:bldLst>
   </p:timing>
 </p:sld>
@@ -12159,7 +12159,7 @@
                   <p:par>
                     <p:cTn id="3" fill="hold">
                       <p:stCondLst>
-                        <p:cond delay="0"/>
+                        <p:cond delay="indefinite"/>
                       </p:stCondLst>
                       <p:childTnLst>
                         <p:par>
@@ -12182,7 +12182,7 @@
                                   <p:strVal val="visible"/>
                                 </p:to>
                               </p:set>
-                              <p:animEffect transition="in" filter="fly" prLst="dir=l">
+                              <p:animEffect transition="in" filter="fly(l)" prLst="dir=l">
                                 <p:cBhvr>
                                   <p:cTn id="6" dur="500"/>
                                   <p:tgtEl>
@@ -12204,7 +12204,7 @@
       </p:par>
     </p:tnLst>
     <p:bldLst>
-      <p:bldP spid="3" grpId="0"/>
+      <p:bldP spid="3" grpId="0" build="allAtOnce"/>
     </p:bldLst>
   </p:timing>
 </p:sld>
@@ -12619,7 +12619,7 @@
                   <p:par>
                     <p:cTn id="3" fill="hold">
                       <p:stCondLst>
-                        <p:cond delay="0"/>
+                        <p:cond delay="indefinite"/>
                       </p:stCondLst>
                       <p:childTnLst>
                         <p:par>
@@ -12642,7 +12642,7 @@
                                   <p:strVal val="visible"/>
                                 </p:to>
                               </p:set>
-                              <p:animEffect transition="in" filter="fly" prLst="dir=l">
+                              <p:animEffect transition="in" filter="fly(l)" prLst="dir=l">
                                 <p:cBhvr>
                                   <p:cTn id="6" dur="500"/>
                                   <p:tgtEl>
@@ -12659,7 +12659,7 @@
                   <p:par>
                     <p:cTn id="7" fill="hold">
                       <p:stCondLst>
-                        <p:cond delay="0"/>
+                        <p:cond delay="indefinite"/>
                       </p:stCondLst>
                       <p:childTnLst>
                         <p:par>
@@ -12682,7 +12682,7 @@
                                   <p:strVal val="visible"/>
                                 </p:to>
                               </p:set>
-                              <p:animEffect transition="in" filter="fly" prLst="dir=l">
+                              <p:animEffect transition="in" filter="fly(l)" prLst="dir=l">
                                 <p:cBhvr>
                                   <p:cTn id="10" dur="500"/>
                                   <p:tgtEl>
@@ -12704,8 +12704,8 @@
       </p:par>
     </p:tnLst>
     <p:bldLst>
-      <p:bldP spid="3" grpId="0"/>
-      <p:bldP spid="4" grpId="0"/>
+      <p:bldP spid="3" grpId="0" build="allAtOnce"/>
+      <p:bldP spid="4" grpId="0" build="allAtOnce"/>
     </p:bldLst>
   </p:timing>
 </p:sld>
@@ -13031,7 +13031,7 @@
                   <p:par>
                     <p:cTn id="3" fill="hold">
                       <p:stCondLst>
-                        <p:cond delay="0"/>
+                        <p:cond delay="indefinite"/>
                       </p:stCondLst>
                       <p:childTnLst>
                         <p:par>
@@ -13054,7 +13054,7 @@
                                   <p:strVal val="visible"/>
                                 </p:to>
                               </p:set>
-                              <p:animEffect transition="in" filter="fly" prLst="dir=l">
+                              <p:animEffect transition="in" filter="fly(l)" prLst="dir=l">
                                 <p:cBhvr>
                                   <p:cTn id="6" dur="500"/>
                                   <p:tgtEl>
@@ -13076,7 +13076,7 @@
       </p:par>
     </p:tnLst>
     <p:bldLst>
-      <p:bldP spid="3" grpId="0"/>
+      <p:bldP spid="3" grpId="0" build="allAtOnce"/>
     </p:bldLst>
   </p:timing>
 </p:sld>
@@ -13386,7 +13386,7 @@
                   <p:par>
                     <p:cTn id="3" fill="hold">
                       <p:stCondLst>
-                        <p:cond delay="0"/>
+                        <p:cond delay="indefinite"/>
                       </p:stCondLst>
                       <p:childTnLst>
                         <p:par>
@@ -13409,7 +13409,7 @@
                                   <p:strVal val="visible"/>
                                 </p:to>
                               </p:set>
-                              <p:animEffect transition="in" filter="fly" prLst="dir=l">
+                              <p:animEffect transition="in" filter="fly(l)" prLst="dir=l">
                                 <p:cBhvr>
                                   <p:cTn id="6" dur="500"/>
                                   <p:tgtEl>
@@ -13426,7 +13426,7 @@
                   <p:par>
                     <p:cTn id="7" fill="hold">
                       <p:stCondLst>
-                        <p:cond delay="0"/>
+                        <p:cond delay="indefinite"/>
                       </p:stCondLst>
                       <p:childTnLst>
                         <p:par>
@@ -13449,7 +13449,7 @@
                                   <p:strVal val="visible"/>
                                 </p:to>
                               </p:set>
-                              <p:animEffect transition="in" filter="fly" prLst="dir=l">
+                              <p:animEffect transition="in" filter="fly(l)" prLst="dir=l">
                                 <p:cBhvr>
                                   <p:cTn id="10" dur="500"/>
                                   <p:tgtEl>
@@ -13471,8 +13471,8 @@
       </p:par>
     </p:tnLst>
     <p:bldLst>
-      <p:bldP spid="4" grpId="0"/>
-      <p:bldP spid="6" grpId="0"/>
+      <p:bldP spid="4" grpId="0" build="allAtOnce"/>
+      <p:bldP spid="6" grpId="0" build="allAtOnce"/>
     </p:bldLst>
   </p:timing>
 </p:sld>
@@ -13713,7 +13713,7 @@
                   <p:par>
                     <p:cTn id="3" fill="hold">
                       <p:stCondLst>
-                        <p:cond delay="0"/>
+                        <p:cond delay="indefinite"/>
                       </p:stCondLst>
                       <p:childTnLst>
                         <p:par>
@@ -13736,7 +13736,7 @@
                                   <p:strVal val="visible"/>
                                 </p:to>
                               </p:set>
-                              <p:animEffect transition="in" filter="fly" prLst="dir=l">
+                              <p:animEffect transition="in" filter="fly(l)" prLst="dir=l">
                                 <p:cBhvr>
                                   <p:cTn id="6" dur="500"/>
                                   <p:tgtEl>
@@ -13758,7 +13758,7 @@
       </p:par>
     </p:tnLst>
     <p:bldLst>
-      <p:bldP spid="3" grpId="0"/>
+      <p:bldP spid="3" grpId="0" build="allAtOnce"/>
     </p:bldLst>
   </p:timing>
 </p:sld>
@@ -14023,7 +14023,7 @@
                   <p:par>
                     <p:cTn id="3" fill="hold">
                       <p:stCondLst>
-                        <p:cond delay="0"/>
+                        <p:cond delay="indefinite"/>
                       </p:stCondLst>
                       <p:childTnLst>
                         <p:par>
@@ -14046,7 +14046,7 @@
                                   <p:strVal val="visible"/>
                                 </p:to>
                               </p:set>
-                              <p:animEffect transition="in" filter="fly" prLst="dir=l">
+                              <p:animEffect transition="in" filter="fly(l)" prLst="dir=l">
                                 <p:cBhvr>
                                   <p:cTn id="6" dur="500"/>
                                   <p:tgtEl>
@@ -14068,7 +14068,7 @@
       </p:par>
     </p:tnLst>
     <p:bldLst>
-      <p:bldP spid="3" grpId="0"/>
+      <p:bldP spid="3" grpId="0" build="allAtOnce"/>
     </p:bldLst>
   </p:timing>
 </p:sld>
@@ -14383,7 +14383,7 @@
                   <p:par>
                     <p:cTn id="3" fill="hold">
                       <p:stCondLst>
-                        <p:cond delay="0"/>
+                        <p:cond delay="indefinite"/>
                       </p:stCondLst>
                       <p:childTnLst>
                         <p:par>
@@ -14406,7 +14406,7 @@
                                   <p:strVal val="visible"/>
                                 </p:to>
                               </p:set>
-                              <p:animEffect transition="in" filter="fly" prLst="dir=l">
+                              <p:animEffect transition="in" filter="fly(l)" prLst="dir=l">
                                 <p:cBhvr>
                                   <p:cTn id="6" dur="500"/>
                                   <p:tgtEl>
@@ -14428,7 +14428,7 @@
       </p:par>
     </p:tnLst>
     <p:bldLst>
-      <p:bldP spid="3" grpId="0"/>
+      <p:bldP spid="3" grpId="0" build="allAtOnce"/>
     </p:bldLst>
   </p:timing>
 </p:sld>
@@ -14624,7 +14624,7 @@
                   <p:par>
                     <p:cTn id="3" fill="hold">
                       <p:stCondLst>
-                        <p:cond delay="0"/>
+                        <p:cond delay="indefinite"/>
                       </p:stCondLst>
                       <p:childTnLst>
                         <p:par>
@@ -14647,7 +14647,7 @@
                                   <p:strVal val="visible"/>
                                 </p:to>
                               </p:set>
-                              <p:animEffect transition="in" filter="fly" prLst="dir=l">
+                              <p:animEffect transition="in" filter="fly(l)" prLst="dir=l">
                                 <p:cBhvr>
                                   <p:cTn id="6" dur="500"/>
                                   <p:tgtEl>
@@ -14669,7 +14669,7 @@
       </p:par>
     </p:tnLst>
     <p:bldLst>
-      <p:bldP spid="4" grpId="0"/>
+      <p:bldP spid="4" grpId="0" build="allAtOnce"/>
     </p:bldLst>
   </p:timing>
 </p:sld>
@@ -14819,7 +14819,7 @@
                   <p:par>
                     <p:cTn id="3" fill="hold">
                       <p:stCondLst>
-                        <p:cond delay="0"/>
+                        <p:cond delay="indefinite"/>
                       </p:stCondLst>
                       <p:childTnLst>
                         <p:par>
@@ -14842,7 +14842,7 @@
                                   <p:strVal val="visible"/>
                                 </p:to>
                               </p:set>
-                              <p:animEffect transition="in" filter="fly" prLst="dir=l">
+                              <p:animEffect transition="in" filter="fly(l)" prLst="dir=l">
                                 <p:cBhvr>
                                   <p:cTn id="6" dur="500"/>
                                   <p:tgtEl>
@@ -14864,7 +14864,7 @@
       </p:par>
     </p:tnLst>
     <p:bldLst>
-      <p:bldP spid="3" grpId="0"/>
+      <p:bldP spid="3" grpId="0" build="allAtOnce"/>
     </p:bldLst>
   </p:timing>
 </p:sld>
@@ -15175,7 +15175,7 @@
                   <p:par>
                     <p:cTn id="3" fill="hold">
                       <p:stCondLst>
-                        <p:cond delay="0"/>
+                        <p:cond delay="indefinite"/>
                       </p:stCondLst>
                       <p:childTnLst>
                         <p:par>
@@ -15198,7 +15198,7 @@
                                   <p:strVal val="visible"/>
                                 </p:to>
                               </p:set>
-                              <p:animEffect transition="in" filter="fly" prLst="dir=l">
+                              <p:animEffect transition="in" filter="fly(l)" prLst="dir=l">
                                 <p:cBhvr>
                                   <p:cTn id="6" dur="500"/>
                                   <p:tgtEl>
@@ -15215,7 +15215,7 @@
                   <p:par>
                     <p:cTn id="7" fill="hold">
                       <p:stCondLst>
-                        <p:cond delay="0"/>
+                        <p:cond delay="indefinite"/>
                       </p:stCondLst>
                       <p:childTnLst>
                         <p:par>
@@ -15238,7 +15238,7 @@
                                   <p:strVal val="visible"/>
                                 </p:to>
                               </p:set>
-                              <p:animEffect transition="in" filter="fly" prLst="dir=l">
+                              <p:animEffect transition="in" filter="fly(l)" prLst="dir=l">
                                 <p:cBhvr>
                                   <p:cTn id="10" dur="500"/>
                                   <p:tgtEl>
@@ -15260,8 +15260,8 @@
       </p:par>
     </p:tnLst>
     <p:bldLst>
-      <p:bldP spid="4" grpId="0"/>
-      <p:bldP spid="6" grpId="0"/>
+      <p:bldP spid="4" grpId="0" build="allAtOnce"/>
+      <p:bldP spid="6" grpId="0" build="allAtOnce"/>
     </p:bldLst>
   </p:timing>
 </p:sld>
@@ -15574,7 +15574,7 @@
                   <p:par>
                     <p:cTn id="3" fill="hold">
                       <p:stCondLst>
-                        <p:cond delay="0"/>
+                        <p:cond delay="indefinite"/>
                       </p:stCondLst>
                       <p:childTnLst>
                         <p:par>
@@ -15597,7 +15597,7 @@
                                   <p:strVal val="visible"/>
                                 </p:to>
                               </p:set>
-                              <p:animEffect transition="in" filter="fly" prLst="dir=l">
+                              <p:animEffect transition="in" filter="fly(l)" prLst="dir=l">
                                 <p:cBhvr>
                                   <p:cTn id="6" dur="500"/>
                                   <p:tgtEl>
@@ -15614,7 +15614,7 @@
                   <p:par>
                     <p:cTn id="7" fill="hold">
                       <p:stCondLst>
-                        <p:cond delay="0"/>
+                        <p:cond delay="indefinite"/>
                       </p:stCondLst>
                       <p:childTnLst>
                         <p:par>
@@ -15637,7 +15637,7 @@
                                   <p:strVal val="visible"/>
                                 </p:to>
                               </p:set>
-                              <p:animEffect transition="in" filter="fly" prLst="dir=l">
+                              <p:animEffect transition="in" filter="fly(l)" prLst="dir=l">
                                 <p:cBhvr>
                                   <p:cTn id="10" dur="500"/>
                                   <p:tgtEl>
@@ -15659,8 +15659,8 @@
       </p:par>
     </p:tnLst>
     <p:bldLst>
-      <p:bldP spid="4" grpId="0"/>
-      <p:bldP spid="6" grpId="0"/>
+      <p:bldP spid="4" grpId="0" build="allAtOnce"/>
+      <p:bldP spid="6" grpId="0" build="allAtOnce"/>
     </p:bldLst>
   </p:timing>
 </p:sld>
@@ -15857,7 +15857,7 @@
                   <p:par>
                     <p:cTn id="3" fill="hold">
                       <p:stCondLst>
-                        <p:cond delay="0"/>
+                        <p:cond delay="indefinite"/>
                       </p:stCondLst>
                       <p:childTnLst>
                         <p:par>
@@ -15880,7 +15880,7 @@
                                   <p:strVal val="visible"/>
                                 </p:to>
                               </p:set>
-                              <p:animEffect transition="in" filter="fly" prLst="dir=l">
+                              <p:animEffect transition="in" filter="fly(l)" prLst="dir=l">
                                 <p:cBhvr>
                                   <p:cTn id="6" dur="500"/>
                                   <p:tgtEl>
@@ -15902,7 +15902,7 @@
       </p:par>
     </p:tnLst>
     <p:bldLst>
-      <p:bldP spid="4" grpId="0"/>
+      <p:bldP spid="4" grpId="0" build="allAtOnce"/>
     </p:bldLst>
   </p:timing>
 </p:sld>
@@ -16049,7 +16049,7 @@
                   <p:par>
                     <p:cTn id="3" fill="hold">
                       <p:stCondLst>
-                        <p:cond delay="0"/>
+                        <p:cond delay="indefinite"/>
                       </p:stCondLst>
                       <p:childTnLst>
                         <p:par>
@@ -16072,7 +16072,7 @@
                                   <p:strVal val="visible"/>
                                 </p:to>
                               </p:set>
-                              <p:animEffect transition="in" filter="fly" prLst="dir=l">
+                              <p:animEffect transition="in" filter="fly(l)" prLst="dir=l">
                                 <p:cBhvr>
                                   <p:cTn id="6" dur="500"/>
                                   <p:tgtEl>
@@ -16094,7 +16094,7 @@
       </p:par>
     </p:tnLst>
     <p:bldLst>
-      <p:bldP spid="3" grpId="0"/>
+      <p:bldP spid="3" grpId="0" build="allAtOnce"/>
     </p:bldLst>
   </p:timing>
 </p:sld>
@@ -16293,7 +16293,7 @@
                   <p:par>
                     <p:cTn id="3" fill="hold">
                       <p:stCondLst>
-                        <p:cond delay="0"/>
+                        <p:cond delay="indefinite"/>
                       </p:stCondLst>
                       <p:childTnLst>
                         <p:par>
@@ -16316,7 +16316,7 @@
                                   <p:strVal val="visible"/>
                                 </p:to>
                               </p:set>
-                              <p:animEffect transition="in" filter="fly" prLst="dir=l">
+                              <p:animEffect transition="in" filter="fly(l)" prLst="dir=l">
                                 <p:cBhvr>
                                   <p:cTn id="6" dur="500"/>
                                   <p:tgtEl>
@@ -16338,7 +16338,7 @@
       </p:par>
     </p:tnLst>
     <p:bldLst>
-      <p:bldP spid="4" grpId="0"/>
+      <p:bldP spid="4" grpId="0" build="allAtOnce"/>
     </p:bldLst>
   </p:timing>
 </p:sld>
@@ -16488,7 +16488,7 @@
                   <p:par>
                     <p:cTn id="3" fill="hold">
                       <p:stCondLst>
-                        <p:cond delay="0"/>
+                        <p:cond delay="indefinite"/>
                       </p:stCondLst>
                       <p:childTnLst>
                         <p:par>
@@ -16511,7 +16511,7 @@
                                   <p:strVal val="visible"/>
                                 </p:to>
                               </p:set>
-                              <p:animEffect transition="in" filter="fly" prLst="dir=l">
+                              <p:animEffect transition="in" filter="fly(l)" prLst="dir=l">
                                 <p:cBhvr>
                                   <p:cTn id="6" dur="500"/>
                                   <p:tgtEl>
@@ -16533,7 +16533,7 @@
       </p:par>
     </p:tnLst>
     <p:bldLst>
-      <p:bldP spid="3" grpId="0"/>
+      <p:bldP spid="3" grpId="0" build="allAtOnce"/>
     </p:bldLst>
   </p:timing>
 </p:sld>
@@ -16799,7 +16799,7 @@
                   <p:par>
                     <p:cTn id="3" fill="hold">
                       <p:stCondLst>
-                        <p:cond delay="0"/>
+                        <p:cond delay="indefinite"/>
                       </p:stCondLst>
                       <p:childTnLst>
                         <p:par>
@@ -16822,7 +16822,7 @@
                                   <p:strVal val="visible"/>
                                 </p:to>
                               </p:set>
-                              <p:animEffect transition="in" filter="fly" prLst="dir=l">
+                              <p:animEffect transition="in" filter="fly(l)" prLst="dir=l">
                                 <p:cBhvr>
                                   <p:cTn id="6" dur="500"/>
                                   <p:tgtEl>
@@ -16844,7 +16844,7 @@
       </p:par>
     </p:tnLst>
     <p:bldLst>
-      <p:bldP spid="3" grpId="0"/>
+      <p:bldP spid="3" grpId="0" build="allAtOnce"/>
     </p:bldLst>
   </p:timing>
 </p:sld>
@@ -16930,7 +16930,7 @@
                   <p:par>
                     <p:cTn id="3" fill="hold">
                       <p:stCondLst>
-                        <p:cond delay="0"/>
+                        <p:cond delay="indefinite"/>
                       </p:stCondLst>
                       <p:childTnLst>
                         <p:par>
@@ -16953,7 +16953,7 @@
                                   <p:strVal val="visible"/>
                                 </p:to>
                               </p:set>
-                              <p:animEffect transition="in" filter="fly" prLst="dir=l">
+                              <p:animEffect transition="in" filter="fly(l)" prLst="dir=l">
                                 <p:cBhvr>
                                   <p:cTn id="6" dur="500"/>
                                   <p:tgtEl>
@@ -16975,7 +16975,7 @@
       </p:par>
     </p:tnLst>
     <p:bldLst>
-      <p:bldP spid="2" grpId="0"/>
+      <p:bldP spid="2" grpId="0" build="allAtOnce"/>
     </p:bldLst>
   </p:timing>
 </p:sld>
@@ -17126,7 +17126,7 @@
                   <p:par>
                     <p:cTn id="3" fill="hold">
                       <p:stCondLst>
-                        <p:cond delay="0"/>
+                        <p:cond delay="indefinite"/>
                       </p:stCondLst>
                       <p:childTnLst>
                         <p:par>
@@ -17149,7 +17149,7 @@
                                   <p:strVal val="visible"/>
                                 </p:to>
                               </p:set>
-                              <p:animEffect transition="in" filter="fly" prLst="dir=l">
+                              <p:animEffect transition="in" filter="fly(l)" prLst="dir=l">
                                 <p:cBhvr>
                                   <p:cTn id="6" dur="500"/>
                                   <p:tgtEl>
@@ -17171,7 +17171,7 @@
       </p:par>
     </p:tnLst>
     <p:bldLst>
-      <p:bldP spid="3" grpId="0"/>
+      <p:bldP spid="3" grpId="0" build="allAtOnce"/>
     </p:bldLst>
   </p:timing>
 </p:sld>
@@ -17731,7 +17731,7 @@
                   <p:par>
                     <p:cTn id="3" fill="hold">
                       <p:stCondLst>
-                        <p:cond delay="0"/>
+                        <p:cond delay="indefinite"/>
                       </p:stCondLst>
                       <p:childTnLst>
                         <p:par>
@@ -17754,7 +17754,7 @@
                                   <p:strVal val="visible"/>
                                 </p:to>
                               </p:set>
-                              <p:animEffect transition="in" filter="fly" prLst="dir=l">
+                              <p:animEffect transition="in" filter="fly(l)" prLst="dir=l">
                                 <p:cBhvr>
                                   <p:cTn id="6" dur="500"/>
                                   <p:tgtEl>
@@ -17776,7 +17776,7 @@
       </p:par>
     </p:tnLst>
     <p:bldLst>
-      <p:bldP spid="3" grpId="0"/>
+      <p:bldP spid="3" grpId="0" build="allAtOnce"/>
     </p:bldLst>
   </p:timing>
 </p:sld>
@@ -18353,7 +18353,7 @@
                   <p:par>
                     <p:cTn id="3" fill="hold">
                       <p:stCondLst>
-                        <p:cond delay="0"/>
+                        <p:cond delay="indefinite"/>
                       </p:stCondLst>
                       <p:childTnLst>
                         <p:par>
@@ -18376,7 +18376,7 @@
                                   <p:strVal val="visible"/>
                                 </p:to>
                               </p:set>
-                              <p:animEffect transition="in" filter="fly" prLst="dir=l">
+                              <p:animEffect transition="in" filter="fly(l)" prLst="dir=l">
                                 <p:cBhvr>
                                   <p:cTn id="6" dur="500"/>
                                   <p:tgtEl>
@@ -18398,7 +18398,7 @@
       </p:par>
     </p:tnLst>
     <p:bldLst>
-      <p:bldP spid="3" grpId="0"/>
+      <p:bldP spid="3" grpId="0" build="allAtOnce"/>
     </p:bldLst>
   </p:timing>
 </p:sld>
@@ -18484,7 +18484,7 @@
                   <p:par>
                     <p:cTn id="3" fill="hold">
                       <p:stCondLst>
-                        <p:cond delay="0"/>
+                        <p:cond delay="indefinite"/>
                       </p:stCondLst>
                       <p:childTnLst>
                         <p:par>
@@ -18507,7 +18507,7 @@
                                   <p:strVal val="visible"/>
                                 </p:to>
                               </p:set>
-                              <p:animEffect transition="in" filter="fly" prLst="dir=l">
+                              <p:animEffect transition="in" filter="fly(l)" prLst="dir=l">
                                 <p:cBhvr>
                                   <p:cTn id="6" dur="500"/>
                                   <p:tgtEl>
@@ -18529,7 +18529,7 @@
       </p:par>
     </p:tnLst>
     <p:bldLst>
-      <p:bldP spid="2" grpId="0"/>
+      <p:bldP spid="2" grpId="0" build="allAtOnce"/>
     </p:bldLst>
   </p:timing>
 </p:sld>
@@ -18759,7 +18759,7 @@
                   <p:par>
                     <p:cTn id="3" fill="hold">
                       <p:stCondLst>
-                        <p:cond delay="0"/>
+                        <p:cond delay="indefinite"/>
                       </p:stCondLst>
                       <p:childTnLst>
                         <p:par>
@@ -18782,7 +18782,7 @@
                                   <p:strVal val="visible"/>
                                 </p:to>
                               </p:set>
-                              <p:animEffect transition="in" filter="fly" prLst="dir=l">
+                              <p:animEffect transition="in" filter="fly(l)" prLst="dir=l">
                                 <p:cBhvr>
                                   <p:cTn id="6" dur="500"/>
                                   <p:tgtEl>
@@ -18804,7 +18804,7 @@
       </p:par>
     </p:tnLst>
     <p:bldLst>
-      <p:bldP spid="3" grpId="0"/>
+      <p:bldP spid="3" grpId="0" build="allAtOnce"/>
     </p:bldLst>
   </p:timing>
 </p:sld>

--- a/mypaper_answers.pptx
+++ b/mypaper_answers.pptx
@@ -3450,7 +3450,7 @@
   <p:timing>
     <p:tnLst>
       <p:par>
-        <p:cTn id="1" dur="indefinite" restart="never" nodeType="tmRoot">
+        <p:cTn id="1" restart="never" nodeType="tmRoot">
           <p:childTnLst>
             <p:seq concurrent="1" nextAc="seek">
               <p:cTn id="2" dur="indefinite" nodeType="mainSeq">
@@ -3462,33 +3462,84 @@
                       </p:stCondLst>
                       <p:childTnLst>
                         <p:par>
-                          <p:cTn id="4" presetID="2" presetClass="entr" presetSubtype="4" fill="hold" grpId="0" nodeType="clickEffect">
+                          <p:cTn id="4" fill="hold">
                             <p:stCondLst>
                               <p:cond delay="0"/>
                             </p:stCondLst>
                             <p:childTnLst>
-                              <p:set>
-                                <p:cBhvr>
-                                  <p:cTn id="5" dur="1" fill="hold"/>
-                                  <p:tgtEl>
-                                    <p:spTgt spid="4"/>
-                                  </p:tgtEl>
-                                  <p:attrNameLst>
-                                    <p:attrName>style.visibility</p:attrName>
-                                  </p:attrNameLst>
-                                </p:cBhvr>
-                                <p:to>
-                                  <p:strVal val="visible"/>
-                                </p:to>
-                              </p:set>
-                              <p:animEffect transition="in" filter="fly(l)" prLst="dir=l">
-                                <p:cBhvr>
-                                  <p:cTn id="6" dur="500"/>
-                                  <p:tgtEl>
-                                    <p:spTgt spid="4"/>
-                                  </p:tgtEl>
-                                </p:cBhvr>
-                              </p:animEffect>
+                              <p:par>
+                                <p:cTn id="5" presetID="2" presetClass="entr" presetSubtype="8" fill="hold" grpId="0" nodeType="clickEffect">
+                                  <p:stCondLst>
+                                    <p:cond delay="0"/>
+                                  </p:stCondLst>
+                                  <p:childTnLst>
+                                    <p:set>
+                                      <p:cBhvr>
+                                        <p:cTn id="6" dur="1" fill="hold">
+                                          <p:stCondLst>
+                                            <p:cond delay="0"/>
+                                          </p:stCondLst>
+                                        </p:cTn>
+                                        <p:tgtEl>
+                                          <p:spTgt spid="4"/>
+                                        </p:tgtEl>
+                                        <p:attrNameLst>
+                                          <p:attrName>style.visibility</p:attrName>
+                                        </p:attrNameLst>
+                                      </p:cBhvr>
+                                      <p:to>
+                                        <p:strVal val="visible"/>
+                                      </p:to>
+                                    </p:set>
+                                    <p:anim calcmode="lin" valueType="num">
+                                      <p:cBhvr additive="base">
+                                        <p:cTn id="7" dur="500" fill="hold"/>
+                                        <p:tgtEl>
+                                          <p:spTgt spid="4"/>
+                                        </p:tgtEl>
+                                        <p:attrNameLst>
+                                          <p:attrName>ppt_x</p:attrName>
+                                        </p:attrNameLst>
+                                      </p:cBhvr>
+                                      <p:tavLst>
+                                        <p:tav tm="0">
+                                          <p:val>
+                                            <p:strVal val="0-#ppt_w/2"/>
+                                          </p:val>
+                                        </p:tav>
+                                        <p:tav tm="100000">
+                                          <p:val>
+                                            <p:strVal val="#ppt_x"/>
+                                          </p:val>
+                                        </p:tav>
+                                      </p:tavLst>
+                                    </p:anim>
+                                    <p:anim calcmode="lin" valueType="num">
+                                      <p:cBhvr additive="base">
+                                        <p:cTn id="8" dur="500" fill="hold"/>
+                                        <p:tgtEl>
+                                          <p:spTgt spid="4"/>
+                                        </p:tgtEl>
+                                        <p:attrNameLst>
+                                          <p:attrName>ppt_y</p:attrName>
+                                        </p:attrNameLst>
+                                      </p:cBhvr>
+                                      <p:tavLst>
+                                        <p:tav tm="0">
+                                          <p:val>
+                                            <p:strVal val="#ppt_y"/>
+                                          </p:val>
+                                        </p:tav>
+                                        <p:tav tm="100000">
+                                          <p:val>
+                                            <p:strVal val="#ppt_y"/>
+                                          </p:val>
+                                        </p:tav>
+                                      </p:tavLst>
+                                    </p:anim>
+                                  </p:childTnLst>
+                                </p:cTn>
+                              </p:par>
                             </p:childTnLst>
                           </p:cTn>
                         </p:par>
@@ -3496,39 +3547,90 @@
                     </p:cTn>
                   </p:par>
                   <p:par>
-                    <p:cTn id="7" fill="hold">
+                    <p:cTn id="9" fill="hold">
                       <p:stCondLst>
                         <p:cond delay="indefinite"/>
                       </p:stCondLst>
                       <p:childTnLst>
                         <p:par>
-                          <p:cTn id="8" presetID="2" presetClass="entr" presetSubtype="4" fill="hold" grpId="0" nodeType="clickEffect">
+                          <p:cTn id="10" fill="hold">
                             <p:stCondLst>
                               <p:cond delay="0"/>
                             </p:stCondLst>
                             <p:childTnLst>
-                              <p:set>
-                                <p:cBhvr>
-                                  <p:cTn id="9" dur="1" fill="hold"/>
-                                  <p:tgtEl>
-                                    <p:spTgt spid="6"/>
-                                  </p:tgtEl>
-                                  <p:attrNameLst>
-                                    <p:attrName>style.visibility</p:attrName>
-                                  </p:attrNameLst>
-                                </p:cBhvr>
-                                <p:to>
-                                  <p:strVal val="visible"/>
-                                </p:to>
-                              </p:set>
-                              <p:animEffect transition="in" filter="fly(l)" prLst="dir=l">
-                                <p:cBhvr>
-                                  <p:cTn id="10" dur="500"/>
-                                  <p:tgtEl>
-                                    <p:spTgt spid="6"/>
-                                  </p:tgtEl>
-                                </p:cBhvr>
-                              </p:animEffect>
+                              <p:par>
+                                <p:cTn id="11" presetID="2" presetClass="entr" presetSubtype="8" fill="hold" grpId="0" nodeType="clickEffect">
+                                  <p:stCondLst>
+                                    <p:cond delay="0"/>
+                                  </p:stCondLst>
+                                  <p:childTnLst>
+                                    <p:set>
+                                      <p:cBhvr>
+                                        <p:cTn id="12" dur="1" fill="hold">
+                                          <p:stCondLst>
+                                            <p:cond delay="0"/>
+                                          </p:stCondLst>
+                                        </p:cTn>
+                                        <p:tgtEl>
+                                          <p:spTgt spid="6"/>
+                                        </p:tgtEl>
+                                        <p:attrNameLst>
+                                          <p:attrName>style.visibility</p:attrName>
+                                        </p:attrNameLst>
+                                      </p:cBhvr>
+                                      <p:to>
+                                        <p:strVal val="visible"/>
+                                      </p:to>
+                                    </p:set>
+                                    <p:anim calcmode="lin" valueType="num">
+                                      <p:cBhvr additive="base">
+                                        <p:cTn id="13" dur="500" fill="hold"/>
+                                        <p:tgtEl>
+                                          <p:spTgt spid="6"/>
+                                        </p:tgtEl>
+                                        <p:attrNameLst>
+                                          <p:attrName>ppt_x</p:attrName>
+                                        </p:attrNameLst>
+                                      </p:cBhvr>
+                                      <p:tavLst>
+                                        <p:tav tm="0">
+                                          <p:val>
+                                            <p:strVal val="0-#ppt_w/2"/>
+                                          </p:val>
+                                        </p:tav>
+                                        <p:tav tm="100000">
+                                          <p:val>
+                                            <p:strVal val="#ppt_x"/>
+                                          </p:val>
+                                        </p:tav>
+                                      </p:tavLst>
+                                    </p:anim>
+                                    <p:anim calcmode="lin" valueType="num">
+                                      <p:cBhvr additive="base">
+                                        <p:cTn id="14" dur="500" fill="hold"/>
+                                        <p:tgtEl>
+                                          <p:spTgt spid="6"/>
+                                        </p:tgtEl>
+                                        <p:attrNameLst>
+                                          <p:attrName>ppt_y</p:attrName>
+                                        </p:attrNameLst>
+                                      </p:cBhvr>
+                                      <p:tavLst>
+                                        <p:tav tm="0">
+                                          <p:val>
+                                            <p:strVal val="#ppt_y"/>
+                                          </p:val>
+                                        </p:tav>
+                                        <p:tav tm="100000">
+                                          <p:val>
+                                            <p:strVal val="#ppt_y"/>
+                                          </p:val>
+                                        </p:tav>
+                                      </p:tavLst>
+                                    </p:anim>
+                                  </p:childTnLst>
+                                </p:cTn>
+                              </p:par>
                             </p:childTnLst>
                           </p:cTn>
                         </p:par>
@@ -3537,14 +3639,28 @@
                   </p:par>
                 </p:childTnLst>
               </p:cTn>
+              <p:prevCondLst>
+                <p:cond evt="onPrev" delay="0">
+                  <p:tgtEl>
+                    <p:sldTgt/>
+                  </p:tgtEl>
+                </p:cond>
+              </p:prevCondLst>
+              <p:nextCondLst>
+                <p:cond evt="onNext" delay="0">
+                  <p:tgtEl>
+                    <p:sldTgt/>
+                  </p:tgtEl>
+                </p:cond>
+              </p:nextCondLst>
             </p:seq>
           </p:childTnLst>
         </p:cTn>
       </p:par>
     </p:tnLst>
     <p:bldLst>
-      <p:bldP spid="4" grpId="0" build="allAtOnce"/>
-      <p:bldP spid="6" grpId="0" build="allAtOnce"/>
+      <p:bldP spid="4" grpId="0" uiExpand="0" advAuto="indefinite" build="whole" animBg="1"/>
+      <p:bldP spid="6" grpId="0" uiExpand="0" advAuto="indefinite" build="whole" animBg="1"/>
     </p:bldLst>
   </p:timing>
 </p:sld>
@@ -3855,7 +3971,7 @@
   <p:timing>
     <p:tnLst>
       <p:par>
-        <p:cTn id="1" dur="indefinite" restart="never" nodeType="tmRoot">
+        <p:cTn id="1" restart="never" nodeType="tmRoot">
           <p:childTnLst>
             <p:seq concurrent="1" nextAc="seek">
               <p:cTn id="2" dur="indefinite" nodeType="mainSeq">
@@ -3867,33 +3983,84 @@
                       </p:stCondLst>
                       <p:childTnLst>
                         <p:par>
-                          <p:cTn id="4" presetID="2" presetClass="entr" presetSubtype="4" fill="hold" grpId="0" nodeType="clickEffect">
+                          <p:cTn id="4" fill="hold">
                             <p:stCondLst>
                               <p:cond delay="0"/>
                             </p:stCondLst>
                             <p:childTnLst>
-                              <p:set>
-                                <p:cBhvr>
-                                  <p:cTn id="5" dur="1" fill="hold"/>
-                                  <p:tgtEl>
-                                    <p:spTgt spid="3"/>
-                                  </p:tgtEl>
-                                  <p:attrNameLst>
-                                    <p:attrName>style.visibility</p:attrName>
-                                  </p:attrNameLst>
-                                </p:cBhvr>
-                                <p:to>
-                                  <p:strVal val="visible"/>
-                                </p:to>
-                              </p:set>
-                              <p:animEffect transition="in" filter="fly(l)" prLst="dir=l">
-                                <p:cBhvr>
-                                  <p:cTn id="6" dur="500"/>
-                                  <p:tgtEl>
-                                    <p:spTgt spid="3"/>
-                                  </p:tgtEl>
-                                </p:cBhvr>
-                              </p:animEffect>
+                              <p:par>
+                                <p:cTn id="5" presetID="2" presetClass="entr" presetSubtype="8" fill="hold" grpId="0" nodeType="clickEffect">
+                                  <p:stCondLst>
+                                    <p:cond delay="0"/>
+                                  </p:stCondLst>
+                                  <p:childTnLst>
+                                    <p:set>
+                                      <p:cBhvr>
+                                        <p:cTn id="6" dur="1" fill="hold">
+                                          <p:stCondLst>
+                                            <p:cond delay="0"/>
+                                          </p:stCondLst>
+                                        </p:cTn>
+                                        <p:tgtEl>
+                                          <p:spTgt spid="3"/>
+                                        </p:tgtEl>
+                                        <p:attrNameLst>
+                                          <p:attrName>style.visibility</p:attrName>
+                                        </p:attrNameLst>
+                                      </p:cBhvr>
+                                      <p:to>
+                                        <p:strVal val="visible"/>
+                                      </p:to>
+                                    </p:set>
+                                    <p:anim calcmode="lin" valueType="num">
+                                      <p:cBhvr additive="base">
+                                        <p:cTn id="7" dur="500" fill="hold"/>
+                                        <p:tgtEl>
+                                          <p:spTgt spid="3"/>
+                                        </p:tgtEl>
+                                        <p:attrNameLst>
+                                          <p:attrName>ppt_x</p:attrName>
+                                        </p:attrNameLst>
+                                      </p:cBhvr>
+                                      <p:tavLst>
+                                        <p:tav tm="0">
+                                          <p:val>
+                                            <p:strVal val="0-#ppt_w/2"/>
+                                          </p:val>
+                                        </p:tav>
+                                        <p:tav tm="100000">
+                                          <p:val>
+                                            <p:strVal val="#ppt_x"/>
+                                          </p:val>
+                                        </p:tav>
+                                      </p:tavLst>
+                                    </p:anim>
+                                    <p:anim calcmode="lin" valueType="num">
+                                      <p:cBhvr additive="base">
+                                        <p:cTn id="8" dur="500" fill="hold"/>
+                                        <p:tgtEl>
+                                          <p:spTgt spid="3"/>
+                                        </p:tgtEl>
+                                        <p:attrNameLst>
+                                          <p:attrName>ppt_y</p:attrName>
+                                        </p:attrNameLst>
+                                      </p:cBhvr>
+                                      <p:tavLst>
+                                        <p:tav tm="0">
+                                          <p:val>
+                                            <p:strVal val="#ppt_y"/>
+                                          </p:val>
+                                        </p:tav>
+                                        <p:tav tm="100000">
+                                          <p:val>
+                                            <p:strVal val="#ppt_y"/>
+                                          </p:val>
+                                        </p:tav>
+                                      </p:tavLst>
+                                    </p:anim>
+                                  </p:childTnLst>
+                                </p:cTn>
+                              </p:par>
                             </p:childTnLst>
                           </p:cTn>
                         </p:par>
@@ -3902,13 +4069,27 @@
                   </p:par>
                 </p:childTnLst>
               </p:cTn>
+              <p:prevCondLst>
+                <p:cond evt="onPrev" delay="0">
+                  <p:tgtEl>
+                    <p:sldTgt/>
+                  </p:tgtEl>
+                </p:cond>
+              </p:prevCondLst>
+              <p:nextCondLst>
+                <p:cond evt="onNext" delay="0">
+                  <p:tgtEl>
+                    <p:sldTgt/>
+                  </p:tgtEl>
+                </p:cond>
+              </p:nextCondLst>
             </p:seq>
           </p:childTnLst>
         </p:cTn>
       </p:par>
     </p:tnLst>
     <p:bldLst>
-      <p:bldP spid="3" grpId="0" build="allAtOnce"/>
+      <p:bldP spid="3" grpId="0" uiExpand="0" advAuto="indefinite" build="whole" animBg="1"/>
     </p:bldLst>
   </p:timing>
 </p:sld>
@@ -4162,7 +4343,7 @@
   <p:timing>
     <p:tnLst>
       <p:par>
-        <p:cTn id="1" dur="indefinite" restart="never" nodeType="tmRoot">
+        <p:cTn id="1" restart="never" nodeType="tmRoot">
           <p:childTnLst>
             <p:seq concurrent="1" nextAc="seek">
               <p:cTn id="2" dur="indefinite" nodeType="mainSeq">
@@ -4174,33 +4355,84 @@
                       </p:stCondLst>
                       <p:childTnLst>
                         <p:par>
-                          <p:cTn id="4" presetID="2" presetClass="entr" presetSubtype="4" fill="hold" grpId="0" nodeType="clickEffect">
+                          <p:cTn id="4" fill="hold">
                             <p:stCondLst>
                               <p:cond delay="0"/>
                             </p:stCondLst>
                             <p:childTnLst>
-                              <p:set>
-                                <p:cBhvr>
-                                  <p:cTn id="5" dur="1" fill="hold"/>
-                                  <p:tgtEl>
-                                    <p:spTgt spid="3"/>
-                                  </p:tgtEl>
-                                  <p:attrNameLst>
-                                    <p:attrName>style.visibility</p:attrName>
-                                  </p:attrNameLst>
-                                </p:cBhvr>
-                                <p:to>
-                                  <p:strVal val="visible"/>
-                                </p:to>
-                              </p:set>
-                              <p:animEffect transition="in" filter="fly(l)" prLst="dir=l">
-                                <p:cBhvr>
-                                  <p:cTn id="6" dur="500"/>
-                                  <p:tgtEl>
-                                    <p:spTgt spid="3"/>
-                                  </p:tgtEl>
-                                </p:cBhvr>
-                              </p:animEffect>
+                              <p:par>
+                                <p:cTn id="5" presetID="2" presetClass="entr" presetSubtype="8" fill="hold" grpId="0" nodeType="clickEffect">
+                                  <p:stCondLst>
+                                    <p:cond delay="0"/>
+                                  </p:stCondLst>
+                                  <p:childTnLst>
+                                    <p:set>
+                                      <p:cBhvr>
+                                        <p:cTn id="6" dur="1" fill="hold">
+                                          <p:stCondLst>
+                                            <p:cond delay="0"/>
+                                          </p:stCondLst>
+                                        </p:cTn>
+                                        <p:tgtEl>
+                                          <p:spTgt spid="3"/>
+                                        </p:tgtEl>
+                                        <p:attrNameLst>
+                                          <p:attrName>style.visibility</p:attrName>
+                                        </p:attrNameLst>
+                                      </p:cBhvr>
+                                      <p:to>
+                                        <p:strVal val="visible"/>
+                                      </p:to>
+                                    </p:set>
+                                    <p:anim calcmode="lin" valueType="num">
+                                      <p:cBhvr additive="base">
+                                        <p:cTn id="7" dur="500" fill="hold"/>
+                                        <p:tgtEl>
+                                          <p:spTgt spid="3"/>
+                                        </p:tgtEl>
+                                        <p:attrNameLst>
+                                          <p:attrName>ppt_x</p:attrName>
+                                        </p:attrNameLst>
+                                      </p:cBhvr>
+                                      <p:tavLst>
+                                        <p:tav tm="0">
+                                          <p:val>
+                                            <p:strVal val="0-#ppt_w/2"/>
+                                          </p:val>
+                                        </p:tav>
+                                        <p:tav tm="100000">
+                                          <p:val>
+                                            <p:strVal val="#ppt_x"/>
+                                          </p:val>
+                                        </p:tav>
+                                      </p:tavLst>
+                                    </p:anim>
+                                    <p:anim calcmode="lin" valueType="num">
+                                      <p:cBhvr additive="base">
+                                        <p:cTn id="8" dur="500" fill="hold"/>
+                                        <p:tgtEl>
+                                          <p:spTgt spid="3"/>
+                                        </p:tgtEl>
+                                        <p:attrNameLst>
+                                          <p:attrName>ppt_y</p:attrName>
+                                        </p:attrNameLst>
+                                      </p:cBhvr>
+                                      <p:tavLst>
+                                        <p:tav tm="0">
+                                          <p:val>
+                                            <p:strVal val="#ppt_y"/>
+                                          </p:val>
+                                        </p:tav>
+                                        <p:tav tm="100000">
+                                          <p:val>
+                                            <p:strVal val="#ppt_y"/>
+                                          </p:val>
+                                        </p:tav>
+                                      </p:tavLst>
+                                    </p:anim>
+                                  </p:childTnLst>
+                                </p:cTn>
+                              </p:par>
                             </p:childTnLst>
                           </p:cTn>
                         </p:par>
@@ -4209,13 +4441,27 @@
                   </p:par>
                 </p:childTnLst>
               </p:cTn>
+              <p:prevCondLst>
+                <p:cond evt="onPrev" delay="0">
+                  <p:tgtEl>
+                    <p:sldTgt/>
+                  </p:tgtEl>
+                </p:cond>
+              </p:prevCondLst>
+              <p:nextCondLst>
+                <p:cond evt="onNext" delay="0">
+                  <p:tgtEl>
+                    <p:sldTgt/>
+                  </p:tgtEl>
+                </p:cond>
+              </p:nextCondLst>
             </p:seq>
           </p:childTnLst>
         </p:cTn>
       </p:par>
     </p:tnLst>
     <p:bldLst>
-      <p:bldP spid="3" grpId="0" build="allAtOnce"/>
+      <p:bldP spid="3" grpId="0" uiExpand="0" advAuto="indefinite" build="whole" animBg="1"/>
     </p:bldLst>
   </p:timing>
 </p:sld>
@@ -4517,7 +4763,7 @@
   <p:timing>
     <p:tnLst>
       <p:par>
-        <p:cTn id="1" dur="indefinite" restart="never" nodeType="tmRoot">
+        <p:cTn id="1" restart="never" nodeType="tmRoot">
           <p:childTnLst>
             <p:seq concurrent="1" nextAc="seek">
               <p:cTn id="2" dur="indefinite" nodeType="mainSeq">
@@ -4529,33 +4775,84 @@
                       </p:stCondLst>
                       <p:childTnLst>
                         <p:par>
-                          <p:cTn id="4" presetID="2" presetClass="entr" presetSubtype="4" fill="hold" grpId="0" nodeType="clickEffect">
+                          <p:cTn id="4" fill="hold">
                             <p:stCondLst>
                               <p:cond delay="0"/>
                             </p:stCondLst>
                             <p:childTnLst>
-                              <p:set>
-                                <p:cBhvr>
-                                  <p:cTn id="5" dur="1" fill="hold"/>
-                                  <p:tgtEl>
-                                    <p:spTgt spid="3"/>
-                                  </p:tgtEl>
-                                  <p:attrNameLst>
-                                    <p:attrName>style.visibility</p:attrName>
-                                  </p:attrNameLst>
-                                </p:cBhvr>
-                                <p:to>
-                                  <p:strVal val="visible"/>
-                                </p:to>
-                              </p:set>
-                              <p:animEffect transition="in" filter="fly(l)" prLst="dir=l">
-                                <p:cBhvr>
-                                  <p:cTn id="6" dur="500"/>
-                                  <p:tgtEl>
-                                    <p:spTgt spid="3"/>
-                                  </p:tgtEl>
-                                </p:cBhvr>
-                              </p:animEffect>
+                              <p:par>
+                                <p:cTn id="5" presetID="2" presetClass="entr" presetSubtype="8" fill="hold" grpId="0" nodeType="clickEffect">
+                                  <p:stCondLst>
+                                    <p:cond delay="0"/>
+                                  </p:stCondLst>
+                                  <p:childTnLst>
+                                    <p:set>
+                                      <p:cBhvr>
+                                        <p:cTn id="6" dur="1" fill="hold">
+                                          <p:stCondLst>
+                                            <p:cond delay="0"/>
+                                          </p:stCondLst>
+                                        </p:cTn>
+                                        <p:tgtEl>
+                                          <p:spTgt spid="3"/>
+                                        </p:tgtEl>
+                                        <p:attrNameLst>
+                                          <p:attrName>style.visibility</p:attrName>
+                                        </p:attrNameLst>
+                                      </p:cBhvr>
+                                      <p:to>
+                                        <p:strVal val="visible"/>
+                                      </p:to>
+                                    </p:set>
+                                    <p:anim calcmode="lin" valueType="num">
+                                      <p:cBhvr additive="base">
+                                        <p:cTn id="7" dur="500" fill="hold"/>
+                                        <p:tgtEl>
+                                          <p:spTgt spid="3"/>
+                                        </p:tgtEl>
+                                        <p:attrNameLst>
+                                          <p:attrName>ppt_x</p:attrName>
+                                        </p:attrNameLst>
+                                      </p:cBhvr>
+                                      <p:tavLst>
+                                        <p:tav tm="0">
+                                          <p:val>
+                                            <p:strVal val="0-#ppt_w/2"/>
+                                          </p:val>
+                                        </p:tav>
+                                        <p:tav tm="100000">
+                                          <p:val>
+                                            <p:strVal val="#ppt_x"/>
+                                          </p:val>
+                                        </p:tav>
+                                      </p:tavLst>
+                                    </p:anim>
+                                    <p:anim calcmode="lin" valueType="num">
+                                      <p:cBhvr additive="base">
+                                        <p:cTn id="8" dur="500" fill="hold"/>
+                                        <p:tgtEl>
+                                          <p:spTgt spid="3"/>
+                                        </p:tgtEl>
+                                        <p:attrNameLst>
+                                          <p:attrName>ppt_y</p:attrName>
+                                        </p:attrNameLst>
+                                      </p:cBhvr>
+                                      <p:tavLst>
+                                        <p:tav tm="0">
+                                          <p:val>
+                                            <p:strVal val="#ppt_y"/>
+                                          </p:val>
+                                        </p:tav>
+                                        <p:tav tm="100000">
+                                          <p:val>
+                                            <p:strVal val="#ppt_y"/>
+                                          </p:val>
+                                        </p:tav>
+                                      </p:tavLst>
+                                    </p:anim>
+                                  </p:childTnLst>
+                                </p:cTn>
+                              </p:par>
                             </p:childTnLst>
                           </p:cTn>
                         </p:par>
@@ -4564,13 +4861,27 @@
                   </p:par>
                 </p:childTnLst>
               </p:cTn>
+              <p:prevCondLst>
+                <p:cond evt="onPrev" delay="0">
+                  <p:tgtEl>
+                    <p:sldTgt/>
+                  </p:tgtEl>
+                </p:cond>
+              </p:prevCondLst>
+              <p:nextCondLst>
+                <p:cond evt="onNext" delay="0">
+                  <p:tgtEl>
+                    <p:sldTgt/>
+                  </p:tgtEl>
+                </p:cond>
+              </p:nextCondLst>
             </p:seq>
           </p:childTnLst>
         </p:cTn>
       </p:par>
     </p:tnLst>
     <p:bldLst>
-      <p:bldP spid="3" grpId="0" build="allAtOnce"/>
+      <p:bldP spid="3" grpId="0" uiExpand="0" advAuto="indefinite" build="whole" animBg="1"/>
     </p:bldLst>
   </p:timing>
 </p:sld>
@@ -4871,7 +5182,7 @@
   <p:timing>
     <p:tnLst>
       <p:par>
-        <p:cTn id="1" dur="indefinite" restart="never" nodeType="tmRoot">
+        <p:cTn id="1" restart="never" nodeType="tmRoot">
           <p:childTnLst>
             <p:seq concurrent="1" nextAc="seek">
               <p:cTn id="2" dur="indefinite" nodeType="mainSeq">
@@ -4883,33 +5194,84 @@
                       </p:stCondLst>
                       <p:childTnLst>
                         <p:par>
-                          <p:cTn id="4" presetID="2" presetClass="entr" presetSubtype="4" fill="hold" grpId="0" nodeType="clickEffect">
+                          <p:cTn id="4" fill="hold">
                             <p:stCondLst>
                               <p:cond delay="0"/>
                             </p:stCondLst>
                             <p:childTnLst>
-                              <p:set>
-                                <p:cBhvr>
-                                  <p:cTn id="5" dur="1" fill="hold"/>
-                                  <p:tgtEl>
-                                    <p:spTgt spid="4"/>
-                                  </p:tgtEl>
-                                  <p:attrNameLst>
-                                    <p:attrName>style.visibility</p:attrName>
-                                  </p:attrNameLst>
-                                </p:cBhvr>
-                                <p:to>
-                                  <p:strVal val="visible"/>
-                                </p:to>
-                              </p:set>
-                              <p:animEffect transition="in" filter="fly(l)" prLst="dir=l">
-                                <p:cBhvr>
-                                  <p:cTn id="6" dur="500"/>
-                                  <p:tgtEl>
-                                    <p:spTgt spid="4"/>
-                                  </p:tgtEl>
-                                </p:cBhvr>
-                              </p:animEffect>
+                              <p:par>
+                                <p:cTn id="5" presetID="2" presetClass="entr" presetSubtype="8" fill="hold" grpId="0" nodeType="clickEffect">
+                                  <p:stCondLst>
+                                    <p:cond delay="0"/>
+                                  </p:stCondLst>
+                                  <p:childTnLst>
+                                    <p:set>
+                                      <p:cBhvr>
+                                        <p:cTn id="6" dur="1" fill="hold">
+                                          <p:stCondLst>
+                                            <p:cond delay="0"/>
+                                          </p:stCondLst>
+                                        </p:cTn>
+                                        <p:tgtEl>
+                                          <p:spTgt spid="4"/>
+                                        </p:tgtEl>
+                                        <p:attrNameLst>
+                                          <p:attrName>style.visibility</p:attrName>
+                                        </p:attrNameLst>
+                                      </p:cBhvr>
+                                      <p:to>
+                                        <p:strVal val="visible"/>
+                                      </p:to>
+                                    </p:set>
+                                    <p:anim calcmode="lin" valueType="num">
+                                      <p:cBhvr additive="base">
+                                        <p:cTn id="7" dur="500" fill="hold"/>
+                                        <p:tgtEl>
+                                          <p:spTgt spid="4"/>
+                                        </p:tgtEl>
+                                        <p:attrNameLst>
+                                          <p:attrName>ppt_x</p:attrName>
+                                        </p:attrNameLst>
+                                      </p:cBhvr>
+                                      <p:tavLst>
+                                        <p:tav tm="0">
+                                          <p:val>
+                                            <p:strVal val="0-#ppt_w/2"/>
+                                          </p:val>
+                                        </p:tav>
+                                        <p:tav tm="100000">
+                                          <p:val>
+                                            <p:strVal val="#ppt_x"/>
+                                          </p:val>
+                                        </p:tav>
+                                      </p:tavLst>
+                                    </p:anim>
+                                    <p:anim calcmode="lin" valueType="num">
+                                      <p:cBhvr additive="base">
+                                        <p:cTn id="8" dur="500" fill="hold"/>
+                                        <p:tgtEl>
+                                          <p:spTgt spid="4"/>
+                                        </p:tgtEl>
+                                        <p:attrNameLst>
+                                          <p:attrName>ppt_y</p:attrName>
+                                        </p:attrNameLst>
+                                      </p:cBhvr>
+                                      <p:tavLst>
+                                        <p:tav tm="0">
+                                          <p:val>
+                                            <p:strVal val="#ppt_y"/>
+                                          </p:val>
+                                        </p:tav>
+                                        <p:tav tm="100000">
+                                          <p:val>
+                                            <p:strVal val="#ppt_y"/>
+                                          </p:val>
+                                        </p:tav>
+                                      </p:tavLst>
+                                    </p:anim>
+                                  </p:childTnLst>
+                                </p:cTn>
+                              </p:par>
                             </p:childTnLst>
                           </p:cTn>
                         </p:par>
@@ -4917,39 +5279,90 @@
                     </p:cTn>
                   </p:par>
                   <p:par>
-                    <p:cTn id="7" fill="hold">
+                    <p:cTn id="9" fill="hold">
                       <p:stCondLst>
                         <p:cond delay="indefinite"/>
                       </p:stCondLst>
                       <p:childTnLst>
                         <p:par>
-                          <p:cTn id="8" presetID="2" presetClass="entr" presetSubtype="4" fill="hold" grpId="0" nodeType="clickEffect">
+                          <p:cTn id="10" fill="hold">
                             <p:stCondLst>
                               <p:cond delay="0"/>
                             </p:stCondLst>
                             <p:childTnLst>
-                              <p:set>
-                                <p:cBhvr>
-                                  <p:cTn id="9" dur="1" fill="hold"/>
-                                  <p:tgtEl>
-                                    <p:spTgt spid="6"/>
-                                  </p:tgtEl>
-                                  <p:attrNameLst>
-                                    <p:attrName>style.visibility</p:attrName>
-                                  </p:attrNameLst>
-                                </p:cBhvr>
-                                <p:to>
-                                  <p:strVal val="visible"/>
-                                </p:to>
-                              </p:set>
-                              <p:animEffect transition="in" filter="fly(l)" prLst="dir=l">
-                                <p:cBhvr>
-                                  <p:cTn id="10" dur="500"/>
-                                  <p:tgtEl>
-                                    <p:spTgt spid="6"/>
-                                  </p:tgtEl>
-                                </p:cBhvr>
-                              </p:animEffect>
+                              <p:par>
+                                <p:cTn id="11" presetID="2" presetClass="entr" presetSubtype="8" fill="hold" grpId="0" nodeType="clickEffect">
+                                  <p:stCondLst>
+                                    <p:cond delay="0"/>
+                                  </p:stCondLst>
+                                  <p:childTnLst>
+                                    <p:set>
+                                      <p:cBhvr>
+                                        <p:cTn id="12" dur="1" fill="hold">
+                                          <p:stCondLst>
+                                            <p:cond delay="0"/>
+                                          </p:stCondLst>
+                                        </p:cTn>
+                                        <p:tgtEl>
+                                          <p:spTgt spid="6"/>
+                                        </p:tgtEl>
+                                        <p:attrNameLst>
+                                          <p:attrName>style.visibility</p:attrName>
+                                        </p:attrNameLst>
+                                      </p:cBhvr>
+                                      <p:to>
+                                        <p:strVal val="visible"/>
+                                      </p:to>
+                                    </p:set>
+                                    <p:anim calcmode="lin" valueType="num">
+                                      <p:cBhvr additive="base">
+                                        <p:cTn id="13" dur="500" fill="hold"/>
+                                        <p:tgtEl>
+                                          <p:spTgt spid="6"/>
+                                        </p:tgtEl>
+                                        <p:attrNameLst>
+                                          <p:attrName>ppt_x</p:attrName>
+                                        </p:attrNameLst>
+                                      </p:cBhvr>
+                                      <p:tavLst>
+                                        <p:tav tm="0">
+                                          <p:val>
+                                            <p:strVal val="0-#ppt_w/2"/>
+                                          </p:val>
+                                        </p:tav>
+                                        <p:tav tm="100000">
+                                          <p:val>
+                                            <p:strVal val="#ppt_x"/>
+                                          </p:val>
+                                        </p:tav>
+                                      </p:tavLst>
+                                    </p:anim>
+                                    <p:anim calcmode="lin" valueType="num">
+                                      <p:cBhvr additive="base">
+                                        <p:cTn id="14" dur="500" fill="hold"/>
+                                        <p:tgtEl>
+                                          <p:spTgt spid="6"/>
+                                        </p:tgtEl>
+                                        <p:attrNameLst>
+                                          <p:attrName>ppt_y</p:attrName>
+                                        </p:attrNameLst>
+                                      </p:cBhvr>
+                                      <p:tavLst>
+                                        <p:tav tm="0">
+                                          <p:val>
+                                            <p:strVal val="#ppt_y"/>
+                                          </p:val>
+                                        </p:tav>
+                                        <p:tav tm="100000">
+                                          <p:val>
+                                            <p:strVal val="#ppt_y"/>
+                                          </p:val>
+                                        </p:tav>
+                                      </p:tavLst>
+                                    </p:anim>
+                                  </p:childTnLst>
+                                </p:cTn>
+                              </p:par>
                             </p:childTnLst>
                           </p:cTn>
                         </p:par>
@@ -4958,14 +5371,28 @@
                   </p:par>
                 </p:childTnLst>
               </p:cTn>
+              <p:prevCondLst>
+                <p:cond evt="onPrev" delay="0">
+                  <p:tgtEl>
+                    <p:sldTgt/>
+                  </p:tgtEl>
+                </p:cond>
+              </p:prevCondLst>
+              <p:nextCondLst>
+                <p:cond evt="onNext" delay="0">
+                  <p:tgtEl>
+                    <p:sldTgt/>
+                  </p:tgtEl>
+                </p:cond>
+              </p:nextCondLst>
             </p:seq>
           </p:childTnLst>
         </p:cTn>
       </p:par>
     </p:tnLst>
     <p:bldLst>
-      <p:bldP spid="4" grpId="0" build="allAtOnce"/>
-      <p:bldP spid="6" grpId="0" build="allAtOnce"/>
+      <p:bldP spid="4" grpId="0" uiExpand="0" advAuto="indefinite" build="whole" animBg="1"/>
+      <p:bldP spid="6" grpId="0" uiExpand="0" advAuto="indefinite" build="whole" animBg="1"/>
     </p:bldLst>
   </p:timing>
 </p:sld>
@@ -5268,7 +5695,7 @@
   <p:timing>
     <p:tnLst>
       <p:par>
-        <p:cTn id="1" dur="indefinite" restart="never" nodeType="tmRoot">
+        <p:cTn id="1" restart="never" nodeType="tmRoot">
           <p:childTnLst>
             <p:seq concurrent="1" nextAc="seek">
               <p:cTn id="2" dur="indefinite" nodeType="mainSeq">
@@ -5280,33 +5707,84 @@
                       </p:stCondLst>
                       <p:childTnLst>
                         <p:par>
-                          <p:cTn id="4" presetID="2" presetClass="entr" presetSubtype="4" fill="hold" grpId="0" nodeType="clickEffect">
+                          <p:cTn id="4" fill="hold">
                             <p:stCondLst>
                               <p:cond delay="0"/>
                             </p:stCondLst>
                             <p:childTnLst>
-                              <p:set>
-                                <p:cBhvr>
-                                  <p:cTn id="5" dur="1" fill="hold"/>
-                                  <p:tgtEl>
-                                    <p:spTgt spid="4"/>
-                                  </p:tgtEl>
-                                  <p:attrNameLst>
-                                    <p:attrName>style.visibility</p:attrName>
-                                  </p:attrNameLst>
-                                </p:cBhvr>
-                                <p:to>
-                                  <p:strVal val="visible"/>
-                                </p:to>
-                              </p:set>
-                              <p:animEffect transition="in" filter="fly(l)" prLst="dir=l">
-                                <p:cBhvr>
-                                  <p:cTn id="6" dur="500"/>
-                                  <p:tgtEl>
-                                    <p:spTgt spid="4"/>
-                                  </p:tgtEl>
-                                </p:cBhvr>
-                              </p:animEffect>
+                              <p:par>
+                                <p:cTn id="5" presetID="2" presetClass="entr" presetSubtype="8" fill="hold" grpId="0" nodeType="clickEffect">
+                                  <p:stCondLst>
+                                    <p:cond delay="0"/>
+                                  </p:stCondLst>
+                                  <p:childTnLst>
+                                    <p:set>
+                                      <p:cBhvr>
+                                        <p:cTn id="6" dur="1" fill="hold">
+                                          <p:stCondLst>
+                                            <p:cond delay="0"/>
+                                          </p:stCondLst>
+                                        </p:cTn>
+                                        <p:tgtEl>
+                                          <p:spTgt spid="4"/>
+                                        </p:tgtEl>
+                                        <p:attrNameLst>
+                                          <p:attrName>style.visibility</p:attrName>
+                                        </p:attrNameLst>
+                                      </p:cBhvr>
+                                      <p:to>
+                                        <p:strVal val="visible"/>
+                                      </p:to>
+                                    </p:set>
+                                    <p:anim calcmode="lin" valueType="num">
+                                      <p:cBhvr additive="base">
+                                        <p:cTn id="7" dur="500" fill="hold"/>
+                                        <p:tgtEl>
+                                          <p:spTgt spid="4"/>
+                                        </p:tgtEl>
+                                        <p:attrNameLst>
+                                          <p:attrName>ppt_x</p:attrName>
+                                        </p:attrNameLst>
+                                      </p:cBhvr>
+                                      <p:tavLst>
+                                        <p:tav tm="0">
+                                          <p:val>
+                                            <p:strVal val="0-#ppt_w/2"/>
+                                          </p:val>
+                                        </p:tav>
+                                        <p:tav tm="100000">
+                                          <p:val>
+                                            <p:strVal val="#ppt_x"/>
+                                          </p:val>
+                                        </p:tav>
+                                      </p:tavLst>
+                                    </p:anim>
+                                    <p:anim calcmode="lin" valueType="num">
+                                      <p:cBhvr additive="base">
+                                        <p:cTn id="8" dur="500" fill="hold"/>
+                                        <p:tgtEl>
+                                          <p:spTgt spid="4"/>
+                                        </p:tgtEl>
+                                        <p:attrNameLst>
+                                          <p:attrName>ppt_y</p:attrName>
+                                        </p:attrNameLst>
+                                      </p:cBhvr>
+                                      <p:tavLst>
+                                        <p:tav tm="0">
+                                          <p:val>
+                                            <p:strVal val="#ppt_y"/>
+                                          </p:val>
+                                        </p:tav>
+                                        <p:tav tm="100000">
+                                          <p:val>
+                                            <p:strVal val="#ppt_y"/>
+                                          </p:val>
+                                        </p:tav>
+                                      </p:tavLst>
+                                    </p:anim>
+                                  </p:childTnLst>
+                                </p:cTn>
+                              </p:par>
                             </p:childTnLst>
                           </p:cTn>
                         </p:par>
@@ -5314,39 +5792,90 @@
                     </p:cTn>
                   </p:par>
                   <p:par>
-                    <p:cTn id="7" fill="hold">
+                    <p:cTn id="9" fill="hold">
                       <p:stCondLst>
                         <p:cond delay="indefinite"/>
                       </p:stCondLst>
                       <p:childTnLst>
                         <p:par>
-                          <p:cTn id="8" presetID="2" presetClass="entr" presetSubtype="4" fill="hold" grpId="0" nodeType="clickEffect">
+                          <p:cTn id="10" fill="hold">
                             <p:stCondLst>
                               <p:cond delay="0"/>
                             </p:stCondLst>
                             <p:childTnLst>
-                              <p:set>
-                                <p:cBhvr>
-                                  <p:cTn id="9" dur="1" fill="hold"/>
-                                  <p:tgtEl>
-                                    <p:spTgt spid="6"/>
-                                  </p:tgtEl>
-                                  <p:attrNameLst>
-                                    <p:attrName>style.visibility</p:attrName>
-                                  </p:attrNameLst>
-                                </p:cBhvr>
-                                <p:to>
-                                  <p:strVal val="visible"/>
-                                </p:to>
-                              </p:set>
-                              <p:animEffect transition="in" filter="fly(l)" prLst="dir=l">
-                                <p:cBhvr>
-                                  <p:cTn id="10" dur="500"/>
-                                  <p:tgtEl>
-                                    <p:spTgt spid="6"/>
-                                  </p:tgtEl>
-                                </p:cBhvr>
-                              </p:animEffect>
+                              <p:par>
+                                <p:cTn id="11" presetID="2" presetClass="entr" presetSubtype="8" fill="hold" grpId="0" nodeType="clickEffect">
+                                  <p:stCondLst>
+                                    <p:cond delay="0"/>
+                                  </p:stCondLst>
+                                  <p:childTnLst>
+                                    <p:set>
+                                      <p:cBhvr>
+                                        <p:cTn id="12" dur="1" fill="hold">
+                                          <p:stCondLst>
+                                            <p:cond delay="0"/>
+                                          </p:stCondLst>
+                                        </p:cTn>
+                                        <p:tgtEl>
+                                          <p:spTgt spid="6"/>
+                                        </p:tgtEl>
+                                        <p:attrNameLst>
+                                          <p:attrName>style.visibility</p:attrName>
+                                        </p:attrNameLst>
+                                      </p:cBhvr>
+                                      <p:to>
+                                        <p:strVal val="visible"/>
+                                      </p:to>
+                                    </p:set>
+                                    <p:anim calcmode="lin" valueType="num">
+                                      <p:cBhvr additive="base">
+                                        <p:cTn id="13" dur="500" fill="hold"/>
+                                        <p:tgtEl>
+                                          <p:spTgt spid="6"/>
+                                        </p:tgtEl>
+                                        <p:attrNameLst>
+                                          <p:attrName>ppt_x</p:attrName>
+                                        </p:attrNameLst>
+                                      </p:cBhvr>
+                                      <p:tavLst>
+                                        <p:tav tm="0">
+                                          <p:val>
+                                            <p:strVal val="0-#ppt_w/2"/>
+                                          </p:val>
+                                        </p:tav>
+                                        <p:tav tm="100000">
+                                          <p:val>
+                                            <p:strVal val="#ppt_x"/>
+                                          </p:val>
+                                        </p:tav>
+                                      </p:tavLst>
+                                    </p:anim>
+                                    <p:anim calcmode="lin" valueType="num">
+                                      <p:cBhvr additive="base">
+                                        <p:cTn id="14" dur="500" fill="hold"/>
+                                        <p:tgtEl>
+                                          <p:spTgt spid="6"/>
+                                        </p:tgtEl>
+                                        <p:attrNameLst>
+                                          <p:attrName>ppt_y</p:attrName>
+                                        </p:attrNameLst>
+                                      </p:cBhvr>
+                                      <p:tavLst>
+                                        <p:tav tm="0">
+                                          <p:val>
+                                            <p:strVal val="#ppt_y"/>
+                                          </p:val>
+                                        </p:tav>
+                                        <p:tav tm="100000">
+                                          <p:val>
+                                            <p:strVal val="#ppt_y"/>
+                                          </p:val>
+                                        </p:tav>
+                                      </p:tavLst>
+                                    </p:anim>
+                                  </p:childTnLst>
+                                </p:cTn>
+                              </p:par>
                             </p:childTnLst>
                           </p:cTn>
                         </p:par>
@@ -5355,14 +5884,28 @@
                   </p:par>
                 </p:childTnLst>
               </p:cTn>
+              <p:prevCondLst>
+                <p:cond evt="onPrev" delay="0">
+                  <p:tgtEl>
+                    <p:sldTgt/>
+                  </p:tgtEl>
+                </p:cond>
+              </p:prevCondLst>
+              <p:nextCondLst>
+                <p:cond evt="onNext" delay="0">
+                  <p:tgtEl>
+                    <p:sldTgt/>
+                  </p:tgtEl>
+                </p:cond>
+              </p:nextCondLst>
             </p:seq>
           </p:childTnLst>
         </p:cTn>
       </p:par>
     </p:tnLst>
     <p:bldLst>
-      <p:bldP spid="4" grpId="0" build="allAtOnce"/>
-      <p:bldP spid="6" grpId="0" build="allAtOnce"/>
+      <p:bldP spid="4" grpId="0" uiExpand="0" advAuto="indefinite" build="whole" animBg="1"/>
+      <p:bldP spid="6" grpId="0" uiExpand="0" advAuto="indefinite" build="whole" animBg="1"/>
     </p:bldLst>
   </p:timing>
 </p:sld>
@@ -5663,7 +6206,7 @@
   <p:timing>
     <p:tnLst>
       <p:par>
-        <p:cTn id="1" dur="indefinite" restart="never" nodeType="tmRoot">
+        <p:cTn id="1" restart="never" nodeType="tmRoot">
           <p:childTnLst>
             <p:seq concurrent="1" nextAc="seek">
               <p:cTn id="2" dur="indefinite" nodeType="mainSeq">
@@ -5675,33 +6218,84 @@
                       </p:stCondLst>
                       <p:childTnLst>
                         <p:par>
-                          <p:cTn id="4" presetID="2" presetClass="entr" presetSubtype="4" fill="hold" grpId="0" nodeType="clickEffect">
+                          <p:cTn id="4" fill="hold">
                             <p:stCondLst>
                               <p:cond delay="0"/>
                             </p:stCondLst>
                             <p:childTnLst>
-                              <p:set>
-                                <p:cBhvr>
-                                  <p:cTn id="5" dur="1" fill="hold"/>
-                                  <p:tgtEl>
-                                    <p:spTgt spid="4"/>
-                                  </p:tgtEl>
-                                  <p:attrNameLst>
-                                    <p:attrName>style.visibility</p:attrName>
-                                  </p:attrNameLst>
-                                </p:cBhvr>
-                                <p:to>
-                                  <p:strVal val="visible"/>
-                                </p:to>
-                              </p:set>
-                              <p:animEffect transition="in" filter="fly(l)" prLst="dir=l">
-                                <p:cBhvr>
-                                  <p:cTn id="6" dur="500"/>
-                                  <p:tgtEl>
-                                    <p:spTgt spid="4"/>
-                                  </p:tgtEl>
-                                </p:cBhvr>
-                              </p:animEffect>
+                              <p:par>
+                                <p:cTn id="5" presetID="2" presetClass="entr" presetSubtype="8" fill="hold" grpId="0" nodeType="clickEffect">
+                                  <p:stCondLst>
+                                    <p:cond delay="0"/>
+                                  </p:stCondLst>
+                                  <p:childTnLst>
+                                    <p:set>
+                                      <p:cBhvr>
+                                        <p:cTn id="6" dur="1" fill="hold">
+                                          <p:stCondLst>
+                                            <p:cond delay="0"/>
+                                          </p:stCondLst>
+                                        </p:cTn>
+                                        <p:tgtEl>
+                                          <p:spTgt spid="4"/>
+                                        </p:tgtEl>
+                                        <p:attrNameLst>
+                                          <p:attrName>style.visibility</p:attrName>
+                                        </p:attrNameLst>
+                                      </p:cBhvr>
+                                      <p:to>
+                                        <p:strVal val="visible"/>
+                                      </p:to>
+                                    </p:set>
+                                    <p:anim calcmode="lin" valueType="num">
+                                      <p:cBhvr additive="base">
+                                        <p:cTn id="7" dur="500" fill="hold"/>
+                                        <p:tgtEl>
+                                          <p:spTgt spid="4"/>
+                                        </p:tgtEl>
+                                        <p:attrNameLst>
+                                          <p:attrName>ppt_x</p:attrName>
+                                        </p:attrNameLst>
+                                      </p:cBhvr>
+                                      <p:tavLst>
+                                        <p:tav tm="0">
+                                          <p:val>
+                                            <p:strVal val="0-#ppt_w/2"/>
+                                          </p:val>
+                                        </p:tav>
+                                        <p:tav tm="100000">
+                                          <p:val>
+                                            <p:strVal val="#ppt_x"/>
+                                          </p:val>
+                                        </p:tav>
+                                      </p:tavLst>
+                                    </p:anim>
+                                    <p:anim calcmode="lin" valueType="num">
+                                      <p:cBhvr additive="base">
+                                        <p:cTn id="8" dur="500" fill="hold"/>
+                                        <p:tgtEl>
+                                          <p:spTgt spid="4"/>
+                                        </p:tgtEl>
+                                        <p:attrNameLst>
+                                          <p:attrName>ppt_y</p:attrName>
+                                        </p:attrNameLst>
+                                      </p:cBhvr>
+                                      <p:tavLst>
+                                        <p:tav tm="0">
+                                          <p:val>
+                                            <p:strVal val="#ppt_y"/>
+                                          </p:val>
+                                        </p:tav>
+                                        <p:tav tm="100000">
+                                          <p:val>
+                                            <p:strVal val="#ppt_y"/>
+                                          </p:val>
+                                        </p:tav>
+                                      </p:tavLst>
+                                    </p:anim>
+                                  </p:childTnLst>
+                                </p:cTn>
+                              </p:par>
                             </p:childTnLst>
                           </p:cTn>
                         </p:par>
@@ -5709,39 +6303,90 @@
                     </p:cTn>
                   </p:par>
                   <p:par>
-                    <p:cTn id="7" fill="hold">
+                    <p:cTn id="9" fill="hold">
                       <p:stCondLst>
                         <p:cond delay="indefinite"/>
                       </p:stCondLst>
                       <p:childTnLst>
                         <p:par>
-                          <p:cTn id="8" presetID="2" presetClass="entr" presetSubtype="4" fill="hold" grpId="0" nodeType="clickEffect">
+                          <p:cTn id="10" fill="hold">
                             <p:stCondLst>
                               <p:cond delay="0"/>
                             </p:stCondLst>
                             <p:childTnLst>
-                              <p:set>
-                                <p:cBhvr>
-                                  <p:cTn id="9" dur="1" fill="hold"/>
-                                  <p:tgtEl>
-                                    <p:spTgt spid="6"/>
-                                  </p:tgtEl>
-                                  <p:attrNameLst>
-                                    <p:attrName>style.visibility</p:attrName>
-                                  </p:attrNameLst>
-                                </p:cBhvr>
-                                <p:to>
-                                  <p:strVal val="visible"/>
-                                </p:to>
-                              </p:set>
-                              <p:animEffect transition="in" filter="fly(l)" prLst="dir=l">
-                                <p:cBhvr>
-                                  <p:cTn id="10" dur="500"/>
-                                  <p:tgtEl>
-                                    <p:spTgt spid="6"/>
-                                  </p:tgtEl>
-                                </p:cBhvr>
-                              </p:animEffect>
+                              <p:par>
+                                <p:cTn id="11" presetID="2" presetClass="entr" presetSubtype="8" fill="hold" grpId="0" nodeType="clickEffect">
+                                  <p:stCondLst>
+                                    <p:cond delay="0"/>
+                                  </p:stCondLst>
+                                  <p:childTnLst>
+                                    <p:set>
+                                      <p:cBhvr>
+                                        <p:cTn id="12" dur="1" fill="hold">
+                                          <p:stCondLst>
+                                            <p:cond delay="0"/>
+                                          </p:stCondLst>
+                                        </p:cTn>
+                                        <p:tgtEl>
+                                          <p:spTgt spid="6"/>
+                                        </p:tgtEl>
+                                        <p:attrNameLst>
+                                          <p:attrName>style.visibility</p:attrName>
+                                        </p:attrNameLst>
+                                      </p:cBhvr>
+                                      <p:to>
+                                        <p:strVal val="visible"/>
+                                      </p:to>
+                                    </p:set>
+                                    <p:anim calcmode="lin" valueType="num">
+                                      <p:cBhvr additive="base">
+                                        <p:cTn id="13" dur="500" fill="hold"/>
+                                        <p:tgtEl>
+                                          <p:spTgt spid="6"/>
+                                        </p:tgtEl>
+                                        <p:attrNameLst>
+                                          <p:attrName>ppt_x</p:attrName>
+                                        </p:attrNameLst>
+                                      </p:cBhvr>
+                                      <p:tavLst>
+                                        <p:tav tm="0">
+                                          <p:val>
+                                            <p:strVal val="0-#ppt_w/2"/>
+                                          </p:val>
+                                        </p:tav>
+                                        <p:tav tm="100000">
+                                          <p:val>
+                                            <p:strVal val="#ppt_x"/>
+                                          </p:val>
+                                        </p:tav>
+                                      </p:tavLst>
+                                    </p:anim>
+                                    <p:anim calcmode="lin" valueType="num">
+                                      <p:cBhvr additive="base">
+                                        <p:cTn id="14" dur="500" fill="hold"/>
+                                        <p:tgtEl>
+                                          <p:spTgt spid="6"/>
+                                        </p:tgtEl>
+                                        <p:attrNameLst>
+                                          <p:attrName>ppt_y</p:attrName>
+                                        </p:attrNameLst>
+                                      </p:cBhvr>
+                                      <p:tavLst>
+                                        <p:tav tm="0">
+                                          <p:val>
+                                            <p:strVal val="#ppt_y"/>
+                                          </p:val>
+                                        </p:tav>
+                                        <p:tav tm="100000">
+                                          <p:val>
+                                            <p:strVal val="#ppt_y"/>
+                                          </p:val>
+                                        </p:tav>
+                                      </p:tavLst>
+                                    </p:anim>
+                                  </p:childTnLst>
+                                </p:cTn>
+                              </p:par>
                             </p:childTnLst>
                           </p:cTn>
                         </p:par>
@@ -5750,14 +6395,28 @@
                   </p:par>
                 </p:childTnLst>
               </p:cTn>
+              <p:prevCondLst>
+                <p:cond evt="onPrev" delay="0">
+                  <p:tgtEl>
+                    <p:sldTgt/>
+                  </p:tgtEl>
+                </p:cond>
+              </p:prevCondLst>
+              <p:nextCondLst>
+                <p:cond evt="onNext" delay="0">
+                  <p:tgtEl>
+                    <p:sldTgt/>
+                  </p:tgtEl>
+                </p:cond>
+              </p:nextCondLst>
             </p:seq>
           </p:childTnLst>
         </p:cTn>
       </p:par>
     </p:tnLst>
     <p:bldLst>
-      <p:bldP spid="4" grpId="0" build="allAtOnce"/>
-      <p:bldP spid="6" grpId="0" build="allAtOnce"/>
+      <p:bldP spid="4" grpId="0" uiExpand="0" advAuto="indefinite" build="whole" animBg="1"/>
+      <p:bldP spid="6" grpId="0" uiExpand="0" advAuto="indefinite" build="whole" animBg="1"/>
     </p:bldLst>
   </p:timing>
 </p:sld>
@@ -6059,7 +6718,7 @@
   <p:timing>
     <p:tnLst>
       <p:par>
-        <p:cTn id="1" dur="indefinite" restart="never" nodeType="tmRoot">
+        <p:cTn id="1" restart="never" nodeType="tmRoot">
           <p:childTnLst>
             <p:seq concurrent="1" nextAc="seek">
               <p:cTn id="2" dur="indefinite" nodeType="mainSeq">
@@ -6071,33 +6730,84 @@
                       </p:stCondLst>
                       <p:childTnLst>
                         <p:par>
-                          <p:cTn id="4" presetID="2" presetClass="entr" presetSubtype="4" fill="hold" grpId="0" nodeType="clickEffect">
+                          <p:cTn id="4" fill="hold">
                             <p:stCondLst>
                               <p:cond delay="0"/>
                             </p:stCondLst>
                             <p:childTnLst>
-                              <p:set>
-                                <p:cBhvr>
-                                  <p:cTn id="5" dur="1" fill="hold"/>
-                                  <p:tgtEl>
-                                    <p:spTgt spid="4"/>
-                                  </p:tgtEl>
-                                  <p:attrNameLst>
-                                    <p:attrName>style.visibility</p:attrName>
-                                  </p:attrNameLst>
-                                </p:cBhvr>
-                                <p:to>
-                                  <p:strVal val="visible"/>
-                                </p:to>
-                              </p:set>
-                              <p:animEffect transition="in" filter="fly(l)" prLst="dir=l">
-                                <p:cBhvr>
-                                  <p:cTn id="6" dur="500"/>
-                                  <p:tgtEl>
-                                    <p:spTgt spid="4"/>
-                                  </p:tgtEl>
-                                </p:cBhvr>
-                              </p:animEffect>
+                              <p:par>
+                                <p:cTn id="5" presetID="2" presetClass="entr" presetSubtype="8" fill="hold" grpId="0" nodeType="clickEffect">
+                                  <p:stCondLst>
+                                    <p:cond delay="0"/>
+                                  </p:stCondLst>
+                                  <p:childTnLst>
+                                    <p:set>
+                                      <p:cBhvr>
+                                        <p:cTn id="6" dur="1" fill="hold">
+                                          <p:stCondLst>
+                                            <p:cond delay="0"/>
+                                          </p:stCondLst>
+                                        </p:cTn>
+                                        <p:tgtEl>
+                                          <p:spTgt spid="4"/>
+                                        </p:tgtEl>
+                                        <p:attrNameLst>
+                                          <p:attrName>style.visibility</p:attrName>
+                                        </p:attrNameLst>
+                                      </p:cBhvr>
+                                      <p:to>
+                                        <p:strVal val="visible"/>
+                                      </p:to>
+                                    </p:set>
+                                    <p:anim calcmode="lin" valueType="num">
+                                      <p:cBhvr additive="base">
+                                        <p:cTn id="7" dur="500" fill="hold"/>
+                                        <p:tgtEl>
+                                          <p:spTgt spid="4"/>
+                                        </p:tgtEl>
+                                        <p:attrNameLst>
+                                          <p:attrName>ppt_x</p:attrName>
+                                        </p:attrNameLst>
+                                      </p:cBhvr>
+                                      <p:tavLst>
+                                        <p:tav tm="0">
+                                          <p:val>
+                                            <p:strVal val="0-#ppt_w/2"/>
+                                          </p:val>
+                                        </p:tav>
+                                        <p:tav tm="100000">
+                                          <p:val>
+                                            <p:strVal val="#ppt_x"/>
+                                          </p:val>
+                                        </p:tav>
+                                      </p:tavLst>
+                                    </p:anim>
+                                    <p:anim calcmode="lin" valueType="num">
+                                      <p:cBhvr additive="base">
+                                        <p:cTn id="8" dur="500" fill="hold"/>
+                                        <p:tgtEl>
+                                          <p:spTgt spid="4"/>
+                                        </p:tgtEl>
+                                        <p:attrNameLst>
+                                          <p:attrName>ppt_y</p:attrName>
+                                        </p:attrNameLst>
+                                      </p:cBhvr>
+                                      <p:tavLst>
+                                        <p:tav tm="0">
+                                          <p:val>
+                                            <p:strVal val="#ppt_y"/>
+                                          </p:val>
+                                        </p:tav>
+                                        <p:tav tm="100000">
+                                          <p:val>
+                                            <p:strVal val="#ppt_y"/>
+                                          </p:val>
+                                        </p:tav>
+                                      </p:tavLst>
+                                    </p:anim>
+                                  </p:childTnLst>
+                                </p:cTn>
+                              </p:par>
                             </p:childTnLst>
                           </p:cTn>
                         </p:par>
@@ -6105,39 +6815,90 @@
                     </p:cTn>
                   </p:par>
                   <p:par>
-                    <p:cTn id="7" fill="hold">
+                    <p:cTn id="9" fill="hold">
                       <p:stCondLst>
                         <p:cond delay="indefinite"/>
                       </p:stCondLst>
                       <p:childTnLst>
                         <p:par>
-                          <p:cTn id="8" presetID="2" presetClass="entr" presetSubtype="4" fill="hold" grpId="0" nodeType="clickEffect">
+                          <p:cTn id="10" fill="hold">
                             <p:stCondLst>
                               <p:cond delay="0"/>
                             </p:stCondLst>
                             <p:childTnLst>
-                              <p:set>
-                                <p:cBhvr>
-                                  <p:cTn id="9" dur="1" fill="hold"/>
-                                  <p:tgtEl>
-                                    <p:spTgt spid="6"/>
-                                  </p:tgtEl>
-                                  <p:attrNameLst>
-                                    <p:attrName>style.visibility</p:attrName>
-                                  </p:attrNameLst>
-                                </p:cBhvr>
-                                <p:to>
-                                  <p:strVal val="visible"/>
-                                </p:to>
-                              </p:set>
-                              <p:animEffect transition="in" filter="fly(l)" prLst="dir=l">
-                                <p:cBhvr>
-                                  <p:cTn id="10" dur="500"/>
-                                  <p:tgtEl>
-                                    <p:spTgt spid="6"/>
-                                  </p:tgtEl>
-                                </p:cBhvr>
-                              </p:animEffect>
+                              <p:par>
+                                <p:cTn id="11" presetID="2" presetClass="entr" presetSubtype="8" fill="hold" grpId="0" nodeType="clickEffect">
+                                  <p:stCondLst>
+                                    <p:cond delay="0"/>
+                                  </p:stCondLst>
+                                  <p:childTnLst>
+                                    <p:set>
+                                      <p:cBhvr>
+                                        <p:cTn id="12" dur="1" fill="hold">
+                                          <p:stCondLst>
+                                            <p:cond delay="0"/>
+                                          </p:stCondLst>
+                                        </p:cTn>
+                                        <p:tgtEl>
+                                          <p:spTgt spid="6"/>
+                                        </p:tgtEl>
+                                        <p:attrNameLst>
+                                          <p:attrName>style.visibility</p:attrName>
+                                        </p:attrNameLst>
+                                      </p:cBhvr>
+                                      <p:to>
+                                        <p:strVal val="visible"/>
+                                      </p:to>
+                                    </p:set>
+                                    <p:anim calcmode="lin" valueType="num">
+                                      <p:cBhvr additive="base">
+                                        <p:cTn id="13" dur="500" fill="hold"/>
+                                        <p:tgtEl>
+                                          <p:spTgt spid="6"/>
+                                        </p:tgtEl>
+                                        <p:attrNameLst>
+                                          <p:attrName>ppt_x</p:attrName>
+                                        </p:attrNameLst>
+                                      </p:cBhvr>
+                                      <p:tavLst>
+                                        <p:tav tm="0">
+                                          <p:val>
+                                            <p:strVal val="0-#ppt_w/2"/>
+                                          </p:val>
+                                        </p:tav>
+                                        <p:tav tm="100000">
+                                          <p:val>
+                                            <p:strVal val="#ppt_x"/>
+                                          </p:val>
+                                        </p:tav>
+                                      </p:tavLst>
+                                    </p:anim>
+                                    <p:anim calcmode="lin" valueType="num">
+                                      <p:cBhvr additive="base">
+                                        <p:cTn id="14" dur="500" fill="hold"/>
+                                        <p:tgtEl>
+                                          <p:spTgt spid="6"/>
+                                        </p:tgtEl>
+                                        <p:attrNameLst>
+                                          <p:attrName>ppt_y</p:attrName>
+                                        </p:attrNameLst>
+                                      </p:cBhvr>
+                                      <p:tavLst>
+                                        <p:tav tm="0">
+                                          <p:val>
+                                            <p:strVal val="#ppt_y"/>
+                                          </p:val>
+                                        </p:tav>
+                                        <p:tav tm="100000">
+                                          <p:val>
+                                            <p:strVal val="#ppt_y"/>
+                                          </p:val>
+                                        </p:tav>
+                                      </p:tavLst>
+                                    </p:anim>
+                                  </p:childTnLst>
+                                </p:cTn>
+                              </p:par>
                             </p:childTnLst>
                           </p:cTn>
                         </p:par>
@@ -6146,14 +6907,28 @@
                   </p:par>
                 </p:childTnLst>
               </p:cTn>
+              <p:prevCondLst>
+                <p:cond evt="onPrev" delay="0">
+                  <p:tgtEl>
+                    <p:sldTgt/>
+                  </p:tgtEl>
+                </p:cond>
+              </p:prevCondLst>
+              <p:nextCondLst>
+                <p:cond evt="onNext" delay="0">
+                  <p:tgtEl>
+                    <p:sldTgt/>
+                  </p:tgtEl>
+                </p:cond>
+              </p:nextCondLst>
             </p:seq>
           </p:childTnLst>
         </p:cTn>
       </p:par>
     </p:tnLst>
     <p:bldLst>
-      <p:bldP spid="4" grpId="0" build="allAtOnce"/>
-      <p:bldP spid="6" grpId="0" build="allAtOnce"/>
+      <p:bldP spid="4" grpId="0" uiExpand="0" advAuto="indefinite" build="whole" animBg="1"/>
+      <p:bldP spid="6" grpId="0" uiExpand="0" advAuto="indefinite" build="whole" animBg="1"/>
     </p:bldLst>
   </p:timing>
 </p:sld>
@@ -6456,7 +7231,7 @@
   <p:timing>
     <p:tnLst>
       <p:par>
-        <p:cTn id="1" dur="indefinite" restart="never" nodeType="tmRoot">
+        <p:cTn id="1" restart="never" nodeType="tmRoot">
           <p:childTnLst>
             <p:seq concurrent="1" nextAc="seek">
               <p:cTn id="2" dur="indefinite" nodeType="mainSeq">
@@ -6468,33 +7243,84 @@
                       </p:stCondLst>
                       <p:childTnLst>
                         <p:par>
-                          <p:cTn id="4" presetID="2" presetClass="entr" presetSubtype="4" fill="hold" grpId="0" nodeType="clickEffect">
+                          <p:cTn id="4" fill="hold">
                             <p:stCondLst>
                               <p:cond delay="0"/>
                             </p:stCondLst>
                             <p:childTnLst>
-                              <p:set>
-                                <p:cBhvr>
-                                  <p:cTn id="5" dur="1" fill="hold"/>
-                                  <p:tgtEl>
-                                    <p:spTgt spid="4"/>
-                                  </p:tgtEl>
-                                  <p:attrNameLst>
-                                    <p:attrName>style.visibility</p:attrName>
-                                  </p:attrNameLst>
-                                </p:cBhvr>
-                                <p:to>
-                                  <p:strVal val="visible"/>
-                                </p:to>
-                              </p:set>
-                              <p:animEffect transition="in" filter="fly(l)" prLst="dir=l">
-                                <p:cBhvr>
-                                  <p:cTn id="6" dur="500"/>
-                                  <p:tgtEl>
-                                    <p:spTgt spid="4"/>
-                                  </p:tgtEl>
-                                </p:cBhvr>
-                              </p:animEffect>
+                              <p:par>
+                                <p:cTn id="5" presetID="2" presetClass="entr" presetSubtype="8" fill="hold" grpId="0" nodeType="clickEffect">
+                                  <p:stCondLst>
+                                    <p:cond delay="0"/>
+                                  </p:stCondLst>
+                                  <p:childTnLst>
+                                    <p:set>
+                                      <p:cBhvr>
+                                        <p:cTn id="6" dur="1" fill="hold">
+                                          <p:stCondLst>
+                                            <p:cond delay="0"/>
+                                          </p:stCondLst>
+                                        </p:cTn>
+                                        <p:tgtEl>
+                                          <p:spTgt spid="4"/>
+                                        </p:tgtEl>
+                                        <p:attrNameLst>
+                                          <p:attrName>style.visibility</p:attrName>
+                                        </p:attrNameLst>
+                                      </p:cBhvr>
+                                      <p:to>
+                                        <p:strVal val="visible"/>
+                                      </p:to>
+                                    </p:set>
+                                    <p:anim calcmode="lin" valueType="num">
+                                      <p:cBhvr additive="base">
+                                        <p:cTn id="7" dur="500" fill="hold"/>
+                                        <p:tgtEl>
+                                          <p:spTgt spid="4"/>
+                                        </p:tgtEl>
+                                        <p:attrNameLst>
+                                          <p:attrName>ppt_x</p:attrName>
+                                        </p:attrNameLst>
+                                      </p:cBhvr>
+                                      <p:tavLst>
+                                        <p:tav tm="0">
+                                          <p:val>
+                                            <p:strVal val="0-#ppt_w/2"/>
+                                          </p:val>
+                                        </p:tav>
+                                        <p:tav tm="100000">
+                                          <p:val>
+                                            <p:strVal val="#ppt_x"/>
+                                          </p:val>
+                                        </p:tav>
+                                      </p:tavLst>
+                                    </p:anim>
+                                    <p:anim calcmode="lin" valueType="num">
+                                      <p:cBhvr additive="base">
+                                        <p:cTn id="8" dur="500" fill="hold"/>
+                                        <p:tgtEl>
+                                          <p:spTgt spid="4"/>
+                                        </p:tgtEl>
+                                        <p:attrNameLst>
+                                          <p:attrName>ppt_y</p:attrName>
+                                        </p:attrNameLst>
+                                      </p:cBhvr>
+                                      <p:tavLst>
+                                        <p:tav tm="0">
+                                          <p:val>
+                                            <p:strVal val="#ppt_y"/>
+                                          </p:val>
+                                        </p:tav>
+                                        <p:tav tm="100000">
+                                          <p:val>
+                                            <p:strVal val="#ppt_y"/>
+                                          </p:val>
+                                        </p:tav>
+                                      </p:tavLst>
+                                    </p:anim>
+                                  </p:childTnLst>
+                                </p:cTn>
+                              </p:par>
                             </p:childTnLst>
                           </p:cTn>
                         </p:par>
@@ -6502,39 +7328,90 @@
                     </p:cTn>
                   </p:par>
                   <p:par>
-                    <p:cTn id="7" fill="hold">
+                    <p:cTn id="9" fill="hold">
                       <p:stCondLst>
                         <p:cond delay="indefinite"/>
                       </p:stCondLst>
                       <p:childTnLst>
                         <p:par>
-                          <p:cTn id="8" presetID="2" presetClass="entr" presetSubtype="4" fill="hold" grpId="0" nodeType="clickEffect">
+                          <p:cTn id="10" fill="hold">
                             <p:stCondLst>
                               <p:cond delay="0"/>
                             </p:stCondLst>
                             <p:childTnLst>
-                              <p:set>
-                                <p:cBhvr>
-                                  <p:cTn id="9" dur="1" fill="hold"/>
-                                  <p:tgtEl>
-                                    <p:spTgt spid="6"/>
-                                  </p:tgtEl>
-                                  <p:attrNameLst>
-                                    <p:attrName>style.visibility</p:attrName>
-                                  </p:attrNameLst>
-                                </p:cBhvr>
-                                <p:to>
-                                  <p:strVal val="visible"/>
-                                </p:to>
-                              </p:set>
-                              <p:animEffect transition="in" filter="fly(l)" prLst="dir=l">
-                                <p:cBhvr>
-                                  <p:cTn id="10" dur="500"/>
-                                  <p:tgtEl>
-                                    <p:spTgt spid="6"/>
-                                  </p:tgtEl>
-                                </p:cBhvr>
-                              </p:animEffect>
+                              <p:par>
+                                <p:cTn id="11" presetID="2" presetClass="entr" presetSubtype="8" fill="hold" grpId="0" nodeType="clickEffect">
+                                  <p:stCondLst>
+                                    <p:cond delay="0"/>
+                                  </p:stCondLst>
+                                  <p:childTnLst>
+                                    <p:set>
+                                      <p:cBhvr>
+                                        <p:cTn id="12" dur="1" fill="hold">
+                                          <p:stCondLst>
+                                            <p:cond delay="0"/>
+                                          </p:stCondLst>
+                                        </p:cTn>
+                                        <p:tgtEl>
+                                          <p:spTgt spid="6"/>
+                                        </p:tgtEl>
+                                        <p:attrNameLst>
+                                          <p:attrName>style.visibility</p:attrName>
+                                        </p:attrNameLst>
+                                      </p:cBhvr>
+                                      <p:to>
+                                        <p:strVal val="visible"/>
+                                      </p:to>
+                                    </p:set>
+                                    <p:anim calcmode="lin" valueType="num">
+                                      <p:cBhvr additive="base">
+                                        <p:cTn id="13" dur="500" fill="hold"/>
+                                        <p:tgtEl>
+                                          <p:spTgt spid="6"/>
+                                        </p:tgtEl>
+                                        <p:attrNameLst>
+                                          <p:attrName>ppt_x</p:attrName>
+                                        </p:attrNameLst>
+                                      </p:cBhvr>
+                                      <p:tavLst>
+                                        <p:tav tm="0">
+                                          <p:val>
+                                            <p:strVal val="0-#ppt_w/2"/>
+                                          </p:val>
+                                        </p:tav>
+                                        <p:tav tm="100000">
+                                          <p:val>
+                                            <p:strVal val="#ppt_x"/>
+                                          </p:val>
+                                        </p:tav>
+                                      </p:tavLst>
+                                    </p:anim>
+                                    <p:anim calcmode="lin" valueType="num">
+                                      <p:cBhvr additive="base">
+                                        <p:cTn id="14" dur="500" fill="hold"/>
+                                        <p:tgtEl>
+                                          <p:spTgt spid="6"/>
+                                        </p:tgtEl>
+                                        <p:attrNameLst>
+                                          <p:attrName>ppt_y</p:attrName>
+                                        </p:attrNameLst>
+                                      </p:cBhvr>
+                                      <p:tavLst>
+                                        <p:tav tm="0">
+                                          <p:val>
+                                            <p:strVal val="#ppt_y"/>
+                                          </p:val>
+                                        </p:tav>
+                                        <p:tav tm="100000">
+                                          <p:val>
+                                            <p:strVal val="#ppt_y"/>
+                                          </p:val>
+                                        </p:tav>
+                                      </p:tavLst>
+                                    </p:anim>
+                                  </p:childTnLst>
+                                </p:cTn>
+                              </p:par>
                             </p:childTnLst>
                           </p:cTn>
                         </p:par>
@@ -6543,14 +7420,28 @@
                   </p:par>
                 </p:childTnLst>
               </p:cTn>
+              <p:prevCondLst>
+                <p:cond evt="onPrev" delay="0">
+                  <p:tgtEl>
+                    <p:sldTgt/>
+                  </p:tgtEl>
+                </p:cond>
+              </p:prevCondLst>
+              <p:nextCondLst>
+                <p:cond evt="onNext" delay="0">
+                  <p:tgtEl>
+                    <p:sldTgt/>
+                  </p:tgtEl>
+                </p:cond>
+              </p:nextCondLst>
             </p:seq>
           </p:childTnLst>
         </p:cTn>
       </p:par>
     </p:tnLst>
     <p:bldLst>
-      <p:bldP spid="4" grpId="0" build="allAtOnce"/>
-      <p:bldP spid="6" grpId="0" build="allAtOnce"/>
+      <p:bldP spid="4" grpId="0" uiExpand="0" advAuto="indefinite" build="whole" animBg="1"/>
+      <p:bldP spid="6" grpId="0" uiExpand="0" advAuto="indefinite" build="whole" animBg="1"/>
     </p:bldLst>
   </p:timing>
 </p:sld>
@@ -6850,7 +7741,7 @@
   <p:timing>
     <p:tnLst>
       <p:par>
-        <p:cTn id="1" dur="indefinite" restart="never" nodeType="tmRoot">
+        <p:cTn id="1" restart="never" nodeType="tmRoot">
           <p:childTnLst>
             <p:seq concurrent="1" nextAc="seek">
               <p:cTn id="2" dur="indefinite" nodeType="mainSeq">
@@ -6862,33 +7753,84 @@
                       </p:stCondLst>
                       <p:childTnLst>
                         <p:par>
-                          <p:cTn id="4" presetID="2" presetClass="entr" presetSubtype="4" fill="hold" grpId="0" nodeType="clickEffect">
+                          <p:cTn id="4" fill="hold">
                             <p:stCondLst>
                               <p:cond delay="0"/>
                             </p:stCondLst>
                             <p:childTnLst>
-                              <p:set>
-                                <p:cBhvr>
-                                  <p:cTn id="5" dur="1" fill="hold"/>
-                                  <p:tgtEl>
-                                    <p:spTgt spid="4"/>
-                                  </p:tgtEl>
-                                  <p:attrNameLst>
-                                    <p:attrName>style.visibility</p:attrName>
-                                  </p:attrNameLst>
-                                </p:cBhvr>
-                                <p:to>
-                                  <p:strVal val="visible"/>
-                                </p:to>
-                              </p:set>
-                              <p:animEffect transition="in" filter="fly(l)" prLst="dir=l">
-                                <p:cBhvr>
-                                  <p:cTn id="6" dur="500"/>
-                                  <p:tgtEl>
-                                    <p:spTgt spid="4"/>
-                                  </p:tgtEl>
-                                </p:cBhvr>
-                              </p:animEffect>
+                              <p:par>
+                                <p:cTn id="5" presetID="2" presetClass="entr" presetSubtype="8" fill="hold" grpId="0" nodeType="clickEffect">
+                                  <p:stCondLst>
+                                    <p:cond delay="0"/>
+                                  </p:stCondLst>
+                                  <p:childTnLst>
+                                    <p:set>
+                                      <p:cBhvr>
+                                        <p:cTn id="6" dur="1" fill="hold">
+                                          <p:stCondLst>
+                                            <p:cond delay="0"/>
+                                          </p:stCondLst>
+                                        </p:cTn>
+                                        <p:tgtEl>
+                                          <p:spTgt spid="4"/>
+                                        </p:tgtEl>
+                                        <p:attrNameLst>
+                                          <p:attrName>style.visibility</p:attrName>
+                                        </p:attrNameLst>
+                                      </p:cBhvr>
+                                      <p:to>
+                                        <p:strVal val="visible"/>
+                                      </p:to>
+                                    </p:set>
+                                    <p:anim calcmode="lin" valueType="num">
+                                      <p:cBhvr additive="base">
+                                        <p:cTn id="7" dur="500" fill="hold"/>
+                                        <p:tgtEl>
+                                          <p:spTgt spid="4"/>
+                                        </p:tgtEl>
+                                        <p:attrNameLst>
+                                          <p:attrName>ppt_x</p:attrName>
+                                        </p:attrNameLst>
+                                      </p:cBhvr>
+                                      <p:tavLst>
+                                        <p:tav tm="0">
+                                          <p:val>
+                                            <p:strVal val="0-#ppt_w/2"/>
+                                          </p:val>
+                                        </p:tav>
+                                        <p:tav tm="100000">
+                                          <p:val>
+                                            <p:strVal val="#ppt_x"/>
+                                          </p:val>
+                                        </p:tav>
+                                      </p:tavLst>
+                                    </p:anim>
+                                    <p:anim calcmode="lin" valueType="num">
+                                      <p:cBhvr additive="base">
+                                        <p:cTn id="8" dur="500" fill="hold"/>
+                                        <p:tgtEl>
+                                          <p:spTgt spid="4"/>
+                                        </p:tgtEl>
+                                        <p:attrNameLst>
+                                          <p:attrName>ppt_y</p:attrName>
+                                        </p:attrNameLst>
+                                      </p:cBhvr>
+                                      <p:tavLst>
+                                        <p:tav tm="0">
+                                          <p:val>
+                                            <p:strVal val="#ppt_y"/>
+                                          </p:val>
+                                        </p:tav>
+                                        <p:tav tm="100000">
+                                          <p:val>
+                                            <p:strVal val="#ppt_y"/>
+                                          </p:val>
+                                        </p:tav>
+                                      </p:tavLst>
+                                    </p:anim>
+                                  </p:childTnLst>
+                                </p:cTn>
+                              </p:par>
                             </p:childTnLst>
                           </p:cTn>
                         </p:par>
@@ -6896,39 +7838,90 @@
                     </p:cTn>
                   </p:par>
                   <p:par>
-                    <p:cTn id="7" fill="hold">
+                    <p:cTn id="9" fill="hold">
                       <p:stCondLst>
                         <p:cond delay="indefinite"/>
                       </p:stCondLst>
                       <p:childTnLst>
                         <p:par>
-                          <p:cTn id="8" presetID="2" presetClass="entr" presetSubtype="4" fill="hold" grpId="0" nodeType="clickEffect">
+                          <p:cTn id="10" fill="hold">
                             <p:stCondLst>
                               <p:cond delay="0"/>
                             </p:stCondLst>
                             <p:childTnLst>
-                              <p:set>
-                                <p:cBhvr>
-                                  <p:cTn id="9" dur="1" fill="hold"/>
-                                  <p:tgtEl>
-                                    <p:spTgt spid="6"/>
-                                  </p:tgtEl>
-                                  <p:attrNameLst>
-                                    <p:attrName>style.visibility</p:attrName>
-                                  </p:attrNameLst>
-                                </p:cBhvr>
-                                <p:to>
-                                  <p:strVal val="visible"/>
-                                </p:to>
-                              </p:set>
-                              <p:animEffect transition="in" filter="fly(l)" prLst="dir=l">
-                                <p:cBhvr>
-                                  <p:cTn id="10" dur="500"/>
-                                  <p:tgtEl>
-                                    <p:spTgt spid="6"/>
-                                  </p:tgtEl>
-                                </p:cBhvr>
-                              </p:animEffect>
+                              <p:par>
+                                <p:cTn id="11" presetID="2" presetClass="entr" presetSubtype="8" fill="hold" grpId="0" nodeType="clickEffect">
+                                  <p:stCondLst>
+                                    <p:cond delay="0"/>
+                                  </p:stCondLst>
+                                  <p:childTnLst>
+                                    <p:set>
+                                      <p:cBhvr>
+                                        <p:cTn id="12" dur="1" fill="hold">
+                                          <p:stCondLst>
+                                            <p:cond delay="0"/>
+                                          </p:stCondLst>
+                                        </p:cTn>
+                                        <p:tgtEl>
+                                          <p:spTgt spid="6"/>
+                                        </p:tgtEl>
+                                        <p:attrNameLst>
+                                          <p:attrName>style.visibility</p:attrName>
+                                        </p:attrNameLst>
+                                      </p:cBhvr>
+                                      <p:to>
+                                        <p:strVal val="visible"/>
+                                      </p:to>
+                                    </p:set>
+                                    <p:anim calcmode="lin" valueType="num">
+                                      <p:cBhvr additive="base">
+                                        <p:cTn id="13" dur="500" fill="hold"/>
+                                        <p:tgtEl>
+                                          <p:spTgt spid="6"/>
+                                        </p:tgtEl>
+                                        <p:attrNameLst>
+                                          <p:attrName>ppt_x</p:attrName>
+                                        </p:attrNameLst>
+                                      </p:cBhvr>
+                                      <p:tavLst>
+                                        <p:tav tm="0">
+                                          <p:val>
+                                            <p:strVal val="0-#ppt_w/2"/>
+                                          </p:val>
+                                        </p:tav>
+                                        <p:tav tm="100000">
+                                          <p:val>
+                                            <p:strVal val="#ppt_x"/>
+                                          </p:val>
+                                        </p:tav>
+                                      </p:tavLst>
+                                    </p:anim>
+                                    <p:anim calcmode="lin" valueType="num">
+                                      <p:cBhvr additive="base">
+                                        <p:cTn id="14" dur="500" fill="hold"/>
+                                        <p:tgtEl>
+                                          <p:spTgt spid="6"/>
+                                        </p:tgtEl>
+                                        <p:attrNameLst>
+                                          <p:attrName>ppt_y</p:attrName>
+                                        </p:attrNameLst>
+                                      </p:cBhvr>
+                                      <p:tavLst>
+                                        <p:tav tm="0">
+                                          <p:val>
+                                            <p:strVal val="#ppt_y"/>
+                                          </p:val>
+                                        </p:tav>
+                                        <p:tav tm="100000">
+                                          <p:val>
+                                            <p:strVal val="#ppt_y"/>
+                                          </p:val>
+                                        </p:tav>
+                                      </p:tavLst>
+                                    </p:anim>
+                                  </p:childTnLst>
+                                </p:cTn>
+                              </p:par>
                             </p:childTnLst>
                           </p:cTn>
                         </p:par>
@@ -6937,14 +7930,28 @@
                   </p:par>
                 </p:childTnLst>
               </p:cTn>
+              <p:prevCondLst>
+                <p:cond evt="onPrev" delay="0">
+                  <p:tgtEl>
+                    <p:sldTgt/>
+                  </p:tgtEl>
+                </p:cond>
+              </p:prevCondLst>
+              <p:nextCondLst>
+                <p:cond evt="onNext" delay="0">
+                  <p:tgtEl>
+                    <p:sldTgt/>
+                  </p:tgtEl>
+                </p:cond>
+              </p:nextCondLst>
             </p:seq>
           </p:childTnLst>
         </p:cTn>
       </p:par>
     </p:tnLst>
     <p:bldLst>
-      <p:bldP spid="4" grpId="0" build="allAtOnce"/>
-      <p:bldP spid="6" grpId="0" build="allAtOnce"/>
+      <p:bldP spid="4" grpId="0" uiExpand="0" advAuto="indefinite" build="whole" animBg="1"/>
+      <p:bldP spid="6" grpId="0" uiExpand="0" advAuto="indefinite" build="whole" animBg="1"/>
     </p:bldLst>
   </p:timing>
 </p:sld>
@@ -7248,7 +8255,7 @@
   <p:timing>
     <p:tnLst>
       <p:par>
-        <p:cTn id="1" dur="indefinite" restart="never" nodeType="tmRoot">
+        <p:cTn id="1" restart="never" nodeType="tmRoot">
           <p:childTnLst>
             <p:seq concurrent="1" nextAc="seek">
               <p:cTn id="2" dur="indefinite" nodeType="mainSeq">
@@ -7260,33 +8267,84 @@
                       </p:stCondLst>
                       <p:childTnLst>
                         <p:par>
-                          <p:cTn id="4" presetID="2" presetClass="entr" presetSubtype="4" fill="hold" grpId="0" nodeType="clickEffect">
+                          <p:cTn id="4" fill="hold">
                             <p:stCondLst>
                               <p:cond delay="0"/>
                             </p:stCondLst>
                             <p:childTnLst>
-                              <p:set>
-                                <p:cBhvr>
-                                  <p:cTn id="5" dur="1" fill="hold"/>
-                                  <p:tgtEl>
-                                    <p:spTgt spid="4"/>
-                                  </p:tgtEl>
-                                  <p:attrNameLst>
-                                    <p:attrName>style.visibility</p:attrName>
-                                  </p:attrNameLst>
-                                </p:cBhvr>
-                                <p:to>
-                                  <p:strVal val="visible"/>
-                                </p:to>
-                              </p:set>
-                              <p:animEffect transition="in" filter="fly(l)" prLst="dir=l">
-                                <p:cBhvr>
-                                  <p:cTn id="6" dur="500"/>
-                                  <p:tgtEl>
-                                    <p:spTgt spid="4"/>
-                                  </p:tgtEl>
-                                </p:cBhvr>
-                              </p:animEffect>
+                              <p:par>
+                                <p:cTn id="5" presetID="2" presetClass="entr" presetSubtype="8" fill="hold" grpId="0" nodeType="clickEffect">
+                                  <p:stCondLst>
+                                    <p:cond delay="0"/>
+                                  </p:stCondLst>
+                                  <p:childTnLst>
+                                    <p:set>
+                                      <p:cBhvr>
+                                        <p:cTn id="6" dur="1" fill="hold">
+                                          <p:stCondLst>
+                                            <p:cond delay="0"/>
+                                          </p:stCondLst>
+                                        </p:cTn>
+                                        <p:tgtEl>
+                                          <p:spTgt spid="4"/>
+                                        </p:tgtEl>
+                                        <p:attrNameLst>
+                                          <p:attrName>style.visibility</p:attrName>
+                                        </p:attrNameLst>
+                                      </p:cBhvr>
+                                      <p:to>
+                                        <p:strVal val="visible"/>
+                                      </p:to>
+                                    </p:set>
+                                    <p:anim calcmode="lin" valueType="num">
+                                      <p:cBhvr additive="base">
+                                        <p:cTn id="7" dur="500" fill="hold"/>
+                                        <p:tgtEl>
+                                          <p:spTgt spid="4"/>
+                                        </p:tgtEl>
+                                        <p:attrNameLst>
+                                          <p:attrName>ppt_x</p:attrName>
+                                        </p:attrNameLst>
+                                      </p:cBhvr>
+                                      <p:tavLst>
+                                        <p:tav tm="0">
+                                          <p:val>
+                                            <p:strVal val="0-#ppt_w/2"/>
+                                          </p:val>
+                                        </p:tav>
+                                        <p:tav tm="100000">
+                                          <p:val>
+                                            <p:strVal val="#ppt_x"/>
+                                          </p:val>
+                                        </p:tav>
+                                      </p:tavLst>
+                                    </p:anim>
+                                    <p:anim calcmode="lin" valueType="num">
+                                      <p:cBhvr additive="base">
+                                        <p:cTn id="8" dur="500" fill="hold"/>
+                                        <p:tgtEl>
+                                          <p:spTgt spid="4"/>
+                                        </p:tgtEl>
+                                        <p:attrNameLst>
+                                          <p:attrName>ppt_y</p:attrName>
+                                        </p:attrNameLst>
+                                      </p:cBhvr>
+                                      <p:tavLst>
+                                        <p:tav tm="0">
+                                          <p:val>
+                                            <p:strVal val="#ppt_y"/>
+                                          </p:val>
+                                        </p:tav>
+                                        <p:tav tm="100000">
+                                          <p:val>
+                                            <p:strVal val="#ppt_y"/>
+                                          </p:val>
+                                        </p:tav>
+                                      </p:tavLst>
+                                    </p:anim>
+                                  </p:childTnLst>
+                                </p:cTn>
+                              </p:par>
                             </p:childTnLst>
                           </p:cTn>
                         </p:par>
@@ -7294,39 +8352,90 @@
                     </p:cTn>
                   </p:par>
                   <p:par>
-                    <p:cTn id="7" fill="hold">
+                    <p:cTn id="9" fill="hold">
                       <p:stCondLst>
                         <p:cond delay="indefinite"/>
                       </p:stCondLst>
                       <p:childTnLst>
                         <p:par>
-                          <p:cTn id="8" presetID="2" presetClass="entr" presetSubtype="4" fill="hold" grpId="0" nodeType="clickEffect">
+                          <p:cTn id="10" fill="hold">
                             <p:stCondLst>
                               <p:cond delay="0"/>
                             </p:stCondLst>
                             <p:childTnLst>
-                              <p:set>
-                                <p:cBhvr>
-                                  <p:cTn id="9" dur="1" fill="hold"/>
-                                  <p:tgtEl>
-                                    <p:spTgt spid="6"/>
-                                  </p:tgtEl>
-                                  <p:attrNameLst>
-                                    <p:attrName>style.visibility</p:attrName>
-                                  </p:attrNameLst>
-                                </p:cBhvr>
-                                <p:to>
-                                  <p:strVal val="visible"/>
-                                </p:to>
-                              </p:set>
-                              <p:animEffect transition="in" filter="fly(l)" prLst="dir=l">
-                                <p:cBhvr>
-                                  <p:cTn id="10" dur="500"/>
-                                  <p:tgtEl>
-                                    <p:spTgt spid="6"/>
-                                  </p:tgtEl>
-                                </p:cBhvr>
-                              </p:animEffect>
+                              <p:par>
+                                <p:cTn id="11" presetID="2" presetClass="entr" presetSubtype="8" fill="hold" grpId="0" nodeType="clickEffect">
+                                  <p:stCondLst>
+                                    <p:cond delay="0"/>
+                                  </p:stCondLst>
+                                  <p:childTnLst>
+                                    <p:set>
+                                      <p:cBhvr>
+                                        <p:cTn id="12" dur="1" fill="hold">
+                                          <p:stCondLst>
+                                            <p:cond delay="0"/>
+                                          </p:stCondLst>
+                                        </p:cTn>
+                                        <p:tgtEl>
+                                          <p:spTgt spid="6"/>
+                                        </p:tgtEl>
+                                        <p:attrNameLst>
+                                          <p:attrName>style.visibility</p:attrName>
+                                        </p:attrNameLst>
+                                      </p:cBhvr>
+                                      <p:to>
+                                        <p:strVal val="visible"/>
+                                      </p:to>
+                                    </p:set>
+                                    <p:anim calcmode="lin" valueType="num">
+                                      <p:cBhvr additive="base">
+                                        <p:cTn id="13" dur="500" fill="hold"/>
+                                        <p:tgtEl>
+                                          <p:spTgt spid="6"/>
+                                        </p:tgtEl>
+                                        <p:attrNameLst>
+                                          <p:attrName>ppt_x</p:attrName>
+                                        </p:attrNameLst>
+                                      </p:cBhvr>
+                                      <p:tavLst>
+                                        <p:tav tm="0">
+                                          <p:val>
+                                            <p:strVal val="0-#ppt_w/2"/>
+                                          </p:val>
+                                        </p:tav>
+                                        <p:tav tm="100000">
+                                          <p:val>
+                                            <p:strVal val="#ppt_x"/>
+                                          </p:val>
+                                        </p:tav>
+                                      </p:tavLst>
+                                    </p:anim>
+                                    <p:anim calcmode="lin" valueType="num">
+                                      <p:cBhvr additive="base">
+                                        <p:cTn id="14" dur="500" fill="hold"/>
+                                        <p:tgtEl>
+                                          <p:spTgt spid="6"/>
+                                        </p:tgtEl>
+                                        <p:attrNameLst>
+                                          <p:attrName>ppt_y</p:attrName>
+                                        </p:attrNameLst>
+                                      </p:cBhvr>
+                                      <p:tavLst>
+                                        <p:tav tm="0">
+                                          <p:val>
+                                            <p:strVal val="#ppt_y"/>
+                                          </p:val>
+                                        </p:tav>
+                                        <p:tav tm="100000">
+                                          <p:val>
+                                            <p:strVal val="#ppt_y"/>
+                                          </p:val>
+                                        </p:tav>
+                                      </p:tavLst>
+                                    </p:anim>
+                                  </p:childTnLst>
+                                </p:cTn>
+                              </p:par>
                             </p:childTnLst>
                           </p:cTn>
                         </p:par>
@@ -7335,14 +8444,28 @@
                   </p:par>
                 </p:childTnLst>
               </p:cTn>
+              <p:prevCondLst>
+                <p:cond evt="onPrev" delay="0">
+                  <p:tgtEl>
+                    <p:sldTgt/>
+                  </p:tgtEl>
+                </p:cond>
+              </p:prevCondLst>
+              <p:nextCondLst>
+                <p:cond evt="onNext" delay="0">
+                  <p:tgtEl>
+                    <p:sldTgt/>
+                  </p:tgtEl>
+                </p:cond>
+              </p:nextCondLst>
             </p:seq>
           </p:childTnLst>
         </p:cTn>
       </p:par>
     </p:tnLst>
     <p:bldLst>
-      <p:bldP spid="4" grpId="0" build="allAtOnce"/>
-      <p:bldP spid="6" grpId="0" build="allAtOnce"/>
+      <p:bldP spid="4" grpId="0" uiExpand="0" advAuto="indefinite" build="whole" animBg="1"/>
+      <p:bldP spid="6" grpId="0" uiExpand="0" advAuto="indefinite" build="whole" animBg="1"/>
     </p:bldLst>
   </p:timing>
 </p:sld>
@@ -7648,7 +8771,7 @@
   <p:timing>
     <p:tnLst>
       <p:par>
-        <p:cTn id="1" dur="indefinite" restart="never" nodeType="tmRoot">
+        <p:cTn id="1" restart="never" nodeType="tmRoot">
           <p:childTnLst>
             <p:seq concurrent="1" nextAc="seek">
               <p:cTn id="2" dur="indefinite" nodeType="mainSeq">
@@ -7660,33 +8783,84 @@
                       </p:stCondLst>
                       <p:childTnLst>
                         <p:par>
-                          <p:cTn id="4" presetID="2" presetClass="entr" presetSubtype="4" fill="hold" grpId="0" nodeType="clickEffect">
+                          <p:cTn id="4" fill="hold">
                             <p:stCondLst>
                               <p:cond delay="0"/>
                             </p:stCondLst>
                             <p:childTnLst>
-                              <p:set>
-                                <p:cBhvr>
-                                  <p:cTn id="5" dur="1" fill="hold"/>
-                                  <p:tgtEl>
-                                    <p:spTgt spid="4"/>
-                                  </p:tgtEl>
-                                  <p:attrNameLst>
-                                    <p:attrName>style.visibility</p:attrName>
-                                  </p:attrNameLst>
-                                </p:cBhvr>
-                                <p:to>
-                                  <p:strVal val="visible"/>
-                                </p:to>
-                              </p:set>
-                              <p:animEffect transition="in" filter="fly(l)" prLst="dir=l">
-                                <p:cBhvr>
-                                  <p:cTn id="6" dur="500"/>
-                                  <p:tgtEl>
-                                    <p:spTgt spid="4"/>
-                                  </p:tgtEl>
-                                </p:cBhvr>
-                              </p:animEffect>
+                              <p:par>
+                                <p:cTn id="5" presetID="2" presetClass="entr" presetSubtype="8" fill="hold" grpId="0" nodeType="clickEffect">
+                                  <p:stCondLst>
+                                    <p:cond delay="0"/>
+                                  </p:stCondLst>
+                                  <p:childTnLst>
+                                    <p:set>
+                                      <p:cBhvr>
+                                        <p:cTn id="6" dur="1" fill="hold">
+                                          <p:stCondLst>
+                                            <p:cond delay="0"/>
+                                          </p:stCondLst>
+                                        </p:cTn>
+                                        <p:tgtEl>
+                                          <p:spTgt spid="4"/>
+                                        </p:tgtEl>
+                                        <p:attrNameLst>
+                                          <p:attrName>style.visibility</p:attrName>
+                                        </p:attrNameLst>
+                                      </p:cBhvr>
+                                      <p:to>
+                                        <p:strVal val="visible"/>
+                                      </p:to>
+                                    </p:set>
+                                    <p:anim calcmode="lin" valueType="num">
+                                      <p:cBhvr additive="base">
+                                        <p:cTn id="7" dur="500" fill="hold"/>
+                                        <p:tgtEl>
+                                          <p:spTgt spid="4"/>
+                                        </p:tgtEl>
+                                        <p:attrNameLst>
+                                          <p:attrName>ppt_x</p:attrName>
+                                        </p:attrNameLst>
+                                      </p:cBhvr>
+                                      <p:tavLst>
+                                        <p:tav tm="0">
+                                          <p:val>
+                                            <p:strVal val="0-#ppt_w/2"/>
+                                          </p:val>
+                                        </p:tav>
+                                        <p:tav tm="100000">
+                                          <p:val>
+                                            <p:strVal val="#ppt_x"/>
+                                          </p:val>
+                                        </p:tav>
+                                      </p:tavLst>
+                                    </p:anim>
+                                    <p:anim calcmode="lin" valueType="num">
+                                      <p:cBhvr additive="base">
+                                        <p:cTn id="8" dur="500" fill="hold"/>
+                                        <p:tgtEl>
+                                          <p:spTgt spid="4"/>
+                                        </p:tgtEl>
+                                        <p:attrNameLst>
+                                          <p:attrName>ppt_y</p:attrName>
+                                        </p:attrNameLst>
+                                      </p:cBhvr>
+                                      <p:tavLst>
+                                        <p:tav tm="0">
+                                          <p:val>
+                                            <p:strVal val="#ppt_y"/>
+                                          </p:val>
+                                        </p:tav>
+                                        <p:tav tm="100000">
+                                          <p:val>
+                                            <p:strVal val="#ppt_y"/>
+                                          </p:val>
+                                        </p:tav>
+                                      </p:tavLst>
+                                    </p:anim>
+                                  </p:childTnLst>
+                                </p:cTn>
+                              </p:par>
                             </p:childTnLst>
                           </p:cTn>
                         </p:par>
@@ -7694,39 +8868,90 @@
                     </p:cTn>
                   </p:par>
                   <p:par>
-                    <p:cTn id="7" fill="hold">
+                    <p:cTn id="9" fill="hold">
                       <p:stCondLst>
                         <p:cond delay="indefinite"/>
                       </p:stCondLst>
                       <p:childTnLst>
                         <p:par>
-                          <p:cTn id="8" presetID="2" presetClass="entr" presetSubtype="4" fill="hold" grpId="0" nodeType="clickEffect">
+                          <p:cTn id="10" fill="hold">
                             <p:stCondLst>
                               <p:cond delay="0"/>
                             </p:stCondLst>
                             <p:childTnLst>
-                              <p:set>
-                                <p:cBhvr>
-                                  <p:cTn id="9" dur="1" fill="hold"/>
-                                  <p:tgtEl>
-                                    <p:spTgt spid="6"/>
-                                  </p:tgtEl>
-                                  <p:attrNameLst>
-                                    <p:attrName>style.visibility</p:attrName>
-                                  </p:attrNameLst>
-                                </p:cBhvr>
-                                <p:to>
-                                  <p:strVal val="visible"/>
-                                </p:to>
-                              </p:set>
-                              <p:animEffect transition="in" filter="fly(l)" prLst="dir=l">
-                                <p:cBhvr>
-                                  <p:cTn id="10" dur="500"/>
-                                  <p:tgtEl>
-                                    <p:spTgt spid="6"/>
-                                  </p:tgtEl>
-                                </p:cBhvr>
-                              </p:animEffect>
+                              <p:par>
+                                <p:cTn id="11" presetID="2" presetClass="entr" presetSubtype="8" fill="hold" grpId="0" nodeType="clickEffect">
+                                  <p:stCondLst>
+                                    <p:cond delay="0"/>
+                                  </p:stCondLst>
+                                  <p:childTnLst>
+                                    <p:set>
+                                      <p:cBhvr>
+                                        <p:cTn id="12" dur="1" fill="hold">
+                                          <p:stCondLst>
+                                            <p:cond delay="0"/>
+                                          </p:stCondLst>
+                                        </p:cTn>
+                                        <p:tgtEl>
+                                          <p:spTgt spid="6"/>
+                                        </p:tgtEl>
+                                        <p:attrNameLst>
+                                          <p:attrName>style.visibility</p:attrName>
+                                        </p:attrNameLst>
+                                      </p:cBhvr>
+                                      <p:to>
+                                        <p:strVal val="visible"/>
+                                      </p:to>
+                                    </p:set>
+                                    <p:anim calcmode="lin" valueType="num">
+                                      <p:cBhvr additive="base">
+                                        <p:cTn id="13" dur="500" fill="hold"/>
+                                        <p:tgtEl>
+                                          <p:spTgt spid="6"/>
+                                        </p:tgtEl>
+                                        <p:attrNameLst>
+                                          <p:attrName>ppt_x</p:attrName>
+                                        </p:attrNameLst>
+                                      </p:cBhvr>
+                                      <p:tavLst>
+                                        <p:tav tm="0">
+                                          <p:val>
+                                            <p:strVal val="0-#ppt_w/2"/>
+                                          </p:val>
+                                        </p:tav>
+                                        <p:tav tm="100000">
+                                          <p:val>
+                                            <p:strVal val="#ppt_x"/>
+                                          </p:val>
+                                        </p:tav>
+                                      </p:tavLst>
+                                    </p:anim>
+                                    <p:anim calcmode="lin" valueType="num">
+                                      <p:cBhvr additive="base">
+                                        <p:cTn id="14" dur="500" fill="hold"/>
+                                        <p:tgtEl>
+                                          <p:spTgt spid="6"/>
+                                        </p:tgtEl>
+                                        <p:attrNameLst>
+                                          <p:attrName>ppt_y</p:attrName>
+                                        </p:attrNameLst>
+                                      </p:cBhvr>
+                                      <p:tavLst>
+                                        <p:tav tm="0">
+                                          <p:val>
+                                            <p:strVal val="#ppt_y"/>
+                                          </p:val>
+                                        </p:tav>
+                                        <p:tav tm="100000">
+                                          <p:val>
+                                            <p:strVal val="#ppt_y"/>
+                                          </p:val>
+                                        </p:tav>
+                                      </p:tavLst>
+                                    </p:anim>
+                                  </p:childTnLst>
+                                </p:cTn>
+                              </p:par>
                             </p:childTnLst>
                           </p:cTn>
                         </p:par>
@@ -7735,14 +8960,28 @@
                   </p:par>
                 </p:childTnLst>
               </p:cTn>
+              <p:prevCondLst>
+                <p:cond evt="onPrev" delay="0">
+                  <p:tgtEl>
+                    <p:sldTgt/>
+                  </p:tgtEl>
+                </p:cond>
+              </p:prevCondLst>
+              <p:nextCondLst>
+                <p:cond evt="onNext" delay="0">
+                  <p:tgtEl>
+                    <p:sldTgt/>
+                  </p:tgtEl>
+                </p:cond>
+              </p:nextCondLst>
             </p:seq>
           </p:childTnLst>
         </p:cTn>
       </p:par>
     </p:tnLst>
     <p:bldLst>
-      <p:bldP spid="4" grpId="0" build="allAtOnce"/>
-      <p:bldP spid="6" grpId="0" build="allAtOnce"/>
+      <p:bldP spid="4" grpId="0" uiExpand="0" advAuto="indefinite" build="whole" animBg="1"/>
+      <p:bldP spid="6" grpId="0" uiExpand="0" advAuto="indefinite" build="whole" animBg="1"/>
     </p:bldLst>
   </p:timing>
 </p:sld>
@@ -8044,7 +9283,7 @@
   <p:timing>
     <p:tnLst>
       <p:par>
-        <p:cTn id="1" dur="indefinite" restart="never" nodeType="tmRoot">
+        <p:cTn id="1" restart="never" nodeType="tmRoot">
           <p:childTnLst>
             <p:seq concurrent="1" nextAc="seek">
               <p:cTn id="2" dur="indefinite" nodeType="mainSeq">
@@ -8056,33 +9295,84 @@
                       </p:stCondLst>
                       <p:childTnLst>
                         <p:par>
-                          <p:cTn id="4" presetID="2" presetClass="entr" presetSubtype="4" fill="hold" grpId="0" nodeType="clickEffect">
+                          <p:cTn id="4" fill="hold">
                             <p:stCondLst>
                               <p:cond delay="0"/>
                             </p:stCondLst>
                             <p:childTnLst>
-                              <p:set>
-                                <p:cBhvr>
-                                  <p:cTn id="5" dur="1" fill="hold"/>
-                                  <p:tgtEl>
-                                    <p:spTgt spid="4"/>
-                                  </p:tgtEl>
-                                  <p:attrNameLst>
-                                    <p:attrName>style.visibility</p:attrName>
-                                  </p:attrNameLst>
-                                </p:cBhvr>
-                                <p:to>
-                                  <p:strVal val="visible"/>
-                                </p:to>
-                              </p:set>
-                              <p:animEffect transition="in" filter="fly(l)" prLst="dir=l">
-                                <p:cBhvr>
-                                  <p:cTn id="6" dur="500"/>
-                                  <p:tgtEl>
-                                    <p:spTgt spid="4"/>
-                                  </p:tgtEl>
-                                </p:cBhvr>
-                              </p:animEffect>
+                              <p:par>
+                                <p:cTn id="5" presetID="2" presetClass="entr" presetSubtype="8" fill="hold" grpId="0" nodeType="clickEffect">
+                                  <p:stCondLst>
+                                    <p:cond delay="0"/>
+                                  </p:stCondLst>
+                                  <p:childTnLst>
+                                    <p:set>
+                                      <p:cBhvr>
+                                        <p:cTn id="6" dur="1" fill="hold">
+                                          <p:stCondLst>
+                                            <p:cond delay="0"/>
+                                          </p:stCondLst>
+                                        </p:cTn>
+                                        <p:tgtEl>
+                                          <p:spTgt spid="4"/>
+                                        </p:tgtEl>
+                                        <p:attrNameLst>
+                                          <p:attrName>style.visibility</p:attrName>
+                                        </p:attrNameLst>
+                                      </p:cBhvr>
+                                      <p:to>
+                                        <p:strVal val="visible"/>
+                                      </p:to>
+                                    </p:set>
+                                    <p:anim calcmode="lin" valueType="num">
+                                      <p:cBhvr additive="base">
+                                        <p:cTn id="7" dur="500" fill="hold"/>
+                                        <p:tgtEl>
+                                          <p:spTgt spid="4"/>
+                                        </p:tgtEl>
+                                        <p:attrNameLst>
+                                          <p:attrName>ppt_x</p:attrName>
+                                        </p:attrNameLst>
+                                      </p:cBhvr>
+                                      <p:tavLst>
+                                        <p:tav tm="0">
+                                          <p:val>
+                                            <p:strVal val="0-#ppt_w/2"/>
+                                          </p:val>
+                                        </p:tav>
+                                        <p:tav tm="100000">
+                                          <p:val>
+                                            <p:strVal val="#ppt_x"/>
+                                          </p:val>
+                                        </p:tav>
+                                      </p:tavLst>
+                                    </p:anim>
+                                    <p:anim calcmode="lin" valueType="num">
+                                      <p:cBhvr additive="base">
+                                        <p:cTn id="8" dur="500" fill="hold"/>
+                                        <p:tgtEl>
+                                          <p:spTgt spid="4"/>
+                                        </p:tgtEl>
+                                        <p:attrNameLst>
+                                          <p:attrName>ppt_y</p:attrName>
+                                        </p:attrNameLst>
+                                      </p:cBhvr>
+                                      <p:tavLst>
+                                        <p:tav tm="0">
+                                          <p:val>
+                                            <p:strVal val="#ppt_y"/>
+                                          </p:val>
+                                        </p:tav>
+                                        <p:tav tm="100000">
+                                          <p:val>
+                                            <p:strVal val="#ppt_y"/>
+                                          </p:val>
+                                        </p:tav>
+                                      </p:tavLst>
+                                    </p:anim>
+                                  </p:childTnLst>
+                                </p:cTn>
+                              </p:par>
                             </p:childTnLst>
                           </p:cTn>
                         </p:par>
@@ -8090,39 +9380,90 @@
                     </p:cTn>
                   </p:par>
                   <p:par>
-                    <p:cTn id="7" fill="hold">
+                    <p:cTn id="9" fill="hold">
                       <p:stCondLst>
                         <p:cond delay="indefinite"/>
                       </p:stCondLst>
                       <p:childTnLst>
                         <p:par>
-                          <p:cTn id="8" presetID="2" presetClass="entr" presetSubtype="4" fill="hold" grpId="0" nodeType="clickEffect">
+                          <p:cTn id="10" fill="hold">
                             <p:stCondLst>
                               <p:cond delay="0"/>
                             </p:stCondLst>
                             <p:childTnLst>
-                              <p:set>
-                                <p:cBhvr>
-                                  <p:cTn id="9" dur="1" fill="hold"/>
-                                  <p:tgtEl>
-                                    <p:spTgt spid="6"/>
-                                  </p:tgtEl>
-                                  <p:attrNameLst>
-                                    <p:attrName>style.visibility</p:attrName>
-                                  </p:attrNameLst>
-                                </p:cBhvr>
-                                <p:to>
-                                  <p:strVal val="visible"/>
-                                </p:to>
-                              </p:set>
-                              <p:animEffect transition="in" filter="fly(l)" prLst="dir=l">
-                                <p:cBhvr>
-                                  <p:cTn id="10" dur="500"/>
-                                  <p:tgtEl>
-                                    <p:spTgt spid="6"/>
-                                  </p:tgtEl>
-                                </p:cBhvr>
-                              </p:animEffect>
+                              <p:par>
+                                <p:cTn id="11" presetID="2" presetClass="entr" presetSubtype="8" fill="hold" grpId="0" nodeType="clickEffect">
+                                  <p:stCondLst>
+                                    <p:cond delay="0"/>
+                                  </p:stCondLst>
+                                  <p:childTnLst>
+                                    <p:set>
+                                      <p:cBhvr>
+                                        <p:cTn id="12" dur="1" fill="hold">
+                                          <p:stCondLst>
+                                            <p:cond delay="0"/>
+                                          </p:stCondLst>
+                                        </p:cTn>
+                                        <p:tgtEl>
+                                          <p:spTgt spid="6"/>
+                                        </p:tgtEl>
+                                        <p:attrNameLst>
+                                          <p:attrName>style.visibility</p:attrName>
+                                        </p:attrNameLst>
+                                      </p:cBhvr>
+                                      <p:to>
+                                        <p:strVal val="visible"/>
+                                      </p:to>
+                                    </p:set>
+                                    <p:anim calcmode="lin" valueType="num">
+                                      <p:cBhvr additive="base">
+                                        <p:cTn id="13" dur="500" fill="hold"/>
+                                        <p:tgtEl>
+                                          <p:spTgt spid="6"/>
+                                        </p:tgtEl>
+                                        <p:attrNameLst>
+                                          <p:attrName>ppt_x</p:attrName>
+                                        </p:attrNameLst>
+                                      </p:cBhvr>
+                                      <p:tavLst>
+                                        <p:tav tm="0">
+                                          <p:val>
+                                            <p:strVal val="0-#ppt_w/2"/>
+                                          </p:val>
+                                        </p:tav>
+                                        <p:tav tm="100000">
+                                          <p:val>
+                                            <p:strVal val="#ppt_x"/>
+                                          </p:val>
+                                        </p:tav>
+                                      </p:tavLst>
+                                    </p:anim>
+                                    <p:anim calcmode="lin" valueType="num">
+                                      <p:cBhvr additive="base">
+                                        <p:cTn id="14" dur="500" fill="hold"/>
+                                        <p:tgtEl>
+                                          <p:spTgt spid="6"/>
+                                        </p:tgtEl>
+                                        <p:attrNameLst>
+                                          <p:attrName>ppt_y</p:attrName>
+                                        </p:attrNameLst>
+                                      </p:cBhvr>
+                                      <p:tavLst>
+                                        <p:tav tm="0">
+                                          <p:val>
+                                            <p:strVal val="#ppt_y"/>
+                                          </p:val>
+                                        </p:tav>
+                                        <p:tav tm="100000">
+                                          <p:val>
+                                            <p:strVal val="#ppt_y"/>
+                                          </p:val>
+                                        </p:tav>
+                                      </p:tavLst>
+                                    </p:anim>
+                                  </p:childTnLst>
+                                </p:cTn>
+                              </p:par>
                             </p:childTnLst>
                           </p:cTn>
                         </p:par>
@@ -8131,14 +9472,28 @@
                   </p:par>
                 </p:childTnLst>
               </p:cTn>
+              <p:prevCondLst>
+                <p:cond evt="onPrev" delay="0">
+                  <p:tgtEl>
+                    <p:sldTgt/>
+                  </p:tgtEl>
+                </p:cond>
+              </p:prevCondLst>
+              <p:nextCondLst>
+                <p:cond evt="onNext" delay="0">
+                  <p:tgtEl>
+                    <p:sldTgt/>
+                  </p:tgtEl>
+                </p:cond>
+              </p:nextCondLst>
             </p:seq>
           </p:childTnLst>
         </p:cTn>
       </p:par>
     </p:tnLst>
     <p:bldLst>
-      <p:bldP spid="4" grpId="0" build="allAtOnce"/>
-      <p:bldP spid="6" grpId="0" build="allAtOnce"/>
+      <p:bldP spid="4" grpId="0" uiExpand="0" advAuto="indefinite" build="whole" animBg="1"/>
+      <p:bldP spid="6" grpId="0" uiExpand="0" advAuto="indefinite" build="whole" animBg="1"/>
     </p:bldLst>
   </p:timing>
 </p:sld>
@@ -8441,7 +9796,7 @@
   <p:timing>
     <p:tnLst>
       <p:par>
-        <p:cTn id="1" dur="indefinite" restart="never" nodeType="tmRoot">
+        <p:cTn id="1" restart="never" nodeType="tmRoot">
           <p:childTnLst>
             <p:seq concurrent="1" nextAc="seek">
               <p:cTn id="2" dur="indefinite" nodeType="mainSeq">
@@ -8453,33 +9808,84 @@
                       </p:stCondLst>
                       <p:childTnLst>
                         <p:par>
-                          <p:cTn id="4" presetID="2" presetClass="entr" presetSubtype="4" fill="hold" grpId="0" nodeType="clickEffect">
+                          <p:cTn id="4" fill="hold">
                             <p:stCondLst>
                               <p:cond delay="0"/>
                             </p:stCondLst>
                             <p:childTnLst>
-                              <p:set>
-                                <p:cBhvr>
-                                  <p:cTn id="5" dur="1" fill="hold"/>
-                                  <p:tgtEl>
-                                    <p:spTgt spid="4"/>
-                                  </p:tgtEl>
-                                  <p:attrNameLst>
-                                    <p:attrName>style.visibility</p:attrName>
-                                  </p:attrNameLst>
-                                </p:cBhvr>
-                                <p:to>
-                                  <p:strVal val="visible"/>
-                                </p:to>
-                              </p:set>
-                              <p:animEffect transition="in" filter="fly(l)" prLst="dir=l">
-                                <p:cBhvr>
-                                  <p:cTn id="6" dur="500"/>
-                                  <p:tgtEl>
-                                    <p:spTgt spid="4"/>
-                                  </p:tgtEl>
-                                </p:cBhvr>
-                              </p:animEffect>
+                              <p:par>
+                                <p:cTn id="5" presetID="2" presetClass="entr" presetSubtype="8" fill="hold" grpId="0" nodeType="clickEffect">
+                                  <p:stCondLst>
+                                    <p:cond delay="0"/>
+                                  </p:stCondLst>
+                                  <p:childTnLst>
+                                    <p:set>
+                                      <p:cBhvr>
+                                        <p:cTn id="6" dur="1" fill="hold">
+                                          <p:stCondLst>
+                                            <p:cond delay="0"/>
+                                          </p:stCondLst>
+                                        </p:cTn>
+                                        <p:tgtEl>
+                                          <p:spTgt spid="4"/>
+                                        </p:tgtEl>
+                                        <p:attrNameLst>
+                                          <p:attrName>style.visibility</p:attrName>
+                                        </p:attrNameLst>
+                                      </p:cBhvr>
+                                      <p:to>
+                                        <p:strVal val="visible"/>
+                                      </p:to>
+                                    </p:set>
+                                    <p:anim calcmode="lin" valueType="num">
+                                      <p:cBhvr additive="base">
+                                        <p:cTn id="7" dur="500" fill="hold"/>
+                                        <p:tgtEl>
+                                          <p:spTgt spid="4"/>
+                                        </p:tgtEl>
+                                        <p:attrNameLst>
+                                          <p:attrName>ppt_x</p:attrName>
+                                        </p:attrNameLst>
+                                      </p:cBhvr>
+                                      <p:tavLst>
+                                        <p:tav tm="0">
+                                          <p:val>
+                                            <p:strVal val="0-#ppt_w/2"/>
+                                          </p:val>
+                                        </p:tav>
+                                        <p:tav tm="100000">
+                                          <p:val>
+                                            <p:strVal val="#ppt_x"/>
+                                          </p:val>
+                                        </p:tav>
+                                      </p:tavLst>
+                                    </p:anim>
+                                    <p:anim calcmode="lin" valueType="num">
+                                      <p:cBhvr additive="base">
+                                        <p:cTn id="8" dur="500" fill="hold"/>
+                                        <p:tgtEl>
+                                          <p:spTgt spid="4"/>
+                                        </p:tgtEl>
+                                        <p:attrNameLst>
+                                          <p:attrName>ppt_y</p:attrName>
+                                        </p:attrNameLst>
+                                      </p:cBhvr>
+                                      <p:tavLst>
+                                        <p:tav tm="0">
+                                          <p:val>
+                                            <p:strVal val="#ppt_y"/>
+                                          </p:val>
+                                        </p:tav>
+                                        <p:tav tm="100000">
+                                          <p:val>
+                                            <p:strVal val="#ppt_y"/>
+                                          </p:val>
+                                        </p:tav>
+                                      </p:tavLst>
+                                    </p:anim>
+                                  </p:childTnLst>
+                                </p:cTn>
+                              </p:par>
                             </p:childTnLst>
                           </p:cTn>
                         </p:par>
@@ -8487,39 +9893,90 @@
                     </p:cTn>
                   </p:par>
                   <p:par>
-                    <p:cTn id="7" fill="hold">
+                    <p:cTn id="9" fill="hold">
                       <p:stCondLst>
                         <p:cond delay="indefinite"/>
                       </p:stCondLst>
                       <p:childTnLst>
                         <p:par>
-                          <p:cTn id="8" presetID="2" presetClass="entr" presetSubtype="4" fill="hold" grpId="0" nodeType="clickEffect">
+                          <p:cTn id="10" fill="hold">
                             <p:stCondLst>
                               <p:cond delay="0"/>
                             </p:stCondLst>
                             <p:childTnLst>
-                              <p:set>
-                                <p:cBhvr>
-                                  <p:cTn id="9" dur="1" fill="hold"/>
-                                  <p:tgtEl>
-                                    <p:spTgt spid="6"/>
-                                  </p:tgtEl>
-                                  <p:attrNameLst>
-                                    <p:attrName>style.visibility</p:attrName>
-                                  </p:attrNameLst>
-                                </p:cBhvr>
-                                <p:to>
-                                  <p:strVal val="visible"/>
-                                </p:to>
-                              </p:set>
-                              <p:animEffect transition="in" filter="fly(l)" prLst="dir=l">
-                                <p:cBhvr>
-                                  <p:cTn id="10" dur="500"/>
-                                  <p:tgtEl>
-                                    <p:spTgt spid="6"/>
-                                  </p:tgtEl>
-                                </p:cBhvr>
-                              </p:animEffect>
+                              <p:par>
+                                <p:cTn id="11" presetID="2" presetClass="entr" presetSubtype="8" fill="hold" grpId="0" nodeType="clickEffect">
+                                  <p:stCondLst>
+                                    <p:cond delay="0"/>
+                                  </p:stCondLst>
+                                  <p:childTnLst>
+                                    <p:set>
+                                      <p:cBhvr>
+                                        <p:cTn id="12" dur="1" fill="hold">
+                                          <p:stCondLst>
+                                            <p:cond delay="0"/>
+                                          </p:stCondLst>
+                                        </p:cTn>
+                                        <p:tgtEl>
+                                          <p:spTgt spid="6"/>
+                                        </p:tgtEl>
+                                        <p:attrNameLst>
+                                          <p:attrName>style.visibility</p:attrName>
+                                        </p:attrNameLst>
+                                      </p:cBhvr>
+                                      <p:to>
+                                        <p:strVal val="visible"/>
+                                      </p:to>
+                                    </p:set>
+                                    <p:anim calcmode="lin" valueType="num">
+                                      <p:cBhvr additive="base">
+                                        <p:cTn id="13" dur="500" fill="hold"/>
+                                        <p:tgtEl>
+                                          <p:spTgt spid="6"/>
+                                        </p:tgtEl>
+                                        <p:attrNameLst>
+                                          <p:attrName>ppt_x</p:attrName>
+                                        </p:attrNameLst>
+                                      </p:cBhvr>
+                                      <p:tavLst>
+                                        <p:tav tm="0">
+                                          <p:val>
+                                            <p:strVal val="0-#ppt_w/2"/>
+                                          </p:val>
+                                        </p:tav>
+                                        <p:tav tm="100000">
+                                          <p:val>
+                                            <p:strVal val="#ppt_x"/>
+                                          </p:val>
+                                        </p:tav>
+                                      </p:tavLst>
+                                    </p:anim>
+                                    <p:anim calcmode="lin" valueType="num">
+                                      <p:cBhvr additive="base">
+                                        <p:cTn id="14" dur="500" fill="hold"/>
+                                        <p:tgtEl>
+                                          <p:spTgt spid="6"/>
+                                        </p:tgtEl>
+                                        <p:attrNameLst>
+                                          <p:attrName>ppt_y</p:attrName>
+                                        </p:attrNameLst>
+                                      </p:cBhvr>
+                                      <p:tavLst>
+                                        <p:tav tm="0">
+                                          <p:val>
+                                            <p:strVal val="#ppt_y"/>
+                                          </p:val>
+                                        </p:tav>
+                                        <p:tav tm="100000">
+                                          <p:val>
+                                            <p:strVal val="#ppt_y"/>
+                                          </p:val>
+                                        </p:tav>
+                                      </p:tavLst>
+                                    </p:anim>
+                                  </p:childTnLst>
+                                </p:cTn>
+                              </p:par>
                             </p:childTnLst>
                           </p:cTn>
                         </p:par>
@@ -8528,14 +9985,28 @@
                   </p:par>
                 </p:childTnLst>
               </p:cTn>
+              <p:prevCondLst>
+                <p:cond evt="onPrev" delay="0">
+                  <p:tgtEl>
+                    <p:sldTgt/>
+                  </p:tgtEl>
+                </p:cond>
+              </p:prevCondLst>
+              <p:nextCondLst>
+                <p:cond evt="onNext" delay="0">
+                  <p:tgtEl>
+                    <p:sldTgt/>
+                  </p:tgtEl>
+                </p:cond>
+              </p:nextCondLst>
             </p:seq>
           </p:childTnLst>
         </p:cTn>
       </p:par>
     </p:tnLst>
     <p:bldLst>
-      <p:bldP spid="4" grpId="0" build="allAtOnce"/>
-      <p:bldP spid="6" grpId="0" build="allAtOnce"/>
+      <p:bldP spid="4" grpId="0" uiExpand="0" advAuto="indefinite" build="whole" animBg="1"/>
+      <p:bldP spid="6" grpId="0" uiExpand="0" advAuto="indefinite" build="whole" animBg="1"/>
     </p:bldLst>
   </p:timing>
 </p:sld>
@@ -8837,7 +10308,7 @@
   <p:timing>
     <p:tnLst>
       <p:par>
-        <p:cTn id="1" dur="indefinite" restart="never" nodeType="tmRoot">
+        <p:cTn id="1" restart="never" nodeType="tmRoot">
           <p:childTnLst>
             <p:seq concurrent="1" nextAc="seek">
               <p:cTn id="2" dur="indefinite" nodeType="mainSeq">
@@ -8849,33 +10320,84 @@
                       </p:stCondLst>
                       <p:childTnLst>
                         <p:par>
-                          <p:cTn id="4" presetID="2" presetClass="entr" presetSubtype="4" fill="hold" grpId="0" nodeType="clickEffect">
+                          <p:cTn id="4" fill="hold">
                             <p:stCondLst>
                               <p:cond delay="0"/>
                             </p:stCondLst>
                             <p:childTnLst>
-                              <p:set>
-                                <p:cBhvr>
-                                  <p:cTn id="5" dur="1" fill="hold"/>
-                                  <p:tgtEl>
-                                    <p:spTgt spid="4"/>
-                                  </p:tgtEl>
-                                  <p:attrNameLst>
-                                    <p:attrName>style.visibility</p:attrName>
-                                  </p:attrNameLst>
-                                </p:cBhvr>
-                                <p:to>
-                                  <p:strVal val="visible"/>
-                                </p:to>
-                              </p:set>
-                              <p:animEffect transition="in" filter="fly(l)" prLst="dir=l">
-                                <p:cBhvr>
-                                  <p:cTn id="6" dur="500"/>
-                                  <p:tgtEl>
-                                    <p:spTgt spid="4"/>
-                                  </p:tgtEl>
-                                </p:cBhvr>
-                              </p:animEffect>
+                              <p:par>
+                                <p:cTn id="5" presetID="2" presetClass="entr" presetSubtype="8" fill="hold" grpId="0" nodeType="clickEffect">
+                                  <p:stCondLst>
+                                    <p:cond delay="0"/>
+                                  </p:stCondLst>
+                                  <p:childTnLst>
+                                    <p:set>
+                                      <p:cBhvr>
+                                        <p:cTn id="6" dur="1" fill="hold">
+                                          <p:stCondLst>
+                                            <p:cond delay="0"/>
+                                          </p:stCondLst>
+                                        </p:cTn>
+                                        <p:tgtEl>
+                                          <p:spTgt spid="4"/>
+                                        </p:tgtEl>
+                                        <p:attrNameLst>
+                                          <p:attrName>style.visibility</p:attrName>
+                                        </p:attrNameLst>
+                                      </p:cBhvr>
+                                      <p:to>
+                                        <p:strVal val="visible"/>
+                                      </p:to>
+                                    </p:set>
+                                    <p:anim calcmode="lin" valueType="num">
+                                      <p:cBhvr additive="base">
+                                        <p:cTn id="7" dur="500" fill="hold"/>
+                                        <p:tgtEl>
+                                          <p:spTgt spid="4"/>
+                                        </p:tgtEl>
+                                        <p:attrNameLst>
+                                          <p:attrName>ppt_x</p:attrName>
+                                        </p:attrNameLst>
+                                      </p:cBhvr>
+                                      <p:tavLst>
+                                        <p:tav tm="0">
+                                          <p:val>
+                                            <p:strVal val="0-#ppt_w/2"/>
+                                          </p:val>
+                                        </p:tav>
+                                        <p:tav tm="100000">
+                                          <p:val>
+                                            <p:strVal val="#ppt_x"/>
+                                          </p:val>
+                                        </p:tav>
+                                      </p:tavLst>
+                                    </p:anim>
+                                    <p:anim calcmode="lin" valueType="num">
+                                      <p:cBhvr additive="base">
+                                        <p:cTn id="8" dur="500" fill="hold"/>
+                                        <p:tgtEl>
+                                          <p:spTgt spid="4"/>
+                                        </p:tgtEl>
+                                        <p:attrNameLst>
+                                          <p:attrName>ppt_y</p:attrName>
+                                        </p:attrNameLst>
+                                      </p:cBhvr>
+                                      <p:tavLst>
+                                        <p:tav tm="0">
+                                          <p:val>
+                                            <p:strVal val="#ppt_y"/>
+                                          </p:val>
+                                        </p:tav>
+                                        <p:tav tm="100000">
+                                          <p:val>
+                                            <p:strVal val="#ppt_y"/>
+                                          </p:val>
+                                        </p:tav>
+                                      </p:tavLst>
+                                    </p:anim>
+                                  </p:childTnLst>
+                                </p:cTn>
+                              </p:par>
                             </p:childTnLst>
                           </p:cTn>
                         </p:par>
@@ -8883,39 +10405,90 @@
                     </p:cTn>
                   </p:par>
                   <p:par>
-                    <p:cTn id="7" fill="hold">
+                    <p:cTn id="9" fill="hold">
                       <p:stCondLst>
                         <p:cond delay="indefinite"/>
                       </p:stCondLst>
                       <p:childTnLst>
                         <p:par>
-                          <p:cTn id="8" presetID="2" presetClass="entr" presetSubtype="4" fill="hold" grpId="0" nodeType="clickEffect">
+                          <p:cTn id="10" fill="hold">
                             <p:stCondLst>
                               <p:cond delay="0"/>
                             </p:stCondLst>
                             <p:childTnLst>
-                              <p:set>
-                                <p:cBhvr>
-                                  <p:cTn id="9" dur="1" fill="hold"/>
-                                  <p:tgtEl>
-                                    <p:spTgt spid="6"/>
-                                  </p:tgtEl>
-                                  <p:attrNameLst>
-                                    <p:attrName>style.visibility</p:attrName>
-                                  </p:attrNameLst>
-                                </p:cBhvr>
-                                <p:to>
-                                  <p:strVal val="visible"/>
-                                </p:to>
-                              </p:set>
-                              <p:animEffect transition="in" filter="fly(l)" prLst="dir=l">
-                                <p:cBhvr>
-                                  <p:cTn id="10" dur="500"/>
-                                  <p:tgtEl>
-                                    <p:spTgt spid="6"/>
-                                  </p:tgtEl>
-                                </p:cBhvr>
-                              </p:animEffect>
+                              <p:par>
+                                <p:cTn id="11" presetID="2" presetClass="entr" presetSubtype="8" fill="hold" grpId="0" nodeType="clickEffect">
+                                  <p:stCondLst>
+                                    <p:cond delay="0"/>
+                                  </p:stCondLst>
+                                  <p:childTnLst>
+                                    <p:set>
+                                      <p:cBhvr>
+                                        <p:cTn id="12" dur="1" fill="hold">
+                                          <p:stCondLst>
+                                            <p:cond delay="0"/>
+                                          </p:stCondLst>
+                                        </p:cTn>
+                                        <p:tgtEl>
+                                          <p:spTgt spid="6"/>
+                                        </p:tgtEl>
+                                        <p:attrNameLst>
+                                          <p:attrName>style.visibility</p:attrName>
+                                        </p:attrNameLst>
+                                      </p:cBhvr>
+                                      <p:to>
+                                        <p:strVal val="visible"/>
+                                      </p:to>
+                                    </p:set>
+                                    <p:anim calcmode="lin" valueType="num">
+                                      <p:cBhvr additive="base">
+                                        <p:cTn id="13" dur="500" fill="hold"/>
+                                        <p:tgtEl>
+                                          <p:spTgt spid="6"/>
+                                        </p:tgtEl>
+                                        <p:attrNameLst>
+                                          <p:attrName>ppt_x</p:attrName>
+                                        </p:attrNameLst>
+                                      </p:cBhvr>
+                                      <p:tavLst>
+                                        <p:tav tm="0">
+                                          <p:val>
+                                            <p:strVal val="0-#ppt_w/2"/>
+                                          </p:val>
+                                        </p:tav>
+                                        <p:tav tm="100000">
+                                          <p:val>
+                                            <p:strVal val="#ppt_x"/>
+                                          </p:val>
+                                        </p:tav>
+                                      </p:tavLst>
+                                    </p:anim>
+                                    <p:anim calcmode="lin" valueType="num">
+                                      <p:cBhvr additive="base">
+                                        <p:cTn id="14" dur="500" fill="hold"/>
+                                        <p:tgtEl>
+                                          <p:spTgt spid="6"/>
+                                        </p:tgtEl>
+                                        <p:attrNameLst>
+                                          <p:attrName>ppt_y</p:attrName>
+                                        </p:attrNameLst>
+                                      </p:cBhvr>
+                                      <p:tavLst>
+                                        <p:tav tm="0">
+                                          <p:val>
+                                            <p:strVal val="#ppt_y"/>
+                                          </p:val>
+                                        </p:tav>
+                                        <p:tav tm="100000">
+                                          <p:val>
+                                            <p:strVal val="#ppt_y"/>
+                                          </p:val>
+                                        </p:tav>
+                                      </p:tavLst>
+                                    </p:anim>
+                                  </p:childTnLst>
+                                </p:cTn>
+                              </p:par>
                             </p:childTnLst>
                           </p:cTn>
                         </p:par>
@@ -8924,14 +10497,28 @@
                   </p:par>
                 </p:childTnLst>
               </p:cTn>
+              <p:prevCondLst>
+                <p:cond evt="onPrev" delay="0">
+                  <p:tgtEl>
+                    <p:sldTgt/>
+                  </p:tgtEl>
+                </p:cond>
+              </p:prevCondLst>
+              <p:nextCondLst>
+                <p:cond evt="onNext" delay="0">
+                  <p:tgtEl>
+                    <p:sldTgt/>
+                  </p:tgtEl>
+                </p:cond>
+              </p:nextCondLst>
             </p:seq>
           </p:childTnLst>
         </p:cTn>
       </p:par>
     </p:tnLst>
     <p:bldLst>
-      <p:bldP spid="4" grpId="0" build="allAtOnce"/>
-      <p:bldP spid="6" grpId="0" build="allAtOnce"/>
+      <p:bldP spid="4" grpId="0" uiExpand="0" advAuto="indefinite" build="whole" animBg="1"/>
+      <p:bldP spid="6" grpId="0" uiExpand="0" advAuto="indefinite" build="whole" animBg="1"/>
     </p:bldLst>
   </p:timing>
 </p:sld>
@@ -9232,7 +10819,7 @@
   <p:timing>
     <p:tnLst>
       <p:par>
-        <p:cTn id="1" dur="indefinite" restart="never" nodeType="tmRoot">
+        <p:cTn id="1" restart="never" nodeType="tmRoot">
           <p:childTnLst>
             <p:seq concurrent="1" nextAc="seek">
               <p:cTn id="2" dur="indefinite" nodeType="mainSeq">
@@ -9244,33 +10831,84 @@
                       </p:stCondLst>
                       <p:childTnLst>
                         <p:par>
-                          <p:cTn id="4" presetID="2" presetClass="entr" presetSubtype="4" fill="hold" grpId="0" nodeType="clickEffect">
+                          <p:cTn id="4" fill="hold">
                             <p:stCondLst>
                               <p:cond delay="0"/>
                             </p:stCondLst>
                             <p:childTnLst>
-                              <p:set>
-                                <p:cBhvr>
-                                  <p:cTn id="5" dur="1" fill="hold"/>
-                                  <p:tgtEl>
-                                    <p:spTgt spid="4"/>
-                                  </p:tgtEl>
-                                  <p:attrNameLst>
-                                    <p:attrName>style.visibility</p:attrName>
-                                  </p:attrNameLst>
-                                </p:cBhvr>
-                                <p:to>
-                                  <p:strVal val="visible"/>
-                                </p:to>
-                              </p:set>
-                              <p:animEffect transition="in" filter="fly(l)" prLst="dir=l">
-                                <p:cBhvr>
-                                  <p:cTn id="6" dur="500"/>
-                                  <p:tgtEl>
-                                    <p:spTgt spid="4"/>
-                                  </p:tgtEl>
-                                </p:cBhvr>
-                              </p:animEffect>
+                              <p:par>
+                                <p:cTn id="5" presetID="2" presetClass="entr" presetSubtype="8" fill="hold" grpId="0" nodeType="clickEffect">
+                                  <p:stCondLst>
+                                    <p:cond delay="0"/>
+                                  </p:stCondLst>
+                                  <p:childTnLst>
+                                    <p:set>
+                                      <p:cBhvr>
+                                        <p:cTn id="6" dur="1" fill="hold">
+                                          <p:stCondLst>
+                                            <p:cond delay="0"/>
+                                          </p:stCondLst>
+                                        </p:cTn>
+                                        <p:tgtEl>
+                                          <p:spTgt spid="4"/>
+                                        </p:tgtEl>
+                                        <p:attrNameLst>
+                                          <p:attrName>style.visibility</p:attrName>
+                                        </p:attrNameLst>
+                                      </p:cBhvr>
+                                      <p:to>
+                                        <p:strVal val="visible"/>
+                                      </p:to>
+                                    </p:set>
+                                    <p:anim calcmode="lin" valueType="num">
+                                      <p:cBhvr additive="base">
+                                        <p:cTn id="7" dur="500" fill="hold"/>
+                                        <p:tgtEl>
+                                          <p:spTgt spid="4"/>
+                                        </p:tgtEl>
+                                        <p:attrNameLst>
+                                          <p:attrName>ppt_x</p:attrName>
+                                        </p:attrNameLst>
+                                      </p:cBhvr>
+                                      <p:tavLst>
+                                        <p:tav tm="0">
+                                          <p:val>
+                                            <p:strVal val="0-#ppt_w/2"/>
+                                          </p:val>
+                                        </p:tav>
+                                        <p:tav tm="100000">
+                                          <p:val>
+                                            <p:strVal val="#ppt_x"/>
+                                          </p:val>
+                                        </p:tav>
+                                      </p:tavLst>
+                                    </p:anim>
+                                    <p:anim calcmode="lin" valueType="num">
+                                      <p:cBhvr additive="base">
+                                        <p:cTn id="8" dur="500" fill="hold"/>
+                                        <p:tgtEl>
+                                          <p:spTgt spid="4"/>
+                                        </p:tgtEl>
+                                        <p:attrNameLst>
+                                          <p:attrName>ppt_y</p:attrName>
+                                        </p:attrNameLst>
+                                      </p:cBhvr>
+                                      <p:tavLst>
+                                        <p:tav tm="0">
+                                          <p:val>
+                                            <p:strVal val="#ppt_y"/>
+                                          </p:val>
+                                        </p:tav>
+                                        <p:tav tm="100000">
+                                          <p:val>
+                                            <p:strVal val="#ppt_y"/>
+                                          </p:val>
+                                        </p:tav>
+                                      </p:tavLst>
+                                    </p:anim>
+                                  </p:childTnLst>
+                                </p:cTn>
+                              </p:par>
                             </p:childTnLst>
                           </p:cTn>
                         </p:par>
@@ -9278,39 +10916,90 @@
                     </p:cTn>
                   </p:par>
                   <p:par>
-                    <p:cTn id="7" fill="hold">
+                    <p:cTn id="9" fill="hold">
                       <p:stCondLst>
                         <p:cond delay="indefinite"/>
                       </p:stCondLst>
                       <p:childTnLst>
                         <p:par>
-                          <p:cTn id="8" presetID="2" presetClass="entr" presetSubtype="4" fill="hold" grpId="0" nodeType="clickEffect">
+                          <p:cTn id="10" fill="hold">
                             <p:stCondLst>
                               <p:cond delay="0"/>
                             </p:stCondLst>
                             <p:childTnLst>
-                              <p:set>
-                                <p:cBhvr>
-                                  <p:cTn id="9" dur="1" fill="hold"/>
-                                  <p:tgtEl>
-                                    <p:spTgt spid="6"/>
-                                  </p:tgtEl>
-                                  <p:attrNameLst>
-                                    <p:attrName>style.visibility</p:attrName>
-                                  </p:attrNameLst>
-                                </p:cBhvr>
-                                <p:to>
-                                  <p:strVal val="visible"/>
-                                </p:to>
-                              </p:set>
-                              <p:animEffect transition="in" filter="fly(l)" prLst="dir=l">
-                                <p:cBhvr>
-                                  <p:cTn id="10" dur="500"/>
-                                  <p:tgtEl>
-                                    <p:spTgt spid="6"/>
-                                  </p:tgtEl>
-                                </p:cBhvr>
-                              </p:animEffect>
+                              <p:par>
+                                <p:cTn id="11" presetID="2" presetClass="entr" presetSubtype="8" fill="hold" grpId="0" nodeType="clickEffect">
+                                  <p:stCondLst>
+                                    <p:cond delay="0"/>
+                                  </p:stCondLst>
+                                  <p:childTnLst>
+                                    <p:set>
+                                      <p:cBhvr>
+                                        <p:cTn id="12" dur="1" fill="hold">
+                                          <p:stCondLst>
+                                            <p:cond delay="0"/>
+                                          </p:stCondLst>
+                                        </p:cTn>
+                                        <p:tgtEl>
+                                          <p:spTgt spid="6"/>
+                                        </p:tgtEl>
+                                        <p:attrNameLst>
+                                          <p:attrName>style.visibility</p:attrName>
+                                        </p:attrNameLst>
+                                      </p:cBhvr>
+                                      <p:to>
+                                        <p:strVal val="visible"/>
+                                      </p:to>
+                                    </p:set>
+                                    <p:anim calcmode="lin" valueType="num">
+                                      <p:cBhvr additive="base">
+                                        <p:cTn id="13" dur="500" fill="hold"/>
+                                        <p:tgtEl>
+                                          <p:spTgt spid="6"/>
+                                        </p:tgtEl>
+                                        <p:attrNameLst>
+                                          <p:attrName>ppt_x</p:attrName>
+                                        </p:attrNameLst>
+                                      </p:cBhvr>
+                                      <p:tavLst>
+                                        <p:tav tm="0">
+                                          <p:val>
+                                            <p:strVal val="0-#ppt_w/2"/>
+                                          </p:val>
+                                        </p:tav>
+                                        <p:tav tm="100000">
+                                          <p:val>
+                                            <p:strVal val="#ppt_x"/>
+                                          </p:val>
+                                        </p:tav>
+                                      </p:tavLst>
+                                    </p:anim>
+                                    <p:anim calcmode="lin" valueType="num">
+                                      <p:cBhvr additive="base">
+                                        <p:cTn id="14" dur="500" fill="hold"/>
+                                        <p:tgtEl>
+                                          <p:spTgt spid="6"/>
+                                        </p:tgtEl>
+                                        <p:attrNameLst>
+                                          <p:attrName>ppt_y</p:attrName>
+                                        </p:attrNameLst>
+                                      </p:cBhvr>
+                                      <p:tavLst>
+                                        <p:tav tm="0">
+                                          <p:val>
+                                            <p:strVal val="#ppt_y"/>
+                                          </p:val>
+                                        </p:tav>
+                                        <p:tav tm="100000">
+                                          <p:val>
+                                            <p:strVal val="#ppt_y"/>
+                                          </p:val>
+                                        </p:tav>
+                                      </p:tavLst>
+                                    </p:anim>
+                                  </p:childTnLst>
+                                </p:cTn>
+                              </p:par>
                             </p:childTnLst>
                           </p:cTn>
                         </p:par>
@@ -9319,14 +11008,28 @@
                   </p:par>
                 </p:childTnLst>
               </p:cTn>
+              <p:prevCondLst>
+                <p:cond evt="onPrev" delay="0">
+                  <p:tgtEl>
+                    <p:sldTgt/>
+                  </p:tgtEl>
+                </p:cond>
+              </p:prevCondLst>
+              <p:nextCondLst>
+                <p:cond evt="onNext" delay="0">
+                  <p:tgtEl>
+                    <p:sldTgt/>
+                  </p:tgtEl>
+                </p:cond>
+              </p:nextCondLst>
             </p:seq>
           </p:childTnLst>
         </p:cTn>
       </p:par>
     </p:tnLst>
     <p:bldLst>
-      <p:bldP spid="4" grpId="0" build="allAtOnce"/>
-      <p:bldP spid="6" grpId="0" build="allAtOnce"/>
+      <p:bldP spid="4" grpId="0" uiExpand="0" advAuto="indefinite" build="whole" animBg="1"/>
+      <p:bldP spid="6" grpId="0" uiExpand="0" advAuto="indefinite" build="whole" animBg="1"/>
     </p:bldLst>
   </p:timing>
 </p:sld>
@@ -9629,7 +11332,7 @@
   <p:timing>
     <p:tnLst>
       <p:par>
-        <p:cTn id="1" dur="indefinite" restart="never" nodeType="tmRoot">
+        <p:cTn id="1" restart="never" nodeType="tmRoot">
           <p:childTnLst>
             <p:seq concurrent="1" nextAc="seek">
               <p:cTn id="2" dur="indefinite" nodeType="mainSeq">
@@ -9641,33 +11344,84 @@
                       </p:stCondLst>
                       <p:childTnLst>
                         <p:par>
-                          <p:cTn id="4" presetID="2" presetClass="entr" presetSubtype="4" fill="hold" grpId="0" nodeType="clickEffect">
+                          <p:cTn id="4" fill="hold">
                             <p:stCondLst>
                               <p:cond delay="0"/>
                             </p:stCondLst>
                             <p:childTnLst>
-                              <p:set>
-                                <p:cBhvr>
-                                  <p:cTn id="5" dur="1" fill="hold"/>
-                                  <p:tgtEl>
-                                    <p:spTgt spid="4"/>
-                                  </p:tgtEl>
-                                  <p:attrNameLst>
-                                    <p:attrName>style.visibility</p:attrName>
-                                  </p:attrNameLst>
-                                </p:cBhvr>
-                                <p:to>
-                                  <p:strVal val="visible"/>
-                                </p:to>
-                              </p:set>
-                              <p:animEffect transition="in" filter="fly(l)" prLst="dir=l">
-                                <p:cBhvr>
-                                  <p:cTn id="6" dur="500"/>
-                                  <p:tgtEl>
-                                    <p:spTgt spid="4"/>
-                                  </p:tgtEl>
-                                </p:cBhvr>
-                              </p:animEffect>
+                              <p:par>
+                                <p:cTn id="5" presetID="2" presetClass="entr" presetSubtype="8" fill="hold" grpId="0" nodeType="clickEffect">
+                                  <p:stCondLst>
+                                    <p:cond delay="0"/>
+                                  </p:stCondLst>
+                                  <p:childTnLst>
+                                    <p:set>
+                                      <p:cBhvr>
+                                        <p:cTn id="6" dur="1" fill="hold">
+                                          <p:stCondLst>
+                                            <p:cond delay="0"/>
+                                          </p:stCondLst>
+                                        </p:cTn>
+                                        <p:tgtEl>
+                                          <p:spTgt spid="4"/>
+                                        </p:tgtEl>
+                                        <p:attrNameLst>
+                                          <p:attrName>style.visibility</p:attrName>
+                                        </p:attrNameLst>
+                                      </p:cBhvr>
+                                      <p:to>
+                                        <p:strVal val="visible"/>
+                                      </p:to>
+                                    </p:set>
+                                    <p:anim calcmode="lin" valueType="num">
+                                      <p:cBhvr additive="base">
+                                        <p:cTn id="7" dur="500" fill="hold"/>
+                                        <p:tgtEl>
+                                          <p:spTgt spid="4"/>
+                                        </p:tgtEl>
+                                        <p:attrNameLst>
+                                          <p:attrName>ppt_x</p:attrName>
+                                        </p:attrNameLst>
+                                      </p:cBhvr>
+                                      <p:tavLst>
+                                        <p:tav tm="0">
+                                          <p:val>
+                                            <p:strVal val="0-#ppt_w/2"/>
+                                          </p:val>
+                                        </p:tav>
+                                        <p:tav tm="100000">
+                                          <p:val>
+                                            <p:strVal val="#ppt_x"/>
+                                          </p:val>
+                                        </p:tav>
+                                      </p:tavLst>
+                                    </p:anim>
+                                    <p:anim calcmode="lin" valueType="num">
+                                      <p:cBhvr additive="base">
+                                        <p:cTn id="8" dur="500" fill="hold"/>
+                                        <p:tgtEl>
+                                          <p:spTgt spid="4"/>
+                                        </p:tgtEl>
+                                        <p:attrNameLst>
+                                          <p:attrName>ppt_y</p:attrName>
+                                        </p:attrNameLst>
+                                      </p:cBhvr>
+                                      <p:tavLst>
+                                        <p:tav tm="0">
+                                          <p:val>
+                                            <p:strVal val="#ppt_y"/>
+                                          </p:val>
+                                        </p:tav>
+                                        <p:tav tm="100000">
+                                          <p:val>
+                                            <p:strVal val="#ppt_y"/>
+                                          </p:val>
+                                        </p:tav>
+                                      </p:tavLst>
+                                    </p:anim>
+                                  </p:childTnLst>
+                                </p:cTn>
+                              </p:par>
                             </p:childTnLst>
                           </p:cTn>
                         </p:par>
@@ -9675,39 +11429,90 @@
                     </p:cTn>
                   </p:par>
                   <p:par>
-                    <p:cTn id="7" fill="hold">
+                    <p:cTn id="9" fill="hold">
                       <p:stCondLst>
                         <p:cond delay="indefinite"/>
                       </p:stCondLst>
                       <p:childTnLst>
                         <p:par>
-                          <p:cTn id="8" presetID="2" presetClass="entr" presetSubtype="4" fill="hold" grpId="0" nodeType="clickEffect">
+                          <p:cTn id="10" fill="hold">
                             <p:stCondLst>
                               <p:cond delay="0"/>
                             </p:stCondLst>
                             <p:childTnLst>
-                              <p:set>
-                                <p:cBhvr>
-                                  <p:cTn id="9" dur="1" fill="hold"/>
-                                  <p:tgtEl>
-                                    <p:spTgt spid="6"/>
-                                  </p:tgtEl>
-                                  <p:attrNameLst>
-                                    <p:attrName>style.visibility</p:attrName>
-                                  </p:attrNameLst>
-                                </p:cBhvr>
-                                <p:to>
-                                  <p:strVal val="visible"/>
-                                </p:to>
-                              </p:set>
-                              <p:animEffect transition="in" filter="fly(l)" prLst="dir=l">
-                                <p:cBhvr>
-                                  <p:cTn id="10" dur="500"/>
-                                  <p:tgtEl>
-                                    <p:spTgt spid="6"/>
-                                  </p:tgtEl>
-                                </p:cBhvr>
-                              </p:animEffect>
+                              <p:par>
+                                <p:cTn id="11" presetID="2" presetClass="entr" presetSubtype="8" fill="hold" grpId="0" nodeType="clickEffect">
+                                  <p:stCondLst>
+                                    <p:cond delay="0"/>
+                                  </p:stCondLst>
+                                  <p:childTnLst>
+                                    <p:set>
+                                      <p:cBhvr>
+                                        <p:cTn id="12" dur="1" fill="hold">
+                                          <p:stCondLst>
+                                            <p:cond delay="0"/>
+                                          </p:stCondLst>
+                                        </p:cTn>
+                                        <p:tgtEl>
+                                          <p:spTgt spid="6"/>
+                                        </p:tgtEl>
+                                        <p:attrNameLst>
+                                          <p:attrName>style.visibility</p:attrName>
+                                        </p:attrNameLst>
+                                      </p:cBhvr>
+                                      <p:to>
+                                        <p:strVal val="visible"/>
+                                      </p:to>
+                                    </p:set>
+                                    <p:anim calcmode="lin" valueType="num">
+                                      <p:cBhvr additive="base">
+                                        <p:cTn id="13" dur="500" fill="hold"/>
+                                        <p:tgtEl>
+                                          <p:spTgt spid="6"/>
+                                        </p:tgtEl>
+                                        <p:attrNameLst>
+                                          <p:attrName>ppt_x</p:attrName>
+                                        </p:attrNameLst>
+                                      </p:cBhvr>
+                                      <p:tavLst>
+                                        <p:tav tm="0">
+                                          <p:val>
+                                            <p:strVal val="0-#ppt_w/2"/>
+                                          </p:val>
+                                        </p:tav>
+                                        <p:tav tm="100000">
+                                          <p:val>
+                                            <p:strVal val="#ppt_x"/>
+                                          </p:val>
+                                        </p:tav>
+                                      </p:tavLst>
+                                    </p:anim>
+                                    <p:anim calcmode="lin" valueType="num">
+                                      <p:cBhvr additive="base">
+                                        <p:cTn id="14" dur="500" fill="hold"/>
+                                        <p:tgtEl>
+                                          <p:spTgt spid="6"/>
+                                        </p:tgtEl>
+                                        <p:attrNameLst>
+                                          <p:attrName>ppt_y</p:attrName>
+                                        </p:attrNameLst>
+                                      </p:cBhvr>
+                                      <p:tavLst>
+                                        <p:tav tm="0">
+                                          <p:val>
+                                            <p:strVal val="#ppt_y"/>
+                                          </p:val>
+                                        </p:tav>
+                                        <p:tav tm="100000">
+                                          <p:val>
+                                            <p:strVal val="#ppt_y"/>
+                                          </p:val>
+                                        </p:tav>
+                                      </p:tavLst>
+                                    </p:anim>
+                                  </p:childTnLst>
+                                </p:cTn>
+                              </p:par>
                             </p:childTnLst>
                           </p:cTn>
                         </p:par>
@@ -9716,14 +11521,28 @@
                   </p:par>
                 </p:childTnLst>
               </p:cTn>
+              <p:prevCondLst>
+                <p:cond evt="onPrev" delay="0">
+                  <p:tgtEl>
+                    <p:sldTgt/>
+                  </p:tgtEl>
+                </p:cond>
+              </p:prevCondLst>
+              <p:nextCondLst>
+                <p:cond evt="onNext" delay="0">
+                  <p:tgtEl>
+                    <p:sldTgt/>
+                  </p:tgtEl>
+                </p:cond>
+              </p:nextCondLst>
             </p:seq>
           </p:childTnLst>
         </p:cTn>
       </p:par>
     </p:tnLst>
     <p:bldLst>
-      <p:bldP spid="4" grpId="0" build="allAtOnce"/>
-      <p:bldP spid="6" grpId="0" build="allAtOnce"/>
+      <p:bldP spid="4" grpId="0" uiExpand="0" advAuto="indefinite" build="whole" animBg="1"/>
+      <p:bldP spid="6" grpId="0" uiExpand="0" advAuto="indefinite" build="whole" animBg="1"/>
     </p:bldLst>
   </p:timing>
 </p:sld>
@@ -10025,7 +11844,7 @@
   <p:timing>
     <p:tnLst>
       <p:par>
-        <p:cTn id="1" dur="indefinite" restart="never" nodeType="tmRoot">
+        <p:cTn id="1" restart="never" nodeType="tmRoot">
           <p:childTnLst>
             <p:seq concurrent="1" nextAc="seek">
               <p:cTn id="2" dur="indefinite" nodeType="mainSeq">
@@ -10037,33 +11856,84 @@
                       </p:stCondLst>
                       <p:childTnLst>
                         <p:par>
-                          <p:cTn id="4" presetID="2" presetClass="entr" presetSubtype="4" fill="hold" grpId="0" nodeType="clickEffect">
+                          <p:cTn id="4" fill="hold">
                             <p:stCondLst>
                               <p:cond delay="0"/>
                             </p:stCondLst>
                             <p:childTnLst>
-                              <p:set>
-                                <p:cBhvr>
-                                  <p:cTn id="5" dur="1" fill="hold"/>
-                                  <p:tgtEl>
-                                    <p:spTgt spid="4"/>
-                                  </p:tgtEl>
-                                  <p:attrNameLst>
-                                    <p:attrName>style.visibility</p:attrName>
-                                  </p:attrNameLst>
-                                </p:cBhvr>
-                                <p:to>
-                                  <p:strVal val="visible"/>
-                                </p:to>
-                              </p:set>
-                              <p:animEffect transition="in" filter="fly(l)" prLst="dir=l">
-                                <p:cBhvr>
-                                  <p:cTn id="6" dur="500"/>
-                                  <p:tgtEl>
-                                    <p:spTgt spid="4"/>
-                                  </p:tgtEl>
-                                </p:cBhvr>
-                              </p:animEffect>
+                              <p:par>
+                                <p:cTn id="5" presetID="2" presetClass="entr" presetSubtype="8" fill="hold" grpId="0" nodeType="clickEffect">
+                                  <p:stCondLst>
+                                    <p:cond delay="0"/>
+                                  </p:stCondLst>
+                                  <p:childTnLst>
+                                    <p:set>
+                                      <p:cBhvr>
+                                        <p:cTn id="6" dur="1" fill="hold">
+                                          <p:stCondLst>
+                                            <p:cond delay="0"/>
+                                          </p:stCondLst>
+                                        </p:cTn>
+                                        <p:tgtEl>
+                                          <p:spTgt spid="4"/>
+                                        </p:tgtEl>
+                                        <p:attrNameLst>
+                                          <p:attrName>style.visibility</p:attrName>
+                                        </p:attrNameLst>
+                                      </p:cBhvr>
+                                      <p:to>
+                                        <p:strVal val="visible"/>
+                                      </p:to>
+                                    </p:set>
+                                    <p:anim calcmode="lin" valueType="num">
+                                      <p:cBhvr additive="base">
+                                        <p:cTn id="7" dur="500" fill="hold"/>
+                                        <p:tgtEl>
+                                          <p:spTgt spid="4"/>
+                                        </p:tgtEl>
+                                        <p:attrNameLst>
+                                          <p:attrName>ppt_x</p:attrName>
+                                        </p:attrNameLst>
+                                      </p:cBhvr>
+                                      <p:tavLst>
+                                        <p:tav tm="0">
+                                          <p:val>
+                                            <p:strVal val="0-#ppt_w/2"/>
+                                          </p:val>
+                                        </p:tav>
+                                        <p:tav tm="100000">
+                                          <p:val>
+                                            <p:strVal val="#ppt_x"/>
+                                          </p:val>
+                                        </p:tav>
+                                      </p:tavLst>
+                                    </p:anim>
+                                    <p:anim calcmode="lin" valueType="num">
+                                      <p:cBhvr additive="base">
+                                        <p:cTn id="8" dur="500" fill="hold"/>
+                                        <p:tgtEl>
+                                          <p:spTgt spid="4"/>
+                                        </p:tgtEl>
+                                        <p:attrNameLst>
+                                          <p:attrName>ppt_y</p:attrName>
+                                        </p:attrNameLst>
+                                      </p:cBhvr>
+                                      <p:tavLst>
+                                        <p:tav tm="0">
+                                          <p:val>
+                                            <p:strVal val="#ppt_y"/>
+                                          </p:val>
+                                        </p:tav>
+                                        <p:tav tm="100000">
+                                          <p:val>
+                                            <p:strVal val="#ppt_y"/>
+                                          </p:val>
+                                        </p:tav>
+                                      </p:tavLst>
+                                    </p:anim>
+                                  </p:childTnLst>
+                                </p:cTn>
+                              </p:par>
                             </p:childTnLst>
                           </p:cTn>
                         </p:par>
@@ -10071,39 +11941,90 @@
                     </p:cTn>
                   </p:par>
                   <p:par>
-                    <p:cTn id="7" fill="hold">
+                    <p:cTn id="9" fill="hold">
                       <p:stCondLst>
                         <p:cond delay="indefinite"/>
                       </p:stCondLst>
                       <p:childTnLst>
                         <p:par>
-                          <p:cTn id="8" presetID="2" presetClass="entr" presetSubtype="4" fill="hold" grpId="0" nodeType="clickEffect">
+                          <p:cTn id="10" fill="hold">
                             <p:stCondLst>
                               <p:cond delay="0"/>
                             </p:stCondLst>
                             <p:childTnLst>
-                              <p:set>
-                                <p:cBhvr>
-                                  <p:cTn id="9" dur="1" fill="hold"/>
-                                  <p:tgtEl>
-                                    <p:spTgt spid="6"/>
-                                  </p:tgtEl>
-                                  <p:attrNameLst>
-                                    <p:attrName>style.visibility</p:attrName>
-                                  </p:attrNameLst>
-                                </p:cBhvr>
-                                <p:to>
-                                  <p:strVal val="visible"/>
-                                </p:to>
-                              </p:set>
-                              <p:animEffect transition="in" filter="fly(l)" prLst="dir=l">
-                                <p:cBhvr>
-                                  <p:cTn id="10" dur="500"/>
-                                  <p:tgtEl>
-                                    <p:spTgt spid="6"/>
-                                  </p:tgtEl>
-                                </p:cBhvr>
-                              </p:animEffect>
+                              <p:par>
+                                <p:cTn id="11" presetID="2" presetClass="entr" presetSubtype="8" fill="hold" grpId="0" nodeType="clickEffect">
+                                  <p:stCondLst>
+                                    <p:cond delay="0"/>
+                                  </p:stCondLst>
+                                  <p:childTnLst>
+                                    <p:set>
+                                      <p:cBhvr>
+                                        <p:cTn id="12" dur="1" fill="hold">
+                                          <p:stCondLst>
+                                            <p:cond delay="0"/>
+                                          </p:stCondLst>
+                                        </p:cTn>
+                                        <p:tgtEl>
+                                          <p:spTgt spid="6"/>
+                                        </p:tgtEl>
+                                        <p:attrNameLst>
+                                          <p:attrName>style.visibility</p:attrName>
+                                        </p:attrNameLst>
+                                      </p:cBhvr>
+                                      <p:to>
+                                        <p:strVal val="visible"/>
+                                      </p:to>
+                                    </p:set>
+                                    <p:anim calcmode="lin" valueType="num">
+                                      <p:cBhvr additive="base">
+                                        <p:cTn id="13" dur="500" fill="hold"/>
+                                        <p:tgtEl>
+                                          <p:spTgt spid="6"/>
+                                        </p:tgtEl>
+                                        <p:attrNameLst>
+                                          <p:attrName>ppt_x</p:attrName>
+                                        </p:attrNameLst>
+                                      </p:cBhvr>
+                                      <p:tavLst>
+                                        <p:tav tm="0">
+                                          <p:val>
+                                            <p:strVal val="0-#ppt_w/2"/>
+                                          </p:val>
+                                        </p:tav>
+                                        <p:tav tm="100000">
+                                          <p:val>
+                                            <p:strVal val="#ppt_x"/>
+                                          </p:val>
+                                        </p:tav>
+                                      </p:tavLst>
+                                    </p:anim>
+                                    <p:anim calcmode="lin" valueType="num">
+                                      <p:cBhvr additive="base">
+                                        <p:cTn id="14" dur="500" fill="hold"/>
+                                        <p:tgtEl>
+                                          <p:spTgt spid="6"/>
+                                        </p:tgtEl>
+                                        <p:attrNameLst>
+                                          <p:attrName>ppt_y</p:attrName>
+                                        </p:attrNameLst>
+                                      </p:cBhvr>
+                                      <p:tavLst>
+                                        <p:tav tm="0">
+                                          <p:val>
+                                            <p:strVal val="#ppt_y"/>
+                                          </p:val>
+                                        </p:tav>
+                                        <p:tav tm="100000">
+                                          <p:val>
+                                            <p:strVal val="#ppt_y"/>
+                                          </p:val>
+                                        </p:tav>
+                                      </p:tavLst>
+                                    </p:anim>
+                                  </p:childTnLst>
+                                </p:cTn>
+                              </p:par>
                             </p:childTnLst>
                           </p:cTn>
                         </p:par>
@@ -10112,14 +12033,28 @@
                   </p:par>
                 </p:childTnLst>
               </p:cTn>
+              <p:prevCondLst>
+                <p:cond evt="onPrev" delay="0">
+                  <p:tgtEl>
+                    <p:sldTgt/>
+                  </p:tgtEl>
+                </p:cond>
+              </p:prevCondLst>
+              <p:nextCondLst>
+                <p:cond evt="onNext" delay="0">
+                  <p:tgtEl>
+                    <p:sldTgt/>
+                  </p:tgtEl>
+                </p:cond>
+              </p:nextCondLst>
             </p:seq>
           </p:childTnLst>
         </p:cTn>
       </p:par>
     </p:tnLst>
     <p:bldLst>
-      <p:bldP spid="4" grpId="0" build="allAtOnce"/>
-      <p:bldP spid="6" grpId="0" build="allAtOnce"/>
+      <p:bldP spid="4" grpId="0" uiExpand="0" advAuto="indefinite" build="whole" animBg="1"/>
+      <p:bldP spid="6" grpId="0" uiExpand="0" advAuto="indefinite" build="whole" animBg="1"/>
     </p:bldLst>
   </p:timing>
 </p:sld>
@@ -10462,7 +12397,7 @@
   <p:timing>
     <p:tnLst>
       <p:par>
-        <p:cTn id="1" dur="indefinite" restart="never" nodeType="tmRoot">
+        <p:cTn id="1" restart="never" nodeType="tmRoot">
           <p:childTnLst>
             <p:seq concurrent="1" nextAc="seek">
               <p:cTn id="2" dur="indefinite" nodeType="mainSeq">
@@ -10474,33 +12409,84 @@
                       </p:stCondLst>
                       <p:childTnLst>
                         <p:par>
-                          <p:cTn id="4" presetID="2" presetClass="entr" presetSubtype="4" fill="hold" grpId="0" nodeType="clickEffect">
+                          <p:cTn id="4" fill="hold">
                             <p:stCondLst>
                               <p:cond delay="0"/>
                             </p:stCondLst>
                             <p:childTnLst>
-                              <p:set>
-                                <p:cBhvr>
-                                  <p:cTn id="5" dur="1" fill="hold"/>
-                                  <p:tgtEl>
-                                    <p:spTgt spid="3"/>
-                                  </p:tgtEl>
-                                  <p:attrNameLst>
-                                    <p:attrName>style.visibility</p:attrName>
-                                  </p:attrNameLst>
-                                </p:cBhvr>
-                                <p:to>
-                                  <p:strVal val="visible"/>
-                                </p:to>
-                              </p:set>
-                              <p:animEffect transition="in" filter="fly(l)" prLst="dir=l">
-                                <p:cBhvr>
-                                  <p:cTn id="6" dur="500"/>
-                                  <p:tgtEl>
-                                    <p:spTgt spid="3"/>
-                                  </p:tgtEl>
-                                </p:cBhvr>
-                              </p:animEffect>
+                              <p:par>
+                                <p:cTn id="5" presetID="2" presetClass="entr" presetSubtype="8" fill="hold" grpId="0" nodeType="clickEffect">
+                                  <p:stCondLst>
+                                    <p:cond delay="0"/>
+                                  </p:stCondLst>
+                                  <p:childTnLst>
+                                    <p:set>
+                                      <p:cBhvr>
+                                        <p:cTn id="6" dur="1" fill="hold">
+                                          <p:stCondLst>
+                                            <p:cond delay="0"/>
+                                          </p:stCondLst>
+                                        </p:cTn>
+                                        <p:tgtEl>
+                                          <p:spTgt spid="3"/>
+                                        </p:tgtEl>
+                                        <p:attrNameLst>
+                                          <p:attrName>style.visibility</p:attrName>
+                                        </p:attrNameLst>
+                                      </p:cBhvr>
+                                      <p:to>
+                                        <p:strVal val="visible"/>
+                                      </p:to>
+                                    </p:set>
+                                    <p:anim calcmode="lin" valueType="num">
+                                      <p:cBhvr additive="base">
+                                        <p:cTn id="7" dur="500" fill="hold"/>
+                                        <p:tgtEl>
+                                          <p:spTgt spid="3"/>
+                                        </p:tgtEl>
+                                        <p:attrNameLst>
+                                          <p:attrName>ppt_x</p:attrName>
+                                        </p:attrNameLst>
+                                      </p:cBhvr>
+                                      <p:tavLst>
+                                        <p:tav tm="0">
+                                          <p:val>
+                                            <p:strVal val="0-#ppt_w/2"/>
+                                          </p:val>
+                                        </p:tav>
+                                        <p:tav tm="100000">
+                                          <p:val>
+                                            <p:strVal val="#ppt_x"/>
+                                          </p:val>
+                                        </p:tav>
+                                      </p:tavLst>
+                                    </p:anim>
+                                    <p:anim calcmode="lin" valueType="num">
+                                      <p:cBhvr additive="base">
+                                        <p:cTn id="8" dur="500" fill="hold"/>
+                                        <p:tgtEl>
+                                          <p:spTgt spid="3"/>
+                                        </p:tgtEl>
+                                        <p:attrNameLst>
+                                          <p:attrName>ppt_y</p:attrName>
+                                        </p:attrNameLst>
+                                      </p:cBhvr>
+                                      <p:tavLst>
+                                        <p:tav tm="0">
+                                          <p:val>
+                                            <p:strVal val="#ppt_y"/>
+                                          </p:val>
+                                        </p:tav>
+                                        <p:tav tm="100000">
+                                          <p:val>
+                                            <p:strVal val="#ppt_y"/>
+                                          </p:val>
+                                        </p:tav>
+                                      </p:tavLst>
+                                    </p:anim>
+                                  </p:childTnLst>
+                                </p:cTn>
+                              </p:par>
                             </p:childTnLst>
                           </p:cTn>
                         </p:par>
@@ -10509,13 +12495,27 @@
                   </p:par>
                 </p:childTnLst>
               </p:cTn>
+              <p:prevCondLst>
+                <p:cond evt="onPrev" delay="0">
+                  <p:tgtEl>
+                    <p:sldTgt/>
+                  </p:tgtEl>
+                </p:cond>
+              </p:prevCondLst>
+              <p:nextCondLst>
+                <p:cond evt="onNext" delay="0">
+                  <p:tgtEl>
+                    <p:sldTgt/>
+                  </p:tgtEl>
+                </p:cond>
+              </p:nextCondLst>
             </p:seq>
           </p:childTnLst>
         </p:cTn>
       </p:par>
     </p:tnLst>
     <p:bldLst>
-      <p:bldP spid="3" grpId="0" build="allAtOnce"/>
+      <p:bldP spid="3" grpId="0" uiExpand="0" advAuto="indefinite" build="whole" animBg="1"/>
     </p:bldLst>
   </p:timing>
 </p:sld>
@@ -10831,7 +12831,7 @@
   <p:timing>
     <p:tnLst>
       <p:par>
-        <p:cTn id="1" dur="indefinite" restart="never" nodeType="tmRoot">
+        <p:cTn id="1" restart="never" nodeType="tmRoot">
           <p:childTnLst>
             <p:seq concurrent="1" nextAc="seek">
               <p:cTn id="2" dur="indefinite" nodeType="mainSeq">
@@ -10843,33 +12843,84 @@
                       </p:stCondLst>
                       <p:childTnLst>
                         <p:par>
-                          <p:cTn id="4" presetID="2" presetClass="entr" presetSubtype="4" fill="hold" grpId="0" nodeType="clickEffect">
+                          <p:cTn id="4" fill="hold">
                             <p:stCondLst>
                               <p:cond delay="0"/>
                             </p:stCondLst>
                             <p:childTnLst>
-                              <p:set>
-                                <p:cBhvr>
-                                  <p:cTn id="5" dur="1" fill="hold"/>
-                                  <p:tgtEl>
-                                    <p:spTgt spid="3"/>
-                                  </p:tgtEl>
-                                  <p:attrNameLst>
-                                    <p:attrName>style.visibility</p:attrName>
-                                  </p:attrNameLst>
-                                </p:cBhvr>
-                                <p:to>
-                                  <p:strVal val="visible"/>
-                                </p:to>
-                              </p:set>
-                              <p:animEffect transition="in" filter="fly(l)" prLst="dir=l">
-                                <p:cBhvr>
-                                  <p:cTn id="6" dur="500"/>
-                                  <p:tgtEl>
-                                    <p:spTgt spid="3"/>
-                                  </p:tgtEl>
-                                </p:cBhvr>
-                              </p:animEffect>
+                              <p:par>
+                                <p:cTn id="5" presetID="2" presetClass="entr" presetSubtype="8" fill="hold" grpId="0" nodeType="clickEffect">
+                                  <p:stCondLst>
+                                    <p:cond delay="0"/>
+                                  </p:stCondLst>
+                                  <p:childTnLst>
+                                    <p:set>
+                                      <p:cBhvr>
+                                        <p:cTn id="6" dur="1" fill="hold">
+                                          <p:stCondLst>
+                                            <p:cond delay="0"/>
+                                          </p:stCondLst>
+                                        </p:cTn>
+                                        <p:tgtEl>
+                                          <p:spTgt spid="3"/>
+                                        </p:tgtEl>
+                                        <p:attrNameLst>
+                                          <p:attrName>style.visibility</p:attrName>
+                                        </p:attrNameLst>
+                                      </p:cBhvr>
+                                      <p:to>
+                                        <p:strVal val="visible"/>
+                                      </p:to>
+                                    </p:set>
+                                    <p:anim calcmode="lin" valueType="num">
+                                      <p:cBhvr additive="base">
+                                        <p:cTn id="7" dur="500" fill="hold"/>
+                                        <p:tgtEl>
+                                          <p:spTgt spid="3"/>
+                                        </p:tgtEl>
+                                        <p:attrNameLst>
+                                          <p:attrName>ppt_x</p:attrName>
+                                        </p:attrNameLst>
+                                      </p:cBhvr>
+                                      <p:tavLst>
+                                        <p:tav tm="0">
+                                          <p:val>
+                                            <p:strVal val="0-#ppt_w/2"/>
+                                          </p:val>
+                                        </p:tav>
+                                        <p:tav tm="100000">
+                                          <p:val>
+                                            <p:strVal val="#ppt_x"/>
+                                          </p:val>
+                                        </p:tav>
+                                      </p:tavLst>
+                                    </p:anim>
+                                    <p:anim calcmode="lin" valueType="num">
+                                      <p:cBhvr additive="base">
+                                        <p:cTn id="8" dur="500" fill="hold"/>
+                                        <p:tgtEl>
+                                          <p:spTgt spid="3"/>
+                                        </p:tgtEl>
+                                        <p:attrNameLst>
+                                          <p:attrName>ppt_y</p:attrName>
+                                        </p:attrNameLst>
+                                      </p:cBhvr>
+                                      <p:tavLst>
+                                        <p:tav tm="0">
+                                          <p:val>
+                                            <p:strVal val="#ppt_y"/>
+                                          </p:val>
+                                        </p:tav>
+                                        <p:tav tm="100000">
+                                          <p:val>
+                                            <p:strVal val="#ppt_y"/>
+                                          </p:val>
+                                        </p:tav>
+                                      </p:tavLst>
+                                    </p:anim>
+                                  </p:childTnLst>
+                                </p:cTn>
+                              </p:par>
                             </p:childTnLst>
                           </p:cTn>
                         </p:par>
@@ -10878,13 +12929,27 @@
                   </p:par>
                 </p:childTnLst>
               </p:cTn>
+              <p:prevCondLst>
+                <p:cond evt="onPrev" delay="0">
+                  <p:tgtEl>
+                    <p:sldTgt/>
+                  </p:tgtEl>
+                </p:cond>
+              </p:prevCondLst>
+              <p:nextCondLst>
+                <p:cond evt="onNext" delay="0">
+                  <p:tgtEl>
+                    <p:sldTgt/>
+                  </p:tgtEl>
+                </p:cond>
+              </p:nextCondLst>
             </p:seq>
           </p:childTnLst>
         </p:cTn>
       </p:par>
     </p:tnLst>
     <p:bldLst>
-      <p:bldP spid="3" grpId="0" build="allAtOnce"/>
+      <p:bldP spid="3" grpId="0" uiExpand="0" advAuto="indefinite" build="whole" animBg="1"/>
     </p:bldLst>
   </p:timing>
 </p:sld>
@@ -11209,7 +13274,7 @@
   <p:timing>
     <p:tnLst>
       <p:par>
-        <p:cTn id="1" dur="indefinite" restart="never" nodeType="tmRoot">
+        <p:cTn id="1" restart="never" nodeType="tmRoot">
           <p:childTnLst>
             <p:seq concurrent="1" nextAc="seek">
               <p:cTn id="2" dur="indefinite" nodeType="mainSeq">
@@ -11221,33 +13286,84 @@
                       </p:stCondLst>
                       <p:childTnLst>
                         <p:par>
-                          <p:cTn id="4" presetID="2" presetClass="entr" presetSubtype="4" fill="hold" grpId="0" nodeType="clickEffect">
+                          <p:cTn id="4" fill="hold">
                             <p:stCondLst>
                               <p:cond delay="0"/>
                             </p:stCondLst>
                             <p:childTnLst>
-                              <p:set>
-                                <p:cBhvr>
-                                  <p:cTn id="5" dur="1" fill="hold"/>
-                                  <p:tgtEl>
-                                    <p:spTgt spid="3"/>
-                                  </p:tgtEl>
-                                  <p:attrNameLst>
-                                    <p:attrName>style.visibility</p:attrName>
-                                  </p:attrNameLst>
-                                </p:cBhvr>
-                                <p:to>
-                                  <p:strVal val="visible"/>
-                                </p:to>
-                              </p:set>
-                              <p:animEffect transition="in" filter="fly(l)" prLst="dir=l">
-                                <p:cBhvr>
-                                  <p:cTn id="6" dur="500"/>
-                                  <p:tgtEl>
-                                    <p:spTgt spid="3"/>
-                                  </p:tgtEl>
-                                </p:cBhvr>
-                              </p:animEffect>
+                              <p:par>
+                                <p:cTn id="5" presetID="2" presetClass="entr" presetSubtype="8" fill="hold" grpId="0" nodeType="clickEffect">
+                                  <p:stCondLst>
+                                    <p:cond delay="0"/>
+                                  </p:stCondLst>
+                                  <p:childTnLst>
+                                    <p:set>
+                                      <p:cBhvr>
+                                        <p:cTn id="6" dur="1" fill="hold">
+                                          <p:stCondLst>
+                                            <p:cond delay="0"/>
+                                          </p:stCondLst>
+                                        </p:cTn>
+                                        <p:tgtEl>
+                                          <p:spTgt spid="3"/>
+                                        </p:tgtEl>
+                                        <p:attrNameLst>
+                                          <p:attrName>style.visibility</p:attrName>
+                                        </p:attrNameLst>
+                                      </p:cBhvr>
+                                      <p:to>
+                                        <p:strVal val="visible"/>
+                                      </p:to>
+                                    </p:set>
+                                    <p:anim calcmode="lin" valueType="num">
+                                      <p:cBhvr additive="base">
+                                        <p:cTn id="7" dur="500" fill="hold"/>
+                                        <p:tgtEl>
+                                          <p:spTgt spid="3"/>
+                                        </p:tgtEl>
+                                        <p:attrNameLst>
+                                          <p:attrName>ppt_x</p:attrName>
+                                        </p:attrNameLst>
+                                      </p:cBhvr>
+                                      <p:tavLst>
+                                        <p:tav tm="0">
+                                          <p:val>
+                                            <p:strVal val="0-#ppt_w/2"/>
+                                          </p:val>
+                                        </p:tav>
+                                        <p:tav tm="100000">
+                                          <p:val>
+                                            <p:strVal val="#ppt_x"/>
+                                          </p:val>
+                                        </p:tav>
+                                      </p:tavLst>
+                                    </p:anim>
+                                    <p:anim calcmode="lin" valueType="num">
+                                      <p:cBhvr additive="base">
+                                        <p:cTn id="8" dur="500" fill="hold"/>
+                                        <p:tgtEl>
+                                          <p:spTgt spid="3"/>
+                                        </p:tgtEl>
+                                        <p:attrNameLst>
+                                          <p:attrName>ppt_y</p:attrName>
+                                        </p:attrNameLst>
+                                      </p:cBhvr>
+                                      <p:tavLst>
+                                        <p:tav tm="0">
+                                          <p:val>
+                                            <p:strVal val="#ppt_y"/>
+                                          </p:val>
+                                        </p:tav>
+                                        <p:tav tm="100000">
+                                          <p:val>
+                                            <p:strVal val="#ppt_y"/>
+                                          </p:val>
+                                        </p:tav>
+                                      </p:tavLst>
+                                    </p:anim>
+                                  </p:childTnLst>
+                                </p:cTn>
+                              </p:par>
                             </p:childTnLst>
                           </p:cTn>
                         </p:par>
@@ -11256,13 +13372,27 @@
                   </p:par>
                 </p:childTnLst>
               </p:cTn>
+              <p:prevCondLst>
+                <p:cond evt="onPrev" delay="0">
+                  <p:tgtEl>
+                    <p:sldTgt/>
+                  </p:tgtEl>
+                </p:cond>
+              </p:prevCondLst>
+              <p:nextCondLst>
+                <p:cond evt="onNext" delay="0">
+                  <p:tgtEl>
+                    <p:sldTgt/>
+                  </p:tgtEl>
+                </p:cond>
+              </p:nextCondLst>
             </p:seq>
           </p:childTnLst>
         </p:cTn>
       </p:par>
     </p:tnLst>
     <p:bldLst>
-      <p:bldP spid="3" grpId="0" build="allAtOnce"/>
+      <p:bldP spid="3" grpId="0" uiExpand="0" advAuto="indefinite" build="whole" animBg="1"/>
     </p:bldLst>
   </p:timing>
 </p:sld>
@@ -11648,7 +13778,7 @@
   <p:timing>
     <p:tnLst>
       <p:par>
-        <p:cTn id="1" dur="indefinite" restart="never" nodeType="tmRoot">
+        <p:cTn id="1" restart="never" nodeType="tmRoot">
           <p:childTnLst>
             <p:seq concurrent="1" nextAc="seek">
               <p:cTn id="2" dur="indefinite" nodeType="mainSeq">
@@ -11660,33 +13790,84 @@
                       </p:stCondLst>
                       <p:childTnLst>
                         <p:par>
-                          <p:cTn id="4" presetID="2" presetClass="entr" presetSubtype="4" fill="hold" grpId="0" nodeType="clickEffect">
+                          <p:cTn id="4" fill="hold">
                             <p:stCondLst>
                               <p:cond delay="0"/>
                             </p:stCondLst>
                             <p:childTnLst>
-                              <p:set>
-                                <p:cBhvr>
-                                  <p:cTn id="5" dur="1" fill="hold"/>
-                                  <p:tgtEl>
-                                    <p:spTgt spid="4"/>
-                                  </p:tgtEl>
-                                  <p:attrNameLst>
-                                    <p:attrName>style.visibility</p:attrName>
-                                  </p:attrNameLst>
-                                </p:cBhvr>
-                                <p:to>
-                                  <p:strVal val="visible"/>
-                                </p:to>
-                              </p:set>
-                              <p:animEffect transition="in" filter="fly(l)" prLst="dir=l">
-                                <p:cBhvr>
-                                  <p:cTn id="6" dur="500"/>
-                                  <p:tgtEl>
-                                    <p:spTgt spid="4"/>
-                                  </p:tgtEl>
-                                </p:cBhvr>
-                              </p:animEffect>
+                              <p:par>
+                                <p:cTn id="5" presetID="2" presetClass="entr" presetSubtype="8" fill="hold" grpId="0" nodeType="clickEffect">
+                                  <p:stCondLst>
+                                    <p:cond delay="0"/>
+                                  </p:stCondLst>
+                                  <p:childTnLst>
+                                    <p:set>
+                                      <p:cBhvr>
+                                        <p:cTn id="6" dur="1" fill="hold">
+                                          <p:stCondLst>
+                                            <p:cond delay="0"/>
+                                          </p:stCondLst>
+                                        </p:cTn>
+                                        <p:tgtEl>
+                                          <p:spTgt spid="4"/>
+                                        </p:tgtEl>
+                                        <p:attrNameLst>
+                                          <p:attrName>style.visibility</p:attrName>
+                                        </p:attrNameLst>
+                                      </p:cBhvr>
+                                      <p:to>
+                                        <p:strVal val="visible"/>
+                                      </p:to>
+                                    </p:set>
+                                    <p:anim calcmode="lin" valueType="num">
+                                      <p:cBhvr additive="base">
+                                        <p:cTn id="7" dur="500" fill="hold"/>
+                                        <p:tgtEl>
+                                          <p:spTgt spid="4"/>
+                                        </p:tgtEl>
+                                        <p:attrNameLst>
+                                          <p:attrName>ppt_x</p:attrName>
+                                        </p:attrNameLst>
+                                      </p:cBhvr>
+                                      <p:tavLst>
+                                        <p:tav tm="0">
+                                          <p:val>
+                                            <p:strVal val="0-#ppt_w/2"/>
+                                          </p:val>
+                                        </p:tav>
+                                        <p:tav tm="100000">
+                                          <p:val>
+                                            <p:strVal val="#ppt_x"/>
+                                          </p:val>
+                                        </p:tav>
+                                      </p:tavLst>
+                                    </p:anim>
+                                    <p:anim calcmode="lin" valueType="num">
+                                      <p:cBhvr additive="base">
+                                        <p:cTn id="8" dur="500" fill="hold"/>
+                                        <p:tgtEl>
+                                          <p:spTgt spid="4"/>
+                                        </p:tgtEl>
+                                        <p:attrNameLst>
+                                          <p:attrName>ppt_y</p:attrName>
+                                        </p:attrNameLst>
+                                      </p:cBhvr>
+                                      <p:tavLst>
+                                        <p:tav tm="0">
+                                          <p:val>
+                                            <p:strVal val="#ppt_y"/>
+                                          </p:val>
+                                        </p:tav>
+                                        <p:tav tm="100000">
+                                          <p:val>
+                                            <p:strVal val="#ppt_y"/>
+                                          </p:val>
+                                        </p:tav>
+                                      </p:tavLst>
+                                    </p:anim>
+                                  </p:childTnLst>
+                                </p:cTn>
+                              </p:par>
                             </p:childTnLst>
                           </p:cTn>
                         </p:par>
@@ -11694,39 +13875,90 @@
                     </p:cTn>
                   </p:par>
                   <p:par>
-                    <p:cTn id="7" fill="hold">
+                    <p:cTn id="9" fill="hold">
                       <p:stCondLst>
                         <p:cond delay="indefinite"/>
                       </p:stCondLst>
                       <p:childTnLst>
                         <p:par>
-                          <p:cTn id="8" presetID="2" presetClass="entr" presetSubtype="4" fill="hold" grpId="0" nodeType="clickEffect">
+                          <p:cTn id="10" fill="hold">
                             <p:stCondLst>
                               <p:cond delay="0"/>
                             </p:stCondLst>
                             <p:childTnLst>
-                              <p:set>
-                                <p:cBhvr>
-                                  <p:cTn id="9" dur="1" fill="hold"/>
-                                  <p:tgtEl>
-                                    <p:spTgt spid="6"/>
-                                  </p:tgtEl>
-                                  <p:attrNameLst>
-                                    <p:attrName>style.visibility</p:attrName>
-                                  </p:attrNameLst>
-                                </p:cBhvr>
-                                <p:to>
-                                  <p:strVal val="visible"/>
-                                </p:to>
-                              </p:set>
-                              <p:animEffect transition="in" filter="fly(l)" prLst="dir=l">
-                                <p:cBhvr>
-                                  <p:cTn id="10" dur="500"/>
-                                  <p:tgtEl>
-                                    <p:spTgt spid="6"/>
-                                  </p:tgtEl>
-                                </p:cBhvr>
-                              </p:animEffect>
+                              <p:par>
+                                <p:cTn id="11" presetID="2" presetClass="entr" presetSubtype="8" fill="hold" grpId="0" nodeType="clickEffect">
+                                  <p:stCondLst>
+                                    <p:cond delay="0"/>
+                                  </p:stCondLst>
+                                  <p:childTnLst>
+                                    <p:set>
+                                      <p:cBhvr>
+                                        <p:cTn id="12" dur="1" fill="hold">
+                                          <p:stCondLst>
+                                            <p:cond delay="0"/>
+                                          </p:stCondLst>
+                                        </p:cTn>
+                                        <p:tgtEl>
+                                          <p:spTgt spid="6"/>
+                                        </p:tgtEl>
+                                        <p:attrNameLst>
+                                          <p:attrName>style.visibility</p:attrName>
+                                        </p:attrNameLst>
+                                      </p:cBhvr>
+                                      <p:to>
+                                        <p:strVal val="visible"/>
+                                      </p:to>
+                                    </p:set>
+                                    <p:anim calcmode="lin" valueType="num">
+                                      <p:cBhvr additive="base">
+                                        <p:cTn id="13" dur="500" fill="hold"/>
+                                        <p:tgtEl>
+                                          <p:spTgt spid="6"/>
+                                        </p:tgtEl>
+                                        <p:attrNameLst>
+                                          <p:attrName>ppt_x</p:attrName>
+                                        </p:attrNameLst>
+                                      </p:cBhvr>
+                                      <p:tavLst>
+                                        <p:tav tm="0">
+                                          <p:val>
+                                            <p:strVal val="0-#ppt_w/2"/>
+                                          </p:val>
+                                        </p:tav>
+                                        <p:tav tm="100000">
+                                          <p:val>
+                                            <p:strVal val="#ppt_x"/>
+                                          </p:val>
+                                        </p:tav>
+                                      </p:tavLst>
+                                    </p:anim>
+                                    <p:anim calcmode="lin" valueType="num">
+                                      <p:cBhvr additive="base">
+                                        <p:cTn id="14" dur="500" fill="hold"/>
+                                        <p:tgtEl>
+                                          <p:spTgt spid="6"/>
+                                        </p:tgtEl>
+                                        <p:attrNameLst>
+                                          <p:attrName>ppt_y</p:attrName>
+                                        </p:attrNameLst>
+                                      </p:cBhvr>
+                                      <p:tavLst>
+                                        <p:tav tm="0">
+                                          <p:val>
+                                            <p:strVal val="#ppt_y"/>
+                                          </p:val>
+                                        </p:tav>
+                                        <p:tav tm="100000">
+                                          <p:val>
+                                            <p:strVal val="#ppt_y"/>
+                                          </p:val>
+                                        </p:tav>
+                                      </p:tavLst>
+                                    </p:anim>
+                                  </p:childTnLst>
+                                </p:cTn>
+                              </p:par>
                             </p:childTnLst>
                           </p:cTn>
                         </p:par>
@@ -11735,14 +13967,28 @@
                   </p:par>
                 </p:childTnLst>
               </p:cTn>
+              <p:prevCondLst>
+                <p:cond evt="onPrev" delay="0">
+                  <p:tgtEl>
+                    <p:sldTgt/>
+                  </p:tgtEl>
+                </p:cond>
+              </p:prevCondLst>
+              <p:nextCondLst>
+                <p:cond evt="onNext" delay="0">
+                  <p:tgtEl>
+                    <p:sldTgt/>
+                  </p:tgtEl>
+                </p:cond>
+              </p:nextCondLst>
             </p:seq>
           </p:childTnLst>
         </p:cTn>
       </p:par>
     </p:tnLst>
     <p:bldLst>
-      <p:bldP spid="4" grpId="0" build="allAtOnce"/>
-      <p:bldP spid="6" grpId="0" build="allAtOnce"/>
+      <p:bldP spid="4" grpId="0" uiExpand="0" advAuto="indefinite" build="whole" animBg="1"/>
+      <p:bldP spid="6" grpId="0" uiExpand="0" advAuto="indefinite" build="whole" animBg="1"/>
     </p:bldLst>
   </p:timing>
 </p:sld>
@@ -12151,7 +14397,7 @@
   <p:timing>
     <p:tnLst>
       <p:par>
-        <p:cTn id="1" dur="indefinite" restart="never" nodeType="tmRoot">
+        <p:cTn id="1" restart="never" nodeType="tmRoot">
           <p:childTnLst>
             <p:seq concurrent="1" nextAc="seek">
               <p:cTn id="2" dur="indefinite" nodeType="mainSeq">
@@ -12163,33 +14409,84 @@
                       </p:stCondLst>
                       <p:childTnLst>
                         <p:par>
-                          <p:cTn id="4" presetID="2" presetClass="entr" presetSubtype="4" fill="hold" grpId="0" nodeType="clickEffect">
+                          <p:cTn id="4" fill="hold">
                             <p:stCondLst>
                               <p:cond delay="0"/>
                             </p:stCondLst>
                             <p:childTnLst>
-                              <p:set>
-                                <p:cBhvr>
-                                  <p:cTn id="5" dur="1" fill="hold"/>
-                                  <p:tgtEl>
-                                    <p:spTgt spid="3"/>
-                                  </p:tgtEl>
-                                  <p:attrNameLst>
-                                    <p:attrName>style.visibility</p:attrName>
-                                  </p:attrNameLst>
-                                </p:cBhvr>
-                                <p:to>
-                                  <p:strVal val="visible"/>
-                                </p:to>
-                              </p:set>
-                              <p:animEffect transition="in" filter="fly(l)" prLst="dir=l">
-                                <p:cBhvr>
-                                  <p:cTn id="6" dur="500"/>
-                                  <p:tgtEl>
-                                    <p:spTgt spid="3"/>
-                                  </p:tgtEl>
-                                </p:cBhvr>
-                              </p:animEffect>
+                              <p:par>
+                                <p:cTn id="5" presetID="2" presetClass="entr" presetSubtype="8" fill="hold" grpId="0" nodeType="clickEffect">
+                                  <p:stCondLst>
+                                    <p:cond delay="0"/>
+                                  </p:stCondLst>
+                                  <p:childTnLst>
+                                    <p:set>
+                                      <p:cBhvr>
+                                        <p:cTn id="6" dur="1" fill="hold">
+                                          <p:stCondLst>
+                                            <p:cond delay="0"/>
+                                          </p:stCondLst>
+                                        </p:cTn>
+                                        <p:tgtEl>
+                                          <p:spTgt spid="3"/>
+                                        </p:tgtEl>
+                                        <p:attrNameLst>
+                                          <p:attrName>style.visibility</p:attrName>
+                                        </p:attrNameLst>
+                                      </p:cBhvr>
+                                      <p:to>
+                                        <p:strVal val="visible"/>
+                                      </p:to>
+                                    </p:set>
+                                    <p:anim calcmode="lin" valueType="num">
+                                      <p:cBhvr additive="base">
+                                        <p:cTn id="7" dur="500" fill="hold"/>
+                                        <p:tgtEl>
+                                          <p:spTgt spid="3"/>
+                                        </p:tgtEl>
+                                        <p:attrNameLst>
+                                          <p:attrName>ppt_x</p:attrName>
+                                        </p:attrNameLst>
+                                      </p:cBhvr>
+                                      <p:tavLst>
+                                        <p:tav tm="0">
+                                          <p:val>
+                                            <p:strVal val="0-#ppt_w/2"/>
+                                          </p:val>
+                                        </p:tav>
+                                        <p:tav tm="100000">
+                                          <p:val>
+                                            <p:strVal val="#ppt_x"/>
+                                          </p:val>
+                                        </p:tav>
+                                      </p:tavLst>
+                                    </p:anim>
+                                    <p:anim calcmode="lin" valueType="num">
+                                      <p:cBhvr additive="base">
+                                        <p:cTn id="8" dur="500" fill="hold"/>
+                                        <p:tgtEl>
+                                          <p:spTgt spid="3"/>
+                                        </p:tgtEl>
+                                        <p:attrNameLst>
+                                          <p:attrName>ppt_y</p:attrName>
+                                        </p:attrNameLst>
+                                      </p:cBhvr>
+                                      <p:tavLst>
+                                        <p:tav tm="0">
+                                          <p:val>
+                                            <p:strVal val="#ppt_y"/>
+                                          </p:val>
+                                        </p:tav>
+                                        <p:tav tm="100000">
+                                          <p:val>
+                                            <p:strVal val="#ppt_y"/>
+                                          </p:val>
+                                        </p:tav>
+                                      </p:tavLst>
+                                    </p:anim>
+                                  </p:childTnLst>
+                                </p:cTn>
+                              </p:par>
                             </p:childTnLst>
                           </p:cTn>
                         </p:par>
@@ -12198,13 +14495,27 @@
                   </p:par>
                 </p:childTnLst>
               </p:cTn>
+              <p:prevCondLst>
+                <p:cond evt="onPrev" delay="0">
+                  <p:tgtEl>
+                    <p:sldTgt/>
+                  </p:tgtEl>
+                </p:cond>
+              </p:prevCondLst>
+              <p:nextCondLst>
+                <p:cond evt="onNext" delay="0">
+                  <p:tgtEl>
+                    <p:sldTgt/>
+                  </p:tgtEl>
+                </p:cond>
+              </p:nextCondLst>
             </p:seq>
           </p:childTnLst>
         </p:cTn>
       </p:par>
     </p:tnLst>
     <p:bldLst>
-      <p:bldP spid="3" grpId="0" build="allAtOnce"/>
+      <p:bldP spid="3" grpId="0" uiExpand="0" advAuto="indefinite" build="whole" animBg="1"/>
     </p:bldLst>
   </p:timing>
 </p:sld>
@@ -12611,7 +14922,7 @@
   <p:timing>
     <p:tnLst>
       <p:par>
-        <p:cTn id="1" dur="indefinite" restart="never" nodeType="tmRoot">
+        <p:cTn id="1" restart="never" nodeType="tmRoot">
           <p:childTnLst>
             <p:seq concurrent="1" nextAc="seek">
               <p:cTn id="2" dur="indefinite" nodeType="mainSeq">
@@ -12623,33 +14934,84 @@
                       </p:stCondLst>
                       <p:childTnLst>
                         <p:par>
-                          <p:cTn id="4" presetID="2" presetClass="entr" presetSubtype="4" fill="hold" grpId="0" nodeType="clickEffect">
+                          <p:cTn id="4" fill="hold">
                             <p:stCondLst>
                               <p:cond delay="0"/>
                             </p:stCondLst>
                             <p:childTnLst>
-                              <p:set>
-                                <p:cBhvr>
-                                  <p:cTn id="5" dur="1" fill="hold"/>
-                                  <p:tgtEl>
-                                    <p:spTgt spid="3"/>
-                                  </p:tgtEl>
-                                  <p:attrNameLst>
-                                    <p:attrName>style.visibility</p:attrName>
-                                  </p:attrNameLst>
-                                </p:cBhvr>
-                                <p:to>
-                                  <p:strVal val="visible"/>
-                                </p:to>
-                              </p:set>
-                              <p:animEffect transition="in" filter="fly(l)" prLst="dir=l">
-                                <p:cBhvr>
-                                  <p:cTn id="6" dur="500"/>
-                                  <p:tgtEl>
-                                    <p:spTgt spid="3"/>
-                                  </p:tgtEl>
-                                </p:cBhvr>
-                              </p:animEffect>
+                              <p:par>
+                                <p:cTn id="5" presetID="2" presetClass="entr" presetSubtype="8" fill="hold" grpId="0" nodeType="clickEffect">
+                                  <p:stCondLst>
+                                    <p:cond delay="0"/>
+                                  </p:stCondLst>
+                                  <p:childTnLst>
+                                    <p:set>
+                                      <p:cBhvr>
+                                        <p:cTn id="6" dur="1" fill="hold">
+                                          <p:stCondLst>
+                                            <p:cond delay="0"/>
+                                          </p:stCondLst>
+                                        </p:cTn>
+                                        <p:tgtEl>
+                                          <p:spTgt spid="3"/>
+                                        </p:tgtEl>
+                                        <p:attrNameLst>
+                                          <p:attrName>style.visibility</p:attrName>
+                                        </p:attrNameLst>
+                                      </p:cBhvr>
+                                      <p:to>
+                                        <p:strVal val="visible"/>
+                                      </p:to>
+                                    </p:set>
+                                    <p:anim calcmode="lin" valueType="num">
+                                      <p:cBhvr additive="base">
+                                        <p:cTn id="7" dur="500" fill="hold"/>
+                                        <p:tgtEl>
+                                          <p:spTgt spid="3"/>
+                                        </p:tgtEl>
+                                        <p:attrNameLst>
+                                          <p:attrName>ppt_x</p:attrName>
+                                        </p:attrNameLst>
+                                      </p:cBhvr>
+                                      <p:tavLst>
+                                        <p:tav tm="0">
+                                          <p:val>
+                                            <p:strVal val="0-#ppt_w/2"/>
+                                          </p:val>
+                                        </p:tav>
+                                        <p:tav tm="100000">
+                                          <p:val>
+                                            <p:strVal val="#ppt_x"/>
+                                          </p:val>
+                                        </p:tav>
+                                      </p:tavLst>
+                                    </p:anim>
+                                    <p:anim calcmode="lin" valueType="num">
+                                      <p:cBhvr additive="base">
+                                        <p:cTn id="8" dur="500" fill="hold"/>
+                                        <p:tgtEl>
+                                          <p:spTgt spid="3"/>
+                                        </p:tgtEl>
+                                        <p:attrNameLst>
+                                          <p:attrName>ppt_y</p:attrName>
+                                        </p:attrNameLst>
+                                      </p:cBhvr>
+                                      <p:tavLst>
+                                        <p:tav tm="0">
+                                          <p:val>
+                                            <p:strVal val="#ppt_y"/>
+                                          </p:val>
+                                        </p:tav>
+                                        <p:tav tm="100000">
+                                          <p:val>
+                                            <p:strVal val="#ppt_y"/>
+                                          </p:val>
+                                        </p:tav>
+                                      </p:tavLst>
+                                    </p:anim>
+                                  </p:childTnLst>
+                                </p:cTn>
+                              </p:par>
                             </p:childTnLst>
                           </p:cTn>
                         </p:par>
@@ -12657,39 +15019,90 @@
                     </p:cTn>
                   </p:par>
                   <p:par>
-                    <p:cTn id="7" fill="hold">
+                    <p:cTn id="9" fill="hold">
                       <p:stCondLst>
                         <p:cond delay="indefinite"/>
                       </p:stCondLst>
                       <p:childTnLst>
                         <p:par>
-                          <p:cTn id="8" presetID="2" presetClass="entr" presetSubtype="4" fill="hold" grpId="0" nodeType="clickEffect">
+                          <p:cTn id="10" fill="hold">
                             <p:stCondLst>
                               <p:cond delay="0"/>
                             </p:stCondLst>
                             <p:childTnLst>
-                              <p:set>
-                                <p:cBhvr>
-                                  <p:cTn id="9" dur="1" fill="hold"/>
-                                  <p:tgtEl>
-                                    <p:spTgt spid="4"/>
-                                  </p:tgtEl>
-                                  <p:attrNameLst>
-                                    <p:attrName>style.visibility</p:attrName>
-                                  </p:attrNameLst>
-                                </p:cBhvr>
-                                <p:to>
-                                  <p:strVal val="visible"/>
-                                </p:to>
-                              </p:set>
-                              <p:animEffect transition="in" filter="fly(l)" prLst="dir=l">
-                                <p:cBhvr>
-                                  <p:cTn id="10" dur="500"/>
-                                  <p:tgtEl>
-                                    <p:spTgt spid="4"/>
-                                  </p:tgtEl>
-                                </p:cBhvr>
-                              </p:animEffect>
+                              <p:par>
+                                <p:cTn id="11" presetID="2" presetClass="entr" presetSubtype="8" fill="hold" grpId="0" nodeType="clickEffect">
+                                  <p:stCondLst>
+                                    <p:cond delay="0"/>
+                                  </p:stCondLst>
+                                  <p:childTnLst>
+                                    <p:set>
+                                      <p:cBhvr>
+                                        <p:cTn id="12" dur="1" fill="hold">
+                                          <p:stCondLst>
+                                            <p:cond delay="0"/>
+                                          </p:stCondLst>
+                                        </p:cTn>
+                                        <p:tgtEl>
+                                          <p:spTgt spid="4"/>
+                                        </p:tgtEl>
+                                        <p:attrNameLst>
+                                          <p:attrName>style.visibility</p:attrName>
+                                        </p:attrNameLst>
+                                      </p:cBhvr>
+                                      <p:to>
+                                        <p:strVal val="visible"/>
+                                      </p:to>
+                                    </p:set>
+                                    <p:anim calcmode="lin" valueType="num">
+                                      <p:cBhvr additive="base">
+                                        <p:cTn id="13" dur="500" fill="hold"/>
+                                        <p:tgtEl>
+                                          <p:spTgt spid="4"/>
+                                        </p:tgtEl>
+                                        <p:attrNameLst>
+                                          <p:attrName>ppt_x</p:attrName>
+                                        </p:attrNameLst>
+                                      </p:cBhvr>
+                                      <p:tavLst>
+                                        <p:tav tm="0">
+                                          <p:val>
+                                            <p:strVal val="0-#ppt_w/2"/>
+                                          </p:val>
+                                        </p:tav>
+                                        <p:tav tm="100000">
+                                          <p:val>
+                                            <p:strVal val="#ppt_x"/>
+                                          </p:val>
+                                        </p:tav>
+                                      </p:tavLst>
+                                    </p:anim>
+                                    <p:anim calcmode="lin" valueType="num">
+                                      <p:cBhvr additive="base">
+                                        <p:cTn id="14" dur="500" fill="hold"/>
+                                        <p:tgtEl>
+                                          <p:spTgt spid="4"/>
+                                        </p:tgtEl>
+                                        <p:attrNameLst>
+                                          <p:attrName>ppt_y</p:attrName>
+                                        </p:attrNameLst>
+                                      </p:cBhvr>
+                                      <p:tavLst>
+                                        <p:tav tm="0">
+                                          <p:val>
+                                            <p:strVal val="#ppt_y"/>
+                                          </p:val>
+                                        </p:tav>
+                                        <p:tav tm="100000">
+                                          <p:val>
+                                            <p:strVal val="#ppt_y"/>
+                                          </p:val>
+                                        </p:tav>
+                                      </p:tavLst>
+                                    </p:anim>
+                                  </p:childTnLst>
+                                </p:cTn>
+                              </p:par>
                             </p:childTnLst>
                           </p:cTn>
                         </p:par>
@@ -12698,14 +15111,28 @@
                   </p:par>
                 </p:childTnLst>
               </p:cTn>
+              <p:prevCondLst>
+                <p:cond evt="onPrev" delay="0">
+                  <p:tgtEl>
+                    <p:sldTgt/>
+                  </p:tgtEl>
+                </p:cond>
+              </p:prevCondLst>
+              <p:nextCondLst>
+                <p:cond evt="onNext" delay="0">
+                  <p:tgtEl>
+                    <p:sldTgt/>
+                  </p:tgtEl>
+                </p:cond>
+              </p:nextCondLst>
             </p:seq>
           </p:childTnLst>
         </p:cTn>
       </p:par>
     </p:tnLst>
     <p:bldLst>
-      <p:bldP spid="3" grpId="0" build="allAtOnce"/>
-      <p:bldP spid="4" grpId="0" build="allAtOnce"/>
+      <p:bldP spid="3" grpId="0" uiExpand="0" advAuto="indefinite" build="whole" animBg="1"/>
+      <p:bldP spid="4" grpId="0" uiExpand="0" advAuto="indefinite" build="whole" animBg="1"/>
     </p:bldLst>
   </p:timing>
 </p:sld>
@@ -13023,7 +15450,7 @@
   <p:timing>
     <p:tnLst>
       <p:par>
-        <p:cTn id="1" dur="indefinite" restart="never" nodeType="tmRoot">
+        <p:cTn id="1" restart="never" nodeType="tmRoot">
           <p:childTnLst>
             <p:seq concurrent="1" nextAc="seek">
               <p:cTn id="2" dur="indefinite" nodeType="mainSeq">
@@ -13035,33 +15462,84 @@
                       </p:stCondLst>
                       <p:childTnLst>
                         <p:par>
-                          <p:cTn id="4" presetID="2" presetClass="entr" presetSubtype="4" fill="hold" grpId="0" nodeType="clickEffect">
+                          <p:cTn id="4" fill="hold">
                             <p:stCondLst>
                               <p:cond delay="0"/>
                             </p:stCondLst>
                             <p:childTnLst>
-                              <p:set>
-                                <p:cBhvr>
-                                  <p:cTn id="5" dur="1" fill="hold"/>
-                                  <p:tgtEl>
-                                    <p:spTgt spid="3"/>
-                                  </p:tgtEl>
-                                  <p:attrNameLst>
-                                    <p:attrName>style.visibility</p:attrName>
-                                  </p:attrNameLst>
-                                </p:cBhvr>
-                                <p:to>
-                                  <p:strVal val="visible"/>
-                                </p:to>
-                              </p:set>
-                              <p:animEffect transition="in" filter="fly(l)" prLst="dir=l">
-                                <p:cBhvr>
-                                  <p:cTn id="6" dur="500"/>
-                                  <p:tgtEl>
-                                    <p:spTgt spid="3"/>
-                                  </p:tgtEl>
-                                </p:cBhvr>
-                              </p:animEffect>
+                              <p:par>
+                                <p:cTn id="5" presetID="2" presetClass="entr" presetSubtype="8" fill="hold" grpId="0" nodeType="clickEffect">
+                                  <p:stCondLst>
+                                    <p:cond delay="0"/>
+                                  </p:stCondLst>
+                                  <p:childTnLst>
+                                    <p:set>
+                                      <p:cBhvr>
+                                        <p:cTn id="6" dur="1" fill="hold">
+                                          <p:stCondLst>
+                                            <p:cond delay="0"/>
+                                          </p:stCondLst>
+                                        </p:cTn>
+                                        <p:tgtEl>
+                                          <p:spTgt spid="3"/>
+                                        </p:tgtEl>
+                                        <p:attrNameLst>
+                                          <p:attrName>style.visibility</p:attrName>
+                                        </p:attrNameLst>
+                                      </p:cBhvr>
+                                      <p:to>
+                                        <p:strVal val="visible"/>
+                                      </p:to>
+                                    </p:set>
+                                    <p:anim calcmode="lin" valueType="num">
+                                      <p:cBhvr additive="base">
+                                        <p:cTn id="7" dur="500" fill="hold"/>
+                                        <p:tgtEl>
+                                          <p:spTgt spid="3"/>
+                                        </p:tgtEl>
+                                        <p:attrNameLst>
+                                          <p:attrName>ppt_x</p:attrName>
+                                        </p:attrNameLst>
+                                      </p:cBhvr>
+                                      <p:tavLst>
+                                        <p:tav tm="0">
+                                          <p:val>
+                                            <p:strVal val="0-#ppt_w/2"/>
+                                          </p:val>
+                                        </p:tav>
+                                        <p:tav tm="100000">
+                                          <p:val>
+                                            <p:strVal val="#ppt_x"/>
+                                          </p:val>
+                                        </p:tav>
+                                      </p:tavLst>
+                                    </p:anim>
+                                    <p:anim calcmode="lin" valueType="num">
+                                      <p:cBhvr additive="base">
+                                        <p:cTn id="8" dur="500" fill="hold"/>
+                                        <p:tgtEl>
+                                          <p:spTgt spid="3"/>
+                                        </p:tgtEl>
+                                        <p:attrNameLst>
+                                          <p:attrName>ppt_y</p:attrName>
+                                        </p:attrNameLst>
+                                      </p:cBhvr>
+                                      <p:tavLst>
+                                        <p:tav tm="0">
+                                          <p:val>
+                                            <p:strVal val="#ppt_y"/>
+                                          </p:val>
+                                        </p:tav>
+                                        <p:tav tm="100000">
+                                          <p:val>
+                                            <p:strVal val="#ppt_y"/>
+                                          </p:val>
+                                        </p:tav>
+                                      </p:tavLst>
+                                    </p:anim>
+                                  </p:childTnLst>
+                                </p:cTn>
+                              </p:par>
                             </p:childTnLst>
                           </p:cTn>
                         </p:par>
@@ -13070,13 +15548,27 @@
                   </p:par>
                 </p:childTnLst>
               </p:cTn>
+              <p:prevCondLst>
+                <p:cond evt="onPrev" delay="0">
+                  <p:tgtEl>
+                    <p:sldTgt/>
+                  </p:tgtEl>
+                </p:cond>
+              </p:prevCondLst>
+              <p:nextCondLst>
+                <p:cond evt="onNext" delay="0">
+                  <p:tgtEl>
+                    <p:sldTgt/>
+                  </p:tgtEl>
+                </p:cond>
+              </p:nextCondLst>
             </p:seq>
           </p:childTnLst>
         </p:cTn>
       </p:par>
     </p:tnLst>
     <p:bldLst>
-      <p:bldP spid="3" grpId="0" build="allAtOnce"/>
+      <p:bldP spid="3" grpId="0" uiExpand="0" advAuto="indefinite" build="whole" animBg="1"/>
     </p:bldLst>
   </p:timing>
 </p:sld>
@@ -13378,7 +15870,7 @@
   <p:timing>
     <p:tnLst>
       <p:par>
-        <p:cTn id="1" dur="indefinite" restart="never" nodeType="tmRoot">
+        <p:cTn id="1" restart="never" nodeType="tmRoot">
           <p:childTnLst>
             <p:seq concurrent="1" nextAc="seek">
               <p:cTn id="2" dur="indefinite" nodeType="mainSeq">
@@ -13390,33 +15882,84 @@
                       </p:stCondLst>
                       <p:childTnLst>
                         <p:par>
-                          <p:cTn id="4" presetID="2" presetClass="entr" presetSubtype="4" fill="hold" grpId="0" nodeType="clickEffect">
+                          <p:cTn id="4" fill="hold">
                             <p:stCondLst>
                               <p:cond delay="0"/>
                             </p:stCondLst>
                             <p:childTnLst>
-                              <p:set>
-                                <p:cBhvr>
-                                  <p:cTn id="5" dur="1" fill="hold"/>
-                                  <p:tgtEl>
-                                    <p:spTgt spid="4"/>
-                                  </p:tgtEl>
-                                  <p:attrNameLst>
-                                    <p:attrName>style.visibility</p:attrName>
-                                  </p:attrNameLst>
-                                </p:cBhvr>
-                                <p:to>
-                                  <p:strVal val="visible"/>
-                                </p:to>
-                              </p:set>
-                              <p:animEffect transition="in" filter="fly(l)" prLst="dir=l">
-                                <p:cBhvr>
-                                  <p:cTn id="6" dur="500"/>
-                                  <p:tgtEl>
-                                    <p:spTgt spid="4"/>
-                                  </p:tgtEl>
-                                </p:cBhvr>
-                              </p:animEffect>
+                              <p:par>
+                                <p:cTn id="5" presetID="2" presetClass="entr" presetSubtype="8" fill="hold" grpId="0" nodeType="clickEffect">
+                                  <p:stCondLst>
+                                    <p:cond delay="0"/>
+                                  </p:stCondLst>
+                                  <p:childTnLst>
+                                    <p:set>
+                                      <p:cBhvr>
+                                        <p:cTn id="6" dur="1" fill="hold">
+                                          <p:stCondLst>
+                                            <p:cond delay="0"/>
+                                          </p:stCondLst>
+                                        </p:cTn>
+                                        <p:tgtEl>
+                                          <p:spTgt spid="4"/>
+                                        </p:tgtEl>
+                                        <p:attrNameLst>
+                                          <p:attrName>style.visibility</p:attrName>
+                                        </p:attrNameLst>
+                                      </p:cBhvr>
+                                      <p:to>
+                                        <p:strVal val="visible"/>
+                                      </p:to>
+                                    </p:set>
+                                    <p:anim calcmode="lin" valueType="num">
+                                      <p:cBhvr additive="base">
+                                        <p:cTn id="7" dur="500" fill="hold"/>
+                                        <p:tgtEl>
+                                          <p:spTgt spid="4"/>
+                                        </p:tgtEl>
+                                        <p:attrNameLst>
+                                          <p:attrName>ppt_x</p:attrName>
+                                        </p:attrNameLst>
+                                      </p:cBhvr>
+                                      <p:tavLst>
+                                        <p:tav tm="0">
+                                          <p:val>
+                                            <p:strVal val="0-#ppt_w/2"/>
+                                          </p:val>
+                                        </p:tav>
+                                        <p:tav tm="100000">
+                                          <p:val>
+                                            <p:strVal val="#ppt_x"/>
+                                          </p:val>
+                                        </p:tav>
+                                      </p:tavLst>
+                                    </p:anim>
+                                    <p:anim calcmode="lin" valueType="num">
+                                      <p:cBhvr additive="base">
+                                        <p:cTn id="8" dur="500" fill="hold"/>
+                                        <p:tgtEl>
+                                          <p:spTgt spid="4"/>
+                                        </p:tgtEl>
+                                        <p:attrNameLst>
+                                          <p:attrName>ppt_y</p:attrName>
+                                        </p:attrNameLst>
+                                      </p:cBhvr>
+                                      <p:tavLst>
+                                        <p:tav tm="0">
+                                          <p:val>
+                                            <p:strVal val="#ppt_y"/>
+                                          </p:val>
+                                        </p:tav>
+                                        <p:tav tm="100000">
+                                          <p:val>
+                                            <p:strVal val="#ppt_y"/>
+                                          </p:val>
+                                        </p:tav>
+                                      </p:tavLst>
+                                    </p:anim>
+                                  </p:childTnLst>
+                                </p:cTn>
+                              </p:par>
                             </p:childTnLst>
                           </p:cTn>
                         </p:par>
@@ -13424,39 +15967,90 @@
                     </p:cTn>
                   </p:par>
                   <p:par>
-                    <p:cTn id="7" fill="hold">
+                    <p:cTn id="9" fill="hold">
                       <p:stCondLst>
                         <p:cond delay="indefinite"/>
                       </p:stCondLst>
                       <p:childTnLst>
                         <p:par>
-                          <p:cTn id="8" presetID="2" presetClass="entr" presetSubtype="4" fill="hold" grpId="0" nodeType="clickEffect">
+                          <p:cTn id="10" fill="hold">
                             <p:stCondLst>
                               <p:cond delay="0"/>
                             </p:stCondLst>
                             <p:childTnLst>
-                              <p:set>
-                                <p:cBhvr>
-                                  <p:cTn id="9" dur="1" fill="hold"/>
-                                  <p:tgtEl>
-                                    <p:spTgt spid="6"/>
-                                  </p:tgtEl>
-                                  <p:attrNameLst>
-                                    <p:attrName>style.visibility</p:attrName>
-                                  </p:attrNameLst>
-                                </p:cBhvr>
-                                <p:to>
-                                  <p:strVal val="visible"/>
-                                </p:to>
-                              </p:set>
-                              <p:animEffect transition="in" filter="fly(l)" prLst="dir=l">
-                                <p:cBhvr>
-                                  <p:cTn id="10" dur="500"/>
-                                  <p:tgtEl>
-                                    <p:spTgt spid="6"/>
-                                  </p:tgtEl>
-                                </p:cBhvr>
-                              </p:animEffect>
+                              <p:par>
+                                <p:cTn id="11" presetID="2" presetClass="entr" presetSubtype="8" fill="hold" grpId="0" nodeType="clickEffect">
+                                  <p:stCondLst>
+                                    <p:cond delay="0"/>
+                                  </p:stCondLst>
+                                  <p:childTnLst>
+                                    <p:set>
+                                      <p:cBhvr>
+                                        <p:cTn id="12" dur="1" fill="hold">
+                                          <p:stCondLst>
+                                            <p:cond delay="0"/>
+                                          </p:stCondLst>
+                                        </p:cTn>
+                                        <p:tgtEl>
+                                          <p:spTgt spid="6"/>
+                                        </p:tgtEl>
+                                        <p:attrNameLst>
+                                          <p:attrName>style.visibility</p:attrName>
+                                        </p:attrNameLst>
+                                      </p:cBhvr>
+                                      <p:to>
+                                        <p:strVal val="visible"/>
+                                      </p:to>
+                                    </p:set>
+                                    <p:anim calcmode="lin" valueType="num">
+                                      <p:cBhvr additive="base">
+                                        <p:cTn id="13" dur="500" fill="hold"/>
+                                        <p:tgtEl>
+                                          <p:spTgt spid="6"/>
+                                        </p:tgtEl>
+                                        <p:attrNameLst>
+                                          <p:attrName>ppt_x</p:attrName>
+                                        </p:attrNameLst>
+                                      </p:cBhvr>
+                                      <p:tavLst>
+                                        <p:tav tm="0">
+                                          <p:val>
+                                            <p:strVal val="0-#ppt_w/2"/>
+                                          </p:val>
+                                        </p:tav>
+                                        <p:tav tm="100000">
+                                          <p:val>
+                                            <p:strVal val="#ppt_x"/>
+                                          </p:val>
+                                        </p:tav>
+                                      </p:tavLst>
+                                    </p:anim>
+                                    <p:anim calcmode="lin" valueType="num">
+                                      <p:cBhvr additive="base">
+                                        <p:cTn id="14" dur="500" fill="hold"/>
+                                        <p:tgtEl>
+                                          <p:spTgt spid="6"/>
+                                        </p:tgtEl>
+                                        <p:attrNameLst>
+                                          <p:attrName>ppt_y</p:attrName>
+                                        </p:attrNameLst>
+                                      </p:cBhvr>
+                                      <p:tavLst>
+                                        <p:tav tm="0">
+                                          <p:val>
+                                            <p:strVal val="#ppt_y"/>
+                                          </p:val>
+                                        </p:tav>
+                                        <p:tav tm="100000">
+                                          <p:val>
+                                            <p:strVal val="#ppt_y"/>
+                                          </p:val>
+                                        </p:tav>
+                                      </p:tavLst>
+                                    </p:anim>
+                                  </p:childTnLst>
+                                </p:cTn>
+                              </p:par>
                             </p:childTnLst>
                           </p:cTn>
                         </p:par>
@@ -13465,14 +16059,28 @@
                   </p:par>
                 </p:childTnLst>
               </p:cTn>
+              <p:prevCondLst>
+                <p:cond evt="onPrev" delay="0">
+                  <p:tgtEl>
+                    <p:sldTgt/>
+                  </p:tgtEl>
+                </p:cond>
+              </p:prevCondLst>
+              <p:nextCondLst>
+                <p:cond evt="onNext" delay="0">
+                  <p:tgtEl>
+                    <p:sldTgt/>
+                  </p:tgtEl>
+                </p:cond>
+              </p:nextCondLst>
             </p:seq>
           </p:childTnLst>
         </p:cTn>
       </p:par>
     </p:tnLst>
     <p:bldLst>
-      <p:bldP spid="4" grpId="0" build="allAtOnce"/>
-      <p:bldP spid="6" grpId="0" build="allAtOnce"/>
+      <p:bldP spid="4" grpId="0" uiExpand="0" advAuto="indefinite" build="whole" animBg="1"/>
+      <p:bldP spid="6" grpId="0" uiExpand="0" advAuto="indefinite" build="whole" animBg="1"/>
     </p:bldLst>
   </p:timing>
 </p:sld>
@@ -13705,7 +16313,7 @@
   <p:timing>
     <p:tnLst>
       <p:par>
-        <p:cTn id="1" dur="indefinite" restart="never" nodeType="tmRoot">
+        <p:cTn id="1" restart="never" nodeType="tmRoot">
           <p:childTnLst>
             <p:seq concurrent="1" nextAc="seek">
               <p:cTn id="2" dur="indefinite" nodeType="mainSeq">
@@ -13717,33 +16325,84 @@
                       </p:stCondLst>
                       <p:childTnLst>
                         <p:par>
-                          <p:cTn id="4" presetID="2" presetClass="entr" presetSubtype="4" fill="hold" grpId="0" nodeType="clickEffect">
+                          <p:cTn id="4" fill="hold">
                             <p:stCondLst>
                               <p:cond delay="0"/>
                             </p:stCondLst>
                             <p:childTnLst>
-                              <p:set>
-                                <p:cBhvr>
-                                  <p:cTn id="5" dur="1" fill="hold"/>
-                                  <p:tgtEl>
-                                    <p:spTgt spid="3"/>
-                                  </p:tgtEl>
-                                  <p:attrNameLst>
-                                    <p:attrName>style.visibility</p:attrName>
-                                  </p:attrNameLst>
-                                </p:cBhvr>
-                                <p:to>
-                                  <p:strVal val="visible"/>
-                                </p:to>
-                              </p:set>
-                              <p:animEffect transition="in" filter="fly(l)" prLst="dir=l">
-                                <p:cBhvr>
-                                  <p:cTn id="6" dur="500"/>
-                                  <p:tgtEl>
-                                    <p:spTgt spid="3"/>
-                                  </p:tgtEl>
-                                </p:cBhvr>
-                              </p:animEffect>
+                              <p:par>
+                                <p:cTn id="5" presetID="2" presetClass="entr" presetSubtype="8" fill="hold" grpId="0" nodeType="clickEffect">
+                                  <p:stCondLst>
+                                    <p:cond delay="0"/>
+                                  </p:stCondLst>
+                                  <p:childTnLst>
+                                    <p:set>
+                                      <p:cBhvr>
+                                        <p:cTn id="6" dur="1" fill="hold">
+                                          <p:stCondLst>
+                                            <p:cond delay="0"/>
+                                          </p:stCondLst>
+                                        </p:cTn>
+                                        <p:tgtEl>
+                                          <p:spTgt spid="3"/>
+                                        </p:tgtEl>
+                                        <p:attrNameLst>
+                                          <p:attrName>style.visibility</p:attrName>
+                                        </p:attrNameLst>
+                                      </p:cBhvr>
+                                      <p:to>
+                                        <p:strVal val="visible"/>
+                                      </p:to>
+                                    </p:set>
+                                    <p:anim calcmode="lin" valueType="num">
+                                      <p:cBhvr additive="base">
+                                        <p:cTn id="7" dur="500" fill="hold"/>
+                                        <p:tgtEl>
+                                          <p:spTgt spid="3"/>
+                                        </p:tgtEl>
+                                        <p:attrNameLst>
+                                          <p:attrName>ppt_x</p:attrName>
+                                        </p:attrNameLst>
+                                      </p:cBhvr>
+                                      <p:tavLst>
+                                        <p:tav tm="0">
+                                          <p:val>
+                                            <p:strVal val="0-#ppt_w/2"/>
+                                          </p:val>
+                                        </p:tav>
+                                        <p:tav tm="100000">
+                                          <p:val>
+                                            <p:strVal val="#ppt_x"/>
+                                          </p:val>
+                                        </p:tav>
+                                      </p:tavLst>
+                                    </p:anim>
+                                    <p:anim calcmode="lin" valueType="num">
+                                      <p:cBhvr additive="base">
+                                        <p:cTn id="8" dur="500" fill="hold"/>
+                                        <p:tgtEl>
+                                          <p:spTgt spid="3"/>
+                                        </p:tgtEl>
+                                        <p:attrNameLst>
+                                          <p:attrName>ppt_y</p:attrName>
+                                        </p:attrNameLst>
+                                      </p:cBhvr>
+                                      <p:tavLst>
+                                        <p:tav tm="0">
+                                          <p:val>
+                                            <p:strVal val="#ppt_y"/>
+                                          </p:val>
+                                        </p:tav>
+                                        <p:tav tm="100000">
+                                          <p:val>
+                                            <p:strVal val="#ppt_y"/>
+                                          </p:val>
+                                        </p:tav>
+                                      </p:tavLst>
+                                    </p:anim>
+                                  </p:childTnLst>
+                                </p:cTn>
+                              </p:par>
                             </p:childTnLst>
                           </p:cTn>
                         </p:par>
@@ -13752,13 +16411,27 @@
                   </p:par>
                 </p:childTnLst>
               </p:cTn>
+              <p:prevCondLst>
+                <p:cond evt="onPrev" delay="0">
+                  <p:tgtEl>
+                    <p:sldTgt/>
+                  </p:tgtEl>
+                </p:cond>
+              </p:prevCondLst>
+              <p:nextCondLst>
+                <p:cond evt="onNext" delay="0">
+                  <p:tgtEl>
+                    <p:sldTgt/>
+                  </p:tgtEl>
+                </p:cond>
+              </p:nextCondLst>
             </p:seq>
           </p:childTnLst>
         </p:cTn>
       </p:par>
     </p:tnLst>
     <p:bldLst>
-      <p:bldP spid="3" grpId="0" build="allAtOnce"/>
+      <p:bldP spid="3" grpId="0" uiExpand="0" advAuto="indefinite" build="whole" animBg="1"/>
     </p:bldLst>
   </p:timing>
 </p:sld>
@@ -14015,7 +16688,7 @@
   <p:timing>
     <p:tnLst>
       <p:par>
-        <p:cTn id="1" dur="indefinite" restart="never" nodeType="tmRoot">
+        <p:cTn id="1" restart="never" nodeType="tmRoot">
           <p:childTnLst>
             <p:seq concurrent="1" nextAc="seek">
               <p:cTn id="2" dur="indefinite" nodeType="mainSeq">
@@ -14027,33 +16700,84 @@
                       </p:stCondLst>
                       <p:childTnLst>
                         <p:par>
-                          <p:cTn id="4" presetID="2" presetClass="entr" presetSubtype="4" fill="hold" grpId="0" nodeType="clickEffect">
+                          <p:cTn id="4" fill="hold">
                             <p:stCondLst>
                               <p:cond delay="0"/>
                             </p:stCondLst>
                             <p:childTnLst>
-                              <p:set>
-                                <p:cBhvr>
-                                  <p:cTn id="5" dur="1" fill="hold"/>
-                                  <p:tgtEl>
-                                    <p:spTgt spid="3"/>
-                                  </p:tgtEl>
-                                  <p:attrNameLst>
-                                    <p:attrName>style.visibility</p:attrName>
-                                  </p:attrNameLst>
-                                </p:cBhvr>
-                                <p:to>
-                                  <p:strVal val="visible"/>
-                                </p:to>
-                              </p:set>
-                              <p:animEffect transition="in" filter="fly(l)" prLst="dir=l">
-                                <p:cBhvr>
-                                  <p:cTn id="6" dur="500"/>
-                                  <p:tgtEl>
-                                    <p:spTgt spid="3"/>
-                                  </p:tgtEl>
-                                </p:cBhvr>
-                              </p:animEffect>
+                              <p:par>
+                                <p:cTn id="5" presetID="2" presetClass="entr" presetSubtype="8" fill="hold" grpId="0" nodeType="clickEffect">
+                                  <p:stCondLst>
+                                    <p:cond delay="0"/>
+                                  </p:stCondLst>
+                                  <p:childTnLst>
+                                    <p:set>
+                                      <p:cBhvr>
+                                        <p:cTn id="6" dur="1" fill="hold">
+                                          <p:stCondLst>
+                                            <p:cond delay="0"/>
+                                          </p:stCondLst>
+                                        </p:cTn>
+                                        <p:tgtEl>
+                                          <p:spTgt spid="3"/>
+                                        </p:tgtEl>
+                                        <p:attrNameLst>
+                                          <p:attrName>style.visibility</p:attrName>
+                                        </p:attrNameLst>
+                                      </p:cBhvr>
+                                      <p:to>
+                                        <p:strVal val="visible"/>
+                                      </p:to>
+                                    </p:set>
+                                    <p:anim calcmode="lin" valueType="num">
+                                      <p:cBhvr additive="base">
+                                        <p:cTn id="7" dur="500" fill="hold"/>
+                                        <p:tgtEl>
+                                          <p:spTgt spid="3"/>
+                                        </p:tgtEl>
+                                        <p:attrNameLst>
+                                          <p:attrName>ppt_x</p:attrName>
+                                        </p:attrNameLst>
+                                      </p:cBhvr>
+                                      <p:tavLst>
+                                        <p:tav tm="0">
+                                          <p:val>
+                                            <p:strVal val="0-#ppt_w/2"/>
+                                          </p:val>
+                                        </p:tav>
+                                        <p:tav tm="100000">
+                                          <p:val>
+                                            <p:strVal val="#ppt_x"/>
+                                          </p:val>
+                                        </p:tav>
+                                      </p:tavLst>
+                                    </p:anim>
+                                    <p:anim calcmode="lin" valueType="num">
+                                      <p:cBhvr additive="base">
+                                        <p:cTn id="8" dur="500" fill="hold"/>
+                                        <p:tgtEl>
+                                          <p:spTgt spid="3"/>
+                                        </p:tgtEl>
+                                        <p:attrNameLst>
+                                          <p:attrName>ppt_y</p:attrName>
+                                        </p:attrNameLst>
+                                      </p:cBhvr>
+                                      <p:tavLst>
+                                        <p:tav tm="0">
+                                          <p:val>
+                                            <p:strVal val="#ppt_y"/>
+                                          </p:val>
+                                        </p:tav>
+                                        <p:tav tm="100000">
+                                          <p:val>
+                                            <p:strVal val="#ppt_y"/>
+                                          </p:val>
+                                        </p:tav>
+                                      </p:tavLst>
+                                    </p:anim>
+                                  </p:childTnLst>
+                                </p:cTn>
+                              </p:par>
                             </p:childTnLst>
                           </p:cTn>
                         </p:par>
@@ -14062,13 +16786,27 @@
                   </p:par>
                 </p:childTnLst>
               </p:cTn>
+              <p:prevCondLst>
+                <p:cond evt="onPrev" delay="0">
+                  <p:tgtEl>
+                    <p:sldTgt/>
+                  </p:tgtEl>
+                </p:cond>
+              </p:prevCondLst>
+              <p:nextCondLst>
+                <p:cond evt="onNext" delay="0">
+                  <p:tgtEl>
+                    <p:sldTgt/>
+                  </p:tgtEl>
+                </p:cond>
+              </p:nextCondLst>
             </p:seq>
           </p:childTnLst>
         </p:cTn>
       </p:par>
     </p:tnLst>
     <p:bldLst>
-      <p:bldP spid="3" grpId="0" build="allAtOnce"/>
+      <p:bldP spid="3" grpId="0" uiExpand="0" advAuto="indefinite" build="whole" animBg="1"/>
     </p:bldLst>
   </p:timing>
 </p:sld>
@@ -14375,7 +17113,7 @@
   <p:timing>
     <p:tnLst>
       <p:par>
-        <p:cTn id="1" dur="indefinite" restart="never" nodeType="tmRoot">
+        <p:cTn id="1" restart="never" nodeType="tmRoot">
           <p:childTnLst>
             <p:seq concurrent="1" nextAc="seek">
               <p:cTn id="2" dur="indefinite" nodeType="mainSeq">
@@ -14387,33 +17125,84 @@
                       </p:stCondLst>
                       <p:childTnLst>
                         <p:par>
-                          <p:cTn id="4" presetID="2" presetClass="entr" presetSubtype="4" fill="hold" grpId="0" nodeType="clickEffect">
+                          <p:cTn id="4" fill="hold">
                             <p:stCondLst>
                               <p:cond delay="0"/>
                             </p:stCondLst>
                             <p:childTnLst>
-                              <p:set>
-                                <p:cBhvr>
-                                  <p:cTn id="5" dur="1" fill="hold"/>
-                                  <p:tgtEl>
-                                    <p:spTgt spid="3"/>
-                                  </p:tgtEl>
-                                  <p:attrNameLst>
-                                    <p:attrName>style.visibility</p:attrName>
-                                  </p:attrNameLst>
-                                </p:cBhvr>
-                                <p:to>
-                                  <p:strVal val="visible"/>
-                                </p:to>
-                              </p:set>
-                              <p:animEffect transition="in" filter="fly(l)" prLst="dir=l">
-                                <p:cBhvr>
-                                  <p:cTn id="6" dur="500"/>
-                                  <p:tgtEl>
-                                    <p:spTgt spid="3"/>
-                                  </p:tgtEl>
-                                </p:cBhvr>
-                              </p:animEffect>
+                              <p:par>
+                                <p:cTn id="5" presetID="2" presetClass="entr" presetSubtype="8" fill="hold" grpId="0" nodeType="clickEffect">
+                                  <p:stCondLst>
+                                    <p:cond delay="0"/>
+                                  </p:stCondLst>
+                                  <p:childTnLst>
+                                    <p:set>
+                                      <p:cBhvr>
+                                        <p:cTn id="6" dur="1" fill="hold">
+                                          <p:stCondLst>
+                                            <p:cond delay="0"/>
+                                          </p:stCondLst>
+                                        </p:cTn>
+                                        <p:tgtEl>
+                                          <p:spTgt spid="3"/>
+                                        </p:tgtEl>
+                                        <p:attrNameLst>
+                                          <p:attrName>style.visibility</p:attrName>
+                                        </p:attrNameLst>
+                                      </p:cBhvr>
+                                      <p:to>
+                                        <p:strVal val="visible"/>
+                                      </p:to>
+                                    </p:set>
+                                    <p:anim calcmode="lin" valueType="num">
+                                      <p:cBhvr additive="base">
+                                        <p:cTn id="7" dur="500" fill="hold"/>
+                                        <p:tgtEl>
+                                          <p:spTgt spid="3"/>
+                                        </p:tgtEl>
+                                        <p:attrNameLst>
+                                          <p:attrName>ppt_x</p:attrName>
+                                        </p:attrNameLst>
+                                      </p:cBhvr>
+                                      <p:tavLst>
+                                        <p:tav tm="0">
+                                          <p:val>
+                                            <p:strVal val="0-#ppt_w/2"/>
+                                          </p:val>
+                                        </p:tav>
+                                        <p:tav tm="100000">
+                                          <p:val>
+                                            <p:strVal val="#ppt_x"/>
+                                          </p:val>
+                                        </p:tav>
+                                      </p:tavLst>
+                                    </p:anim>
+                                    <p:anim calcmode="lin" valueType="num">
+                                      <p:cBhvr additive="base">
+                                        <p:cTn id="8" dur="500" fill="hold"/>
+                                        <p:tgtEl>
+                                          <p:spTgt spid="3"/>
+                                        </p:tgtEl>
+                                        <p:attrNameLst>
+                                          <p:attrName>ppt_y</p:attrName>
+                                        </p:attrNameLst>
+                                      </p:cBhvr>
+                                      <p:tavLst>
+                                        <p:tav tm="0">
+                                          <p:val>
+                                            <p:strVal val="#ppt_y"/>
+                                          </p:val>
+                                        </p:tav>
+                                        <p:tav tm="100000">
+                                          <p:val>
+                                            <p:strVal val="#ppt_y"/>
+                                          </p:val>
+                                        </p:tav>
+                                      </p:tavLst>
+                                    </p:anim>
+                                  </p:childTnLst>
+                                </p:cTn>
+                              </p:par>
                             </p:childTnLst>
                           </p:cTn>
                         </p:par>
@@ -14422,13 +17211,27 @@
                   </p:par>
                 </p:childTnLst>
               </p:cTn>
+              <p:prevCondLst>
+                <p:cond evt="onPrev" delay="0">
+                  <p:tgtEl>
+                    <p:sldTgt/>
+                  </p:tgtEl>
+                </p:cond>
+              </p:prevCondLst>
+              <p:nextCondLst>
+                <p:cond evt="onNext" delay="0">
+                  <p:tgtEl>
+                    <p:sldTgt/>
+                  </p:tgtEl>
+                </p:cond>
+              </p:nextCondLst>
             </p:seq>
           </p:childTnLst>
         </p:cTn>
       </p:par>
     </p:tnLst>
     <p:bldLst>
-      <p:bldP spid="3" grpId="0" build="allAtOnce"/>
+      <p:bldP spid="3" grpId="0" uiExpand="0" advAuto="indefinite" build="whole" animBg="1"/>
     </p:bldLst>
   </p:timing>
 </p:sld>
@@ -14616,7 +17419,7 @@
   <p:timing>
     <p:tnLst>
       <p:par>
-        <p:cTn id="1" dur="indefinite" restart="never" nodeType="tmRoot">
+        <p:cTn id="1" restart="never" nodeType="tmRoot">
           <p:childTnLst>
             <p:seq concurrent="1" nextAc="seek">
               <p:cTn id="2" dur="indefinite" nodeType="mainSeq">
@@ -14628,33 +17431,84 @@
                       </p:stCondLst>
                       <p:childTnLst>
                         <p:par>
-                          <p:cTn id="4" presetID="2" presetClass="entr" presetSubtype="4" fill="hold" grpId="0" nodeType="clickEffect">
+                          <p:cTn id="4" fill="hold">
                             <p:stCondLst>
                               <p:cond delay="0"/>
                             </p:stCondLst>
                             <p:childTnLst>
-                              <p:set>
-                                <p:cBhvr>
-                                  <p:cTn id="5" dur="1" fill="hold"/>
-                                  <p:tgtEl>
-                                    <p:spTgt spid="4"/>
-                                  </p:tgtEl>
-                                  <p:attrNameLst>
-                                    <p:attrName>style.visibility</p:attrName>
-                                  </p:attrNameLst>
-                                </p:cBhvr>
-                                <p:to>
-                                  <p:strVal val="visible"/>
-                                </p:to>
-                              </p:set>
-                              <p:animEffect transition="in" filter="fly(l)" prLst="dir=l">
-                                <p:cBhvr>
-                                  <p:cTn id="6" dur="500"/>
-                                  <p:tgtEl>
-                                    <p:spTgt spid="4"/>
-                                  </p:tgtEl>
-                                </p:cBhvr>
-                              </p:animEffect>
+                              <p:par>
+                                <p:cTn id="5" presetID="2" presetClass="entr" presetSubtype="8" fill="hold" grpId="0" nodeType="clickEffect">
+                                  <p:stCondLst>
+                                    <p:cond delay="0"/>
+                                  </p:stCondLst>
+                                  <p:childTnLst>
+                                    <p:set>
+                                      <p:cBhvr>
+                                        <p:cTn id="6" dur="1" fill="hold">
+                                          <p:stCondLst>
+                                            <p:cond delay="0"/>
+                                          </p:stCondLst>
+                                        </p:cTn>
+                                        <p:tgtEl>
+                                          <p:spTgt spid="4"/>
+                                        </p:tgtEl>
+                                        <p:attrNameLst>
+                                          <p:attrName>style.visibility</p:attrName>
+                                        </p:attrNameLst>
+                                      </p:cBhvr>
+                                      <p:to>
+                                        <p:strVal val="visible"/>
+                                      </p:to>
+                                    </p:set>
+                                    <p:anim calcmode="lin" valueType="num">
+                                      <p:cBhvr additive="base">
+                                        <p:cTn id="7" dur="500" fill="hold"/>
+                                        <p:tgtEl>
+                                          <p:spTgt spid="4"/>
+                                        </p:tgtEl>
+                                        <p:attrNameLst>
+                                          <p:attrName>ppt_x</p:attrName>
+                                        </p:attrNameLst>
+                                      </p:cBhvr>
+                                      <p:tavLst>
+                                        <p:tav tm="0">
+                                          <p:val>
+                                            <p:strVal val="0-#ppt_w/2"/>
+                                          </p:val>
+                                        </p:tav>
+                                        <p:tav tm="100000">
+                                          <p:val>
+                                            <p:strVal val="#ppt_x"/>
+                                          </p:val>
+                                        </p:tav>
+                                      </p:tavLst>
+                                    </p:anim>
+                                    <p:anim calcmode="lin" valueType="num">
+                                      <p:cBhvr additive="base">
+                                        <p:cTn id="8" dur="500" fill="hold"/>
+                                        <p:tgtEl>
+                                          <p:spTgt spid="4"/>
+                                        </p:tgtEl>
+                                        <p:attrNameLst>
+                                          <p:attrName>ppt_y</p:attrName>
+                                        </p:attrNameLst>
+                                      </p:cBhvr>
+                                      <p:tavLst>
+                                        <p:tav tm="0">
+                                          <p:val>
+                                            <p:strVal val="#ppt_y"/>
+                                          </p:val>
+                                        </p:tav>
+                                        <p:tav tm="100000">
+                                          <p:val>
+                                            <p:strVal val="#ppt_y"/>
+                                          </p:val>
+                                        </p:tav>
+                                      </p:tavLst>
+                                    </p:anim>
+                                  </p:childTnLst>
+                                </p:cTn>
+                              </p:par>
                             </p:childTnLst>
                           </p:cTn>
                         </p:par>
@@ -14663,13 +17517,27 @@
                   </p:par>
                 </p:childTnLst>
               </p:cTn>
+              <p:prevCondLst>
+                <p:cond evt="onPrev" delay="0">
+                  <p:tgtEl>
+                    <p:sldTgt/>
+                  </p:tgtEl>
+                </p:cond>
+              </p:prevCondLst>
+              <p:nextCondLst>
+                <p:cond evt="onNext" delay="0">
+                  <p:tgtEl>
+                    <p:sldTgt/>
+                  </p:tgtEl>
+                </p:cond>
+              </p:nextCondLst>
             </p:seq>
           </p:childTnLst>
         </p:cTn>
       </p:par>
     </p:tnLst>
     <p:bldLst>
-      <p:bldP spid="4" grpId="0" build="allAtOnce"/>
+      <p:bldP spid="4" grpId="0" uiExpand="0" advAuto="indefinite" build="whole" animBg="1"/>
     </p:bldLst>
   </p:timing>
 </p:sld>
@@ -14811,7 +17679,7 @@
   <p:timing>
     <p:tnLst>
       <p:par>
-        <p:cTn id="1" dur="indefinite" restart="never" nodeType="tmRoot">
+        <p:cTn id="1" restart="never" nodeType="tmRoot">
           <p:childTnLst>
             <p:seq concurrent="1" nextAc="seek">
               <p:cTn id="2" dur="indefinite" nodeType="mainSeq">
@@ -14823,33 +17691,84 @@
                       </p:stCondLst>
                       <p:childTnLst>
                         <p:par>
-                          <p:cTn id="4" presetID="2" presetClass="entr" presetSubtype="4" fill="hold" grpId="0" nodeType="clickEffect">
+                          <p:cTn id="4" fill="hold">
                             <p:stCondLst>
                               <p:cond delay="0"/>
                             </p:stCondLst>
                             <p:childTnLst>
-                              <p:set>
-                                <p:cBhvr>
-                                  <p:cTn id="5" dur="1" fill="hold"/>
-                                  <p:tgtEl>
-                                    <p:spTgt spid="3"/>
-                                  </p:tgtEl>
-                                  <p:attrNameLst>
-                                    <p:attrName>style.visibility</p:attrName>
-                                  </p:attrNameLst>
-                                </p:cBhvr>
-                                <p:to>
-                                  <p:strVal val="visible"/>
-                                </p:to>
-                              </p:set>
-                              <p:animEffect transition="in" filter="fly(l)" prLst="dir=l">
-                                <p:cBhvr>
-                                  <p:cTn id="6" dur="500"/>
-                                  <p:tgtEl>
-                                    <p:spTgt spid="3"/>
-                                  </p:tgtEl>
-                                </p:cBhvr>
-                              </p:animEffect>
+                              <p:par>
+                                <p:cTn id="5" presetID="2" presetClass="entr" presetSubtype="8" fill="hold" grpId="0" nodeType="clickEffect">
+                                  <p:stCondLst>
+                                    <p:cond delay="0"/>
+                                  </p:stCondLst>
+                                  <p:childTnLst>
+                                    <p:set>
+                                      <p:cBhvr>
+                                        <p:cTn id="6" dur="1" fill="hold">
+                                          <p:stCondLst>
+                                            <p:cond delay="0"/>
+                                          </p:stCondLst>
+                                        </p:cTn>
+                                        <p:tgtEl>
+                                          <p:spTgt spid="3"/>
+                                        </p:tgtEl>
+                                        <p:attrNameLst>
+                                          <p:attrName>style.visibility</p:attrName>
+                                        </p:attrNameLst>
+                                      </p:cBhvr>
+                                      <p:to>
+                                        <p:strVal val="visible"/>
+                                      </p:to>
+                                    </p:set>
+                                    <p:anim calcmode="lin" valueType="num">
+                                      <p:cBhvr additive="base">
+                                        <p:cTn id="7" dur="500" fill="hold"/>
+                                        <p:tgtEl>
+                                          <p:spTgt spid="3"/>
+                                        </p:tgtEl>
+                                        <p:attrNameLst>
+                                          <p:attrName>ppt_x</p:attrName>
+                                        </p:attrNameLst>
+                                      </p:cBhvr>
+                                      <p:tavLst>
+                                        <p:tav tm="0">
+                                          <p:val>
+                                            <p:strVal val="0-#ppt_w/2"/>
+                                          </p:val>
+                                        </p:tav>
+                                        <p:tav tm="100000">
+                                          <p:val>
+                                            <p:strVal val="#ppt_x"/>
+                                          </p:val>
+                                        </p:tav>
+                                      </p:tavLst>
+                                    </p:anim>
+                                    <p:anim calcmode="lin" valueType="num">
+                                      <p:cBhvr additive="base">
+                                        <p:cTn id="8" dur="500" fill="hold"/>
+                                        <p:tgtEl>
+                                          <p:spTgt spid="3"/>
+                                        </p:tgtEl>
+                                        <p:attrNameLst>
+                                          <p:attrName>ppt_y</p:attrName>
+                                        </p:attrNameLst>
+                                      </p:cBhvr>
+                                      <p:tavLst>
+                                        <p:tav tm="0">
+                                          <p:val>
+                                            <p:strVal val="#ppt_y"/>
+                                          </p:val>
+                                        </p:tav>
+                                        <p:tav tm="100000">
+                                          <p:val>
+                                            <p:strVal val="#ppt_y"/>
+                                          </p:val>
+                                        </p:tav>
+                                      </p:tavLst>
+                                    </p:anim>
+                                  </p:childTnLst>
+                                </p:cTn>
+                              </p:par>
                             </p:childTnLst>
                           </p:cTn>
                         </p:par>
@@ -14858,13 +17777,27 @@
                   </p:par>
                 </p:childTnLst>
               </p:cTn>
+              <p:prevCondLst>
+                <p:cond evt="onPrev" delay="0">
+                  <p:tgtEl>
+                    <p:sldTgt/>
+                  </p:tgtEl>
+                </p:cond>
+              </p:prevCondLst>
+              <p:nextCondLst>
+                <p:cond evt="onNext" delay="0">
+                  <p:tgtEl>
+                    <p:sldTgt/>
+                  </p:tgtEl>
+                </p:cond>
+              </p:nextCondLst>
             </p:seq>
           </p:childTnLst>
         </p:cTn>
       </p:par>
     </p:tnLst>
     <p:bldLst>
-      <p:bldP spid="3" grpId="0" build="allAtOnce"/>
+      <p:bldP spid="3" grpId="0" uiExpand="0" advAuto="indefinite" build="whole" animBg="1"/>
     </p:bldLst>
   </p:timing>
 </p:sld>
@@ -15167,7 +18100,7 @@
   <p:timing>
     <p:tnLst>
       <p:par>
-        <p:cTn id="1" dur="indefinite" restart="never" nodeType="tmRoot">
+        <p:cTn id="1" restart="never" nodeType="tmRoot">
           <p:childTnLst>
             <p:seq concurrent="1" nextAc="seek">
               <p:cTn id="2" dur="indefinite" nodeType="mainSeq">
@@ -15179,33 +18112,84 @@
                       </p:stCondLst>
                       <p:childTnLst>
                         <p:par>
-                          <p:cTn id="4" presetID="2" presetClass="entr" presetSubtype="4" fill="hold" grpId="0" nodeType="clickEffect">
+                          <p:cTn id="4" fill="hold">
                             <p:stCondLst>
                               <p:cond delay="0"/>
                             </p:stCondLst>
                             <p:childTnLst>
-                              <p:set>
-                                <p:cBhvr>
-                                  <p:cTn id="5" dur="1" fill="hold"/>
-                                  <p:tgtEl>
-                                    <p:spTgt spid="4"/>
-                                  </p:tgtEl>
-                                  <p:attrNameLst>
-                                    <p:attrName>style.visibility</p:attrName>
-                                  </p:attrNameLst>
-                                </p:cBhvr>
-                                <p:to>
-                                  <p:strVal val="visible"/>
-                                </p:to>
-                              </p:set>
-                              <p:animEffect transition="in" filter="fly(l)" prLst="dir=l">
-                                <p:cBhvr>
-                                  <p:cTn id="6" dur="500"/>
-                                  <p:tgtEl>
-                                    <p:spTgt spid="4"/>
-                                  </p:tgtEl>
-                                </p:cBhvr>
-                              </p:animEffect>
+                              <p:par>
+                                <p:cTn id="5" presetID="2" presetClass="entr" presetSubtype="8" fill="hold" grpId="0" nodeType="clickEffect">
+                                  <p:stCondLst>
+                                    <p:cond delay="0"/>
+                                  </p:stCondLst>
+                                  <p:childTnLst>
+                                    <p:set>
+                                      <p:cBhvr>
+                                        <p:cTn id="6" dur="1" fill="hold">
+                                          <p:stCondLst>
+                                            <p:cond delay="0"/>
+                                          </p:stCondLst>
+                                        </p:cTn>
+                                        <p:tgtEl>
+                                          <p:spTgt spid="4"/>
+                                        </p:tgtEl>
+                                        <p:attrNameLst>
+                                          <p:attrName>style.visibility</p:attrName>
+                                        </p:attrNameLst>
+                                      </p:cBhvr>
+                                      <p:to>
+                                        <p:strVal val="visible"/>
+                                      </p:to>
+                                    </p:set>
+                                    <p:anim calcmode="lin" valueType="num">
+                                      <p:cBhvr additive="base">
+                                        <p:cTn id="7" dur="500" fill="hold"/>
+                                        <p:tgtEl>
+                                          <p:spTgt spid="4"/>
+                                        </p:tgtEl>
+                                        <p:attrNameLst>
+                                          <p:attrName>ppt_x</p:attrName>
+                                        </p:attrNameLst>
+                                      </p:cBhvr>
+                                      <p:tavLst>
+                                        <p:tav tm="0">
+                                          <p:val>
+                                            <p:strVal val="0-#ppt_w/2"/>
+                                          </p:val>
+                                        </p:tav>
+                                        <p:tav tm="100000">
+                                          <p:val>
+                                            <p:strVal val="#ppt_x"/>
+                                          </p:val>
+                                        </p:tav>
+                                      </p:tavLst>
+                                    </p:anim>
+                                    <p:anim calcmode="lin" valueType="num">
+                                      <p:cBhvr additive="base">
+                                        <p:cTn id="8" dur="500" fill="hold"/>
+                                        <p:tgtEl>
+                                          <p:spTgt spid="4"/>
+                                        </p:tgtEl>
+                                        <p:attrNameLst>
+                                          <p:attrName>ppt_y</p:attrName>
+                                        </p:attrNameLst>
+                                      </p:cBhvr>
+                                      <p:tavLst>
+                                        <p:tav tm="0">
+                                          <p:val>
+                                            <p:strVal val="#ppt_y"/>
+                                          </p:val>
+                                        </p:tav>
+                                        <p:tav tm="100000">
+                                          <p:val>
+                                            <p:strVal val="#ppt_y"/>
+                                          </p:val>
+                                        </p:tav>
+                                      </p:tavLst>
+                                    </p:anim>
+                                  </p:childTnLst>
+                                </p:cTn>
+                              </p:par>
                             </p:childTnLst>
                           </p:cTn>
                         </p:par>
@@ -15213,39 +18197,90 @@
                     </p:cTn>
                   </p:par>
                   <p:par>
-                    <p:cTn id="7" fill="hold">
+                    <p:cTn id="9" fill="hold">
                       <p:stCondLst>
                         <p:cond delay="indefinite"/>
                       </p:stCondLst>
                       <p:childTnLst>
                         <p:par>
-                          <p:cTn id="8" presetID="2" presetClass="entr" presetSubtype="4" fill="hold" grpId="0" nodeType="clickEffect">
+                          <p:cTn id="10" fill="hold">
                             <p:stCondLst>
                               <p:cond delay="0"/>
                             </p:stCondLst>
                             <p:childTnLst>
-                              <p:set>
-                                <p:cBhvr>
-                                  <p:cTn id="9" dur="1" fill="hold"/>
-                                  <p:tgtEl>
-                                    <p:spTgt spid="6"/>
-                                  </p:tgtEl>
-                                  <p:attrNameLst>
-                                    <p:attrName>style.visibility</p:attrName>
-                                  </p:attrNameLst>
-                                </p:cBhvr>
-                                <p:to>
-                                  <p:strVal val="visible"/>
-                                </p:to>
-                              </p:set>
-                              <p:animEffect transition="in" filter="fly(l)" prLst="dir=l">
-                                <p:cBhvr>
-                                  <p:cTn id="10" dur="500"/>
-                                  <p:tgtEl>
-                                    <p:spTgt spid="6"/>
-                                  </p:tgtEl>
-                                </p:cBhvr>
-                              </p:animEffect>
+                              <p:par>
+                                <p:cTn id="11" presetID="2" presetClass="entr" presetSubtype="8" fill="hold" grpId="0" nodeType="clickEffect">
+                                  <p:stCondLst>
+                                    <p:cond delay="0"/>
+                                  </p:stCondLst>
+                                  <p:childTnLst>
+                                    <p:set>
+                                      <p:cBhvr>
+                                        <p:cTn id="12" dur="1" fill="hold">
+                                          <p:stCondLst>
+                                            <p:cond delay="0"/>
+                                          </p:stCondLst>
+                                        </p:cTn>
+                                        <p:tgtEl>
+                                          <p:spTgt spid="6"/>
+                                        </p:tgtEl>
+                                        <p:attrNameLst>
+                                          <p:attrName>style.visibility</p:attrName>
+                                        </p:attrNameLst>
+                                      </p:cBhvr>
+                                      <p:to>
+                                        <p:strVal val="visible"/>
+                                      </p:to>
+                                    </p:set>
+                                    <p:anim calcmode="lin" valueType="num">
+                                      <p:cBhvr additive="base">
+                                        <p:cTn id="13" dur="500" fill="hold"/>
+                                        <p:tgtEl>
+                                          <p:spTgt spid="6"/>
+                                        </p:tgtEl>
+                                        <p:attrNameLst>
+                                          <p:attrName>ppt_x</p:attrName>
+                                        </p:attrNameLst>
+                                      </p:cBhvr>
+                                      <p:tavLst>
+                                        <p:tav tm="0">
+                                          <p:val>
+                                            <p:strVal val="0-#ppt_w/2"/>
+                                          </p:val>
+                                        </p:tav>
+                                        <p:tav tm="100000">
+                                          <p:val>
+                                            <p:strVal val="#ppt_x"/>
+                                          </p:val>
+                                        </p:tav>
+                                      </p:tavLst>
+                                    </p:anim>
+                                    <p:anim calcmode="lin" valueType="num">
+                                      <p:cBhvr additive="base">
+                                        <p:cTn id="14" dur="500" fill="hold"/>
+                                        <p:tgtEl>
+                                          <p:spTgt spid="6"/>
+                                        </p:tgtEl>
+                                        <p:attrNameLst>
+                                          <p:attrName>ppt_y</p:attrName>
+                                        </p:attrNameLst>
+                                      </p:cBhvr>
+                                      <p:tavLst>
+                                        <p:tav tm="0">
+                                          <p:val>
+                                            <p:strVal val="#ppt_y"/>
+                                          </p:val>
+                                        </p:tav>
+                                        <p:tav tm="100000">
+                                          <p:val>
+                                            <p:strVal val="#ppt_y"/>
+                                          </p:val>
+                                        </p:tav>
+                                      </p:tavLst>
+                                    </p:anim>
+                                  </p:childTnLst>
+                                </p:cTn>
+                              </p:par>
                             </p:childTnLst>
                           </p:cTn>
                         </p:par>
@@ -15254,14 +18289,28 @@
                   </p:par>
                 </p:childTnLst>
               </p:cTn>
+              <p:prevCondLst>
+                <p:cond evt="onPrev" delay="0">
+                  <p:tgtEl>
+                    <p:sldTgt/>
+                  </p:tgtEl>
+                </p:cond>
+              </p:prevCondLst>
+              <p:nextCondLst>
+                <p:cond evt="onNext" delay="0">
+                  <p:tgtEl>
+                    <p:sldTgt/>
+                  </p:tgtEl>
+                </p:cond>
+              </p:nextCondLst>
             </p:seq>
           </p:childTnLst>
         </p:cTn>
       </p:par>
     </p:tnLst>
     <p:bldLst>
-      <p:bldP spid="4" grpId="0" build="allAtOnce"/>
-      <p:bldP spid="6" grpId="0" build="allAtOnce"/>
+      <p:bldP spid="4" grpId="0" uiExpand="0" advAuto="indefinite" build="whole" animBg="1"/>
+      <p:bldP spid="6" grpId="0" uiExpand="0" advAuto="indefinite" build="whole" animBg="1"/>
     </p:bldLst>
   </p:timing>
 </p:sld>
@@ -15566,7 +18615,7 @@
   <p:timing>
     <p:tnLst>
       <p:par>
-        <p:cTn id="1" dur="indefinite" restart="never" nodeType="tmRoot">
+        <p:cTn id="1" restart="never" nodeType="tmRoot">
           <p:childTnLst>
             <p:seq concurrent="1" nextAc="seek">
               <p:cTn id="2" dur="indefinite" nodeType="mainSeq">
@@ -15578,33 +18627,84 @@
                       </p:stCondLst>
                       <p:childTnLst>
                         <p:par>
-                          <p:cTn id="4" presetID="2" presetClass="entr" presetSubtype="4" fill="hold" grpId="0" nodeType="clickEffect">
+                          <p:cTn id="4" fill="hold">
                             <p:stCondLst>
                               <p:cond delay="0"/>
                             </p:stCondLst>
                             <p:childTnLst>
-                              <p:set>
-                                <p:cBhvr>
-                                  <p:cTn id="5" dur="1" fill="hold"/>
-                                  <p:tgtEl>
-                                    <p:spTgt spid="4"/>
-                                  </p:tgtEl>
-                                  <p:attrNameLst>
-                                    <p:attrName>style.visibility</p:attrName>
-                                  </p:attrNameLst>
-                                </p:cBhvr>
-                                <p:to>
-                                  <p:strVal val="visible"/>
-                                </p:to>
-                              </p:set>
-                              <p:animEffect transition="in" filter="fly(l)" prLst="dir=l">
-                                <p:cBhvr>
-                                  <p:cTn id="6" dur="500"/>
-                                  <p:tgtEl>
-                                    <p:spTgt spid="4"/>
-                                  </p:tgtEl>
-                                </p:cBhvr>
-                              </p:animEffect>
+                              <p:par>
+                                <p:cTn id="5" presetID="2" presetClass="entr" presetSubtype="8" fill="hold" grpId="0" nodeType="clickEffect">
+                                  <p:stCondLst>
+                                    <p:cond delay="0"/>
+                                  </p:stCondLst>
+                                  <p:childTnLst>
+                                    <p:set>
+                                      <p:cBhvr>
+                                        <p:cTn id="6" dur="1" fill="hold">
+                                          <p:stCondLst>
+                                            <p:cond delay="0"/>
+                                          </p:stCondLst>
+                                        </p:cTn>
+                                        <p:tgtEl>
+                                          <p:spTgt spid="4"/>
+                                        </p:tgtEl>
+                                        <p:attrNameLst>
+                                          <p:attrName>style.visibility</p:attrName>
+                                        </p:attrNameLst>
+                                      </p:cBhvr>
+                                      <p:to>
+                                        <p:strVal val="visible"/>
+                                      </p:to>
+                                    </p:set>
+                                    <p:anim calcmode="lin" valueType="num">
+                                      <p:cBhvr additive="base">
+                                        <p:cTn id="7" dur="500" fill="hold"/>
+                                        <p:tgtEl>
+                                          <p:spTgt spid="4"/>
+                                        </p:tgtEl>
+                                        <p:attrNameLst>
+                                          <p:attrName>ppt_x</p:attrName>
+                                        </p:attrNameLst>
+                                      </p:cBhvr>
+                                      <p:tavLst>
+                                        <p:tav tm="0">
+                                          <p:val>
+                                            <p:strVal val="0-#ppt_w/2"/>
+                                          </p:val>
+                                        </p:tav>
+                                        <p:tav tm="100000">
+                                          <p:val>
+                                            <p:strVal val="#ppt_x"/>
+                                          </p:val>
+                                        </p:tav>
+                                      </p:tavLst>
+                                    </p:anim>
+                                    <p:anim calcmode="lin" valueType="num">
+                                      <p:cBhvr additive="base">
+                                        <p:cTn id="8" dur="500" fill="hold"/>
+                                        <p:tgtEl>
+                                          <p:spTgt spid="4"/>
+                                        </p:tgtEl>
+                                        <p:attrNameLst>
+                                          <p:attrName>ppt_y</p:attrName>
+                                        </p:attrNameLst>
+                                      </p:cBhvr>
+                                      <p:tavLst>
+                                        <p:tav tm="0">
+                                          <p:val>
+                                            <p:strVal val="#ppt_y"/>
+                                          </p:val>
+                                        </p:tav>
+                                        <p:tav tm="100000">
+                                          <p:val>
+                                            <p:strVal val="#ppt_y"/>
+                                          </p:val>
+                                        </p:tav>
+                                      </p:tavLst>
+                                    </p:anim>
+                                  </p:childTnLst>
+                                </p:cTn>
+                              </p:par>
                             </p:childTnLst>
                           </p:cTn>
                         </p:par>
@@ -15612,39 +18712,90 @@
                     </p:cTn>
                   </p:par>
                   <p:par>
-                    <p:cTn id="7" fill="hold">
+                    <p:cTn id="9" fill="hold">
                       <p:stCondLst>
                         <p:cond delay="indefinite"/>
                       </p:stCondLst>
                       <p:childTnLst>
                         <p:par>
-                          <p:cTn id="8" presetID="2" presetClass="entr" presetSubtype="4" fill="hold" grpId="0" nodeType="clickEffect">
+                          <p:cTn id="10" fill="hold">
                             <p:stCondLst>
                               <p:cond delay="0"/>
                             </p:stCondLst>
                             <p:childTnLst>
-                              <p:set>
-                                <p:cBhvr>
-                                  <p:cTn id="9" dur="1" fill="hold"/>
-                                  <p:tgtEl>
-                                    <p:spTgt spid="6"/>
-                                  </p:tgtEl>
-                                  <p:attrNameLst>
-                                    <p:attrName>style.visibility</p:attrName>
-                                  </p:attrNameLst>
-                                </p:cBhvr>
-                                <p:to>
-                                  <p:strVal val="visible"/>
-                                </p:to>
-                              </p:set>
-                              <p:animEffect transition="in" filter="fly(l)" prLst="dir=l">
-                                <p:cBhvr>
-                                  <p:cTn id="10" dur="500"/>
-                                  <p:tgtEl>
-                                    <p:spTgt spid="6"/>
-                                  </p:tgtEl>
-                                </p:cBhvr>
-                              </p:animEffect>
+                              <p:par>
+                                <p:cTn id="11" presetID="2" presetClass="entr" presetSubtype="8" fill="hold" grpId="0" nodeType="clickEffect">
+                                  <p:stCondLst>
+                                    <p:cond delay="0"/>
+                                  </p:stCondLst>
+                                  <p:childTnLst>
+                                    <p:set>
+                                      <p:cBhvr>
+                                        <p:cTn id="12" dur="1" fill="hold">
+                                          <p:stCondLst>
+                                            <p:cond delay="0"/>
+                                          </p:stCondLst>
+                                        </p:cTn>
+                                        <p:tgtEl>
+                                          <p:spTgt spid="6"/>
+                                        </p:tgtEl>
+                                        <p:attrNameLst>
+                                          <p:attrName>style.visibility</p:attrName>
+                                        </p:attrNameLst>
+                                      </p:cBhvr>
+                                      <p:to>
+                                        <p:strVal val="visible"/>
+                                      </p:to>
+                                    </p:set>
+                                    <p:anim calcmode="lin" valueType="num">
+                                      <p:cBhvr additive="base">
+                                        <p:cTn id="13" dur="500" fill="hold"/>
+                                        <p:tgtEl>
+                                          <p:spTgt spid="6"/>
+                                        </p:tgtEl>
+                                        <p:attrNameLst>
+                                          <p:attrName>ppt_x</p:attrName>
+                                        </p:attrNameLst>
+                                      </p:cBhvr>
+                                      <p:tavLst>
+                                        <p:tav tm="0">
+                                          <p:val>
+                                            <p:strVal val="0-#ppt_w/2"/>
+                                          </p:val>
+                                        </p:tav>
+                                        <p:tav tm="100000">
+                                          <p:val>
+                                            <p:strVal val="#ppt_x"/>
+                                          </p:val>
+                                        </p:tav>
+                                      </p:tavLst>
+                                    </p:anim>
+                                    <p:anim calcmode="lin" valueType="num">
+                                      <p:cBhvr additive="base">
+                                        <p:cTn id="14" dur="500" fill="hold"/>
+                                        <p:tgtEl>
+                                          <p:spTgt spid="6"/>
+                                        </p:tgtEl>
+                                        <p:attrNameLst>
+                                          <p:attrName>ppt_y</p:attrName>
+                                        </p:attrNameLst>
+                                      </p:cBhvr>
+                                      <p:tavLst>
+                                        <p:tav tm="0">
+                                          <p:val>
+                                            <p:strVal val="#ppt_y"/>
+                                          </p:val>
+                                        </p:tav>
+                                        <p:tav tm="100000">
+                                          <p:val>
+                                            <p:strVal val="#ppt_y"/>
+                                          </p:val>
+                                        </p:tav>
+                                      </p:tavLst>
+                                    </p:anim>
+                                  </p:childTnLst>
+                                </p:cTn>
+                              </p:par>
                             </p:childTnLst>
                           </p:cTn>
                         </p:par>
@@ -15653,14 +18804,28 @@
                   </p:par>
                 </p:childTnLst>
               </p:cTn>
+              <p:prevCondLst>
+                <p:cond evt="onPrev" delay="0">
+                  <p:tgtEl>
+                    <p:sldTgt/>
+                  </p:tgtEl>
+                </p:cond>
+              </p:prevCondLst>
+              <p:nextCondLst>
+                <p:cond evt="onNext" delay="0">
+                  <p:tgtEl>
+                    <p:sldTgt/>
+                  </p:tgtEl>
+                </p:cond>
+              </p:nextCondLst>
             </p:seq>
           </p:childTnLst>
         </p:cTn>
       </p:par>
     </p:tnLst>
     <p:bldLst>
-      <p:bldP spid="4" grpId="0" build="allAtOnce"/>
-      <p:bldP spid="6" grpId="0" build="allAtOnce"/>
+      <p:bldP spid="4" grpId="0" uiExpand="0" advAuto="indefinite" build="whole" animBg="1"/>
+      <p:bldP spid="6" grpId="0" uiExpand="0" advAuto="indefinite" build="whole" animBg="1"/>
     </p:bldLst>
   </p:timing>
 </p:sld>
@@ -15849,7 +19014,7 @@
   <p:timing>
     <p:tnLst>
       <p:par>
-        <p:cTn id="1" dur="indefinite" restart="never" nodeType="tmRoot">
+        <p:cTn id="1" restart="never" nodeType="tmRoot">
           <p:childTnLst>
             <p:seq concurrent="1" nextAc="seek">
               <p:cTn id="2" dur="indefinite" nodeType="mainSeq">
@@ -15861,33 +19026,84 @@
                       </p:stCondLst>
                       <p:childTnLst>
                         <p:par>
-                          <p:cTn id="4" presetID="2" presetClass="entr" presetSubtype="4" fill="hold" grpId="0" nodeType="clickEffect">
+                          <p:cTn id="4" fill="hold">
                             <p:stCondLst>
                               <p:cond delay="0"/>
                             </p:stCondLst>
                             <p:childTnLst>
-                              <p:set>
-                                <p:cBhvr>
-                                  <p:cTn id="5" dur="1" fill="hold"/>
-                                  <p:tgtEl>
-                                    <p:spTgt spid="4"/>
-                                  </p:tgtEl>
-                                  <p:attrNameLst>
-                                    <p:attrName>style.visibility</p:attrName>
-                                  </p:attrNameLst>
-                                </p:cBhvr>
-                                <p:to>
-                                  <p:strVal val="visible"/>
-                                </p:to>
-                              </p:set>
-                              <p:animEffect transition="in" filter="fly(l)" prLst="dir=l">
-                                <p:cBhvr>
-                                  <p:cTn id="6" dur="500"/>
-                                  <p:tgtEl>
-                                    <p:spTgt spid="4"/>
-                                  </p:tgtEl>
-                                </p:cBhvr>
-                              </p:animEffect>
+                              <p:par>
+                                <p:cTn id="5" presetID="2" presetClass="entr" presetSubtype="8" fill="hold" grpId="0" nodeType="clickEffect">
+                                  <p:stCondLst>
+                                    <p:cond delay="0"/>
+                                  </p:stCondLst>
+                                  <p:childTnLst>
+                                    <p:set>
+                                      <p:cBhvr>
+                                        <p:cTn id="6" dur="1" fill="hold">
+                                          <p:stCondLst>
+                                            <p:cond delay="0"/>
+                                          </p:stCondLst>
+                                        </p:cTn>
+                                        <p:tgtEl>
+                                          <p:spTgt spid="4"/>
+                                        </p:tgtEl>
+                                        <p:attrNameLst>
+                                          <p:attrName>style.visibility</p:attrName>
+                                        </p:attrNameLst>
+                                      </p:cBhvr>
+                                      <p:to>
+                                        <p:strVal val="visible"/>
+                                      </p:to>
+                                    </p:set>
+                                    <p:anim calcmode="lin" valueType="num">
+                                      <p:cBhvr additive="base">
+                                        <p:cTn id="7" dur="500" fill="hold"/>
+                                        <p:tgtEl>
+                                          <p:spTgt spid="4"/>
+                                        </p:tgtEl>
+                                        <p:attrNameLst>
+                                          <p:attrName>ppt_x</p:attrName>
+                                        </p:attrNameLst>
+                                      </p:cBhvr>
+                                      <p:tavLst>
+                                        <p:tav tm="0">
+                                          <p:val>
+                                            <p:strVal val="0-#ppt_w/2"/>
+                                          </p:val>
+                                        </p:tav>
+                                        <p:tav tm="100000">
+                                          <p:val>
+                                            <p:strVal val="#ppt_x"/>
+                                          </p:val>
+                                        </p:tav>
+                                      </p:tavLst>
+                                    </p:anim>
+                                    <p:anim calcmode="lin" valueType="num">
+                                      <p:cBhvr additive="base">
+                                        <p:cTn id="8" dur="500" fill="hold"/>
+                                        <p:tgtEl>
+                                          <p:spTgt spid="4"/>
+                                        </p:tgtEl>
+                                        <p:attrNameLst>
+                                          <p:attrName>ppt_y</p:attrName>
+                                        </p:attrNameLst>
+                                      </p:cBhvr>
+                                      <p:tavLst>
+                                        <p:tav tm="0">
+                                          <p:val>
+                                            <p:strVal val="#ppt_y"/>
+                                          </p:val>
+                                        </p:tav>
+                                        <p:tav tm="100000">
+                                          <p:val>
+                                            <p:strVal val="#ppt_y"/>
+                                          </p:val>
+                                        </p:tav>
+                                      </p:tavLst>
+                                    </p:anim>
+                                  </p:childTnLst>
+                                </p:cTn>
+                              </p:par>
                             </p:childTnLst>
                           </p:cTn>
                         </p:par>
@@ -15896,13 +19112,27 @@
                   </p:par>
                 </p:childTnLst>
               </p:cTn>
+              <p:prevCondLst>
+                <p:cond evt="onPrev" delay="0">
+                  <p:tgtEl>
+                    <p:sldTgt/>
+                  </p:tgtEl>
+                </p:cond>
+              </p:prevCondLst>
+              <p:nextCondLst>
+                <p:cond evt="onNext" delay="0">
+                  <p:tgtEl>
+                    <p:sldTgt/>
+                  </p:tgtEl>
+                </p:cond>
+              </p:nextCondLst>
             </p:seq>
           </p:childTnLst>
         </p:cTn>
       </p:par>
     </p:tnLst>
     <p:bldLst>
-      <p:bldP spid="4" grpId="0" build="allAtOnce"/>
+      <p:bldP spid="4" grpId="0" uiExpand="0" advAuto="indefinite" build="whole" animBg="1"/>
     </p:bldLst>
   </p:timing>
 </p:sld>
@@ -16041,7 +19271,7 @@
   <p:timing>
     <p:tnLst>
       <p:par>
-        <p:cTn id="1" dur="indefinite" restart="never" nodeType="tmRoot">
+        <p:cTn id="1" restart="never" nodeType="tmRoot">
           <p:childTnLst>
             <p:seq concurrent="1" nextAc="seek">
               <p:cTn id="2" dur="indefinite" nodeType="mainSeq">
@@ -16053,33 +19283,84 @@
                       </p:stCondLst>
                       <p:childTnLst>
                         <p:par>
-                          <p:cTn id="4" presetID="2" presetClass="entr" presetSubtype="4" fill="hold" grpId="0" nodeType="clickEffect">
+                          <p:cTn id="4" fill="hold">
                             <p:stCondLst>
                               <p:cond delay="0"/>
                             </p:stCondLst>
                             <p:childTnLst>
-                              <p:set>
-                                <p:cBhvr>
-                                  <p:cTn id="5" dur="1" fill="hold"/>
-                                  <p:tgtEl>
-                                    <p:spTgt spid="3"/>
-                                  </p:tgtEl>
-                                  <p:attrNameLst>
-                                    <p:attrName>style.visibility</p:attrName>
-                                  </p:attrNameLst>
-                                </p:cBhvr>
-                                <p:to>
-                                  <p:strVal val="visible"/>
-                                </p:to>
-                              </p:set>
-                              <p:animEffect transition="in" filter="fly(l)" prLst="dir=l">
-                                <p:cBhvr>
-                                  <p:cTn id="6" dur="500"/>
-                                  <p:tgtEl>
-                                    <p:spTgt spid="3"/>
-                                  </p:tgtEl>
-                                </p:cBhvr>
-                              </p:animEffect>
+                              <p:par>
+                                <p:cTn id="5" presetID="2" presetClass="entr" presetSubtype="8" fill="hold" grpId="0" nodeType="clickEffect">
+                                  <p:stCondLst>
+                                    <p:cond delay="0"/>
+                                  </p:stCondLst>
+                                  <p:childTnLst>
+                                    <p:set>
+                                      <p:cBhvr>
+                                        <p:cTn id="6" dur="1" fill="hold">
+                                          <p:stCondLst>
+                                            <p:cond delay="0"/>
+                                          </p:stCondLst>
+                                        </p:cTn>
+                                        <p:tgtEl>
+                                          <p:spTgt spid="3"/>
+                                        </p:tgtEl>
+                                        <p:attrNameLst>
+                                          <p:attrName>style.visibility</p:attrName>
+                                        </p:attrNameLst>
+                                      </p:cBhvr>
+                                      <p:to>
+                                        <p:strVal val="visible"/>
+                                      </p:to>
+                                    </p:set>
+                                    <p:anim calcmode="lin" valueType="num">
+                                      <p:cBhvr additive="base">
+                                        <p:cTn id="7" dur="500" fill="hold"/>
+                                        <p:tgtEl>
+                                          <p:spTgt spid="3"/>
+                                        </p:tgtEl>
+                                        <p:attrNameLst>
+                                          <p:attrName>ppt_x</p:attrName>
+                                        </p:attrNameLst>
+                                      </p:cBhvr>
+                                      <p:tavLst>
+                                        <p:tav tm="0">
+                                          <p:val>
+                                            <p:strVal val="0-#ppt_w/2"/>
+                                          </p:val>
+                                        </p:tav>
+                                        <p:tav tm="100000">
+                                          <p:val>
+                                            <p:strVal val="#ppt_x"/>
+                                          </p:val>
+                                        </p:tav>
+                                      </p:tavLst>
+                                    </p:anim>
+                                    <p:anim calcmode="lin" valueType="num">
+                                      <p:cBhvr additive="base">
+                                        <p:cTn id="8" dur="500" fill="hold"/>
+                                        <p:tgtEl>
+                                          <p:spTgt spid="3"/>
+                                        </p:tgtEl>
+                                        <p:attrNameLst>
+                                          <p:attrName>ppt_y</p:attrName>
+                                        </p:attrNameLst>
+                                      </p:cBhvr>
+                                      <p:tavLst>
+                                        <p:tav tm="0">
+                                          <p:val>
+                                            <p:strVal val="#ppt_y"/>
+                                          </p:val>
+                                        </p:tav>
+                                        <p:tav tm="100000">
+                                          <p:val>
+                                            <p:strVal val="#ppt_y"/>
+                                          </p:val>
+                                        </p:tav>
+                                      </p:tavLst>
+                                    </p:anim>
+                                  </p:childTnLst>
+                                </p:cTn>
+                              </p:par>
                             </p:childTnLst>
                           </p:cTn>
                         </p:par>
@@ -16088,13 +19369,27 @@
                   </p:par>
                 </p:childTnLst>
               </p:cTn>
+              <p:prevCondLst>
+                <p:cond evt="onPrev" delay="0">
+                  <p:tgtEl>
+                    <p:sldTgt/>
+                  </p:tgtEl>
+                </p:cond>
+              </p:prevCondLst>
+              <p:nextCondLst>
+                <p:cond evt="onNext" delay="0">
+                  <p:tgtEl>
+                    <p:sldTgt/>
+                  </p:tgtEl>
+                </p:cond>
+              </p:nextCondLst>
             </p:seq>
           </p:childTnLst>
         </p:cTn>
       </p:par>
     </p:tnLst>
     <p:bldLst>
-      <p:bldP spid="3" grpId="0" build="allAtOnce"/>
+      <p:bldP spid="3" grpId="0" uiExpand="0" advAuto="indefinite" build="whole" animBg="1"/>
     </p:bldLst>
   </p:timing>
 </p:sld>
@@ -16285,7 +19580,7 @@
   <p:timing>
     <p:tnLst>
       <p:par>
-        <p:cTn id="1" dur="indefinite" restart="never" nodeType="tmRoot">
+        <p:cTn id="1" restart="never" nodeType="tmRoot">
           <p:childTnLst>
             <p:seq concurrent="1" nextAc="seek">
               <p:cTn id="2" dur="indefinite" nodeType="mainSeq">
@@ -16297,33 +19592,84 @@
                       </p:stCondLst>
                       <p:childTnLst>
                         <p:par>
-                          <p:cTn id="4" presetID="2" presetClass="entr" presetSubtype="4" fill="hold" grpId="0" nodeType="clickEffect">
+                          <p:cTn id="4" fill="hold">
                             <p:stCondLst>
                               <p:cond delay="0"/>
                             </p:stCondLst>
                             <p:childTnLst>
-                              <p:set>
-                                <p:cBhvr>
-                                  <p:cTn id="5" dur="1" fill="hold"/>
-                                  <p:tgtEl>
-                                    <p:spTgt spid="4"/>
-                                  </p:tgtEl>
-                                  <p:attrNameLst>
-                                    <p:attrName>style.visibility</p:attrName>
-                                  </p:attrNameLst>
-                                </p:cBhvr>
-                                <p:to>
-                                  <p:strVal val="visible"/>
-                                </p:to>
-                              </p:set>
-                              <p:animEffect transition="in" filter="fly(l)" prLst="dir=l">
-                                <p:cBhvr>
-                                  <p:cTn id="6" dur="500"/>
-                                  <p:tgtEl>
-                                    <p:spTgt spid="4"/>
-                                  </p:tgtEl>
-                                </p:cBhvr>
-                              </p:animEffect>
+                              <p:par>
+                                <p:cTn id="5" presetID="2" presetClass="entr" presetSubtype="8" fill="hold" grpId="0" nodeType="clickEffect">
+                                  <p:stCondLst>
+                                    <p:cond delay="0"/>
+                                  </p:stCondLst>
+                                  <p:childTnLst>
+                                    <p:set>
+                                      <p:cBhvr>
+                                        <p:cTn id="6" dur="1" fill="hold">
+                                          <p:stCondLst>
+                                            <p:cond delay="0"/>
+                                          </p:stCondLst>
+                                        </p:cTn>
+                                        <p:tgtEl>
+                                          <p:spTgt spid="4"/>
+                                        </p:tgtEl>
+                                        <p:attrNameLst>
+                                          <p:attrName>style.visibility</p:attrName>
+                                        </p:attrNameLst>
+                                      </p:cBhvr>
+                                      <p:to>
+                                        <p:strVal val="visible"/>
+                                      </p:to>
+                                    </p:set>
+                                    <p:anim calcmode="lin" valueType="num">
+                                      <p:cBhvr additive="base">
+                                        <p:cTn id="7" dur="500" fill="hold"/>
+                                        <p:tgtEl>
+                                          <p:spTgt spid="4"/>
+                                        </p:tgtEl>
+                                        <p:attrNameLst>
+                                          <p:attrName>ppt_x</p:attrName>
+                                        </p:attrNameLst>
+                                      </p:cBhvr>
+                                      <p:tavLst>
+                                        <p:tav tm="0">
+                                          <p:val>
+                                            <p:strVal val="0-#ppt_w/2"/>
+                                          </p:val>
+                                        </p:tav>
+                                        <p:tav tm="100000">
+                                          <p:val>
+                                            <p:strVal val="#ppt_x"/>
+                                          </p:val>
+                                        </p:tav>
+                                      </p:tavLst>
+                                    </p:anim>
+                                    <p:anim calcmode="lin" valueType="num">
+                                      <p:cBhvr additive="base">
+                                        <p:cTn id="8" dur="500" fill="hold"/>
+                                        <p:tgtEl>
+                                          <p:spTgt spid="4"/>
+                                        </p:tgtEl>
+                                        <p:attrNameLst>
+                                          <p:attrName>ppt_y</p:attrName>
+                                        </p:attrNameLst>
+                                      </p:cBhvr>
+                                      <p:tavLst>
+                                        <p:tav tm="0">
+                                          <p:val>
+                                            <p:strVal val="#ppt_y"/>
+                                          </p:val>
+                                        </p:tav>
+                                        <p:tav tm="100000">
+                                          <p:val>
+                                            <p:strVal val="#ppt_y"/>
+                                          </p:val>
+                                        </p:tav>
+                                      </p:tavLst>
+                                    </p:anim>
+                                  </p:childTnLst>
+                                </p:cTn>
+                              </p:par>
                             </p:childTnLst>
                           </p:cTn>
                         </p:par>
@@ -16332,13 +19678,27 @@
                   </p:par>
                 </p:childTnLst>
               </p:cTn>
+              <p:prevCondLst>
+                <p:cond evt="onPrev" delay="0">
+                  <p:tgtEl>
+                    <p:sldTgt/>
+                  </p:tgtEl>
+                </p:cond>
+              </p:prevCondLst>
+              <p:nextCondLst>
+                <p:cond evt="onNext" delay="0">
+                  <p:tgtEl>
+                    <p:sldTgt/>
+                  </p:tgtEl>
+                </p:cond>
+              </p:nextCondLst>
             </p:seq>
           </p:childTnLst>
         </p:cTn>
       </p:par>
     </p:tnLst>
     <p:bldLst>
-      <p:bldP spid="4" grpId="0" build="allAtOnce"/>
+      <p:bldP spid="4" grpId="0" uiExpand="0" advAuto="indefinite" build="whole" animBg="1"/>
     </p:bldLst>
   </p:timing>
 </p:sld>
@@ -16480,7 +19840,7 @@
   <p:timing>
     <p:tnLst>
       <p:par>
-        <p:cTn id="1" dur="indefinite" restart="never" nodeType="tmRoot">
+        <p:cTn id="1" restart="never" nodeType="tmRoot">
           <p:childTnLst>
             <p:seq concurrent="1" nextAc="seek">
               <p:cTn id="2" dur="indefinite" nodeType="mainSeq">
@@ -16492,33 +19852,84 @@
                       </p:stCondLst>
                       <p:childTnLst>
                         <p:par>
-                          <p:cTn id="4" presetID="2" presetClass="entr" presetSubtype="4" fill="hold" grpId="0" nodeType="clickEffect">
+                          <p:cTn id="4" fill="hold">
                             <p:stCondLst>
                               <p:cond delay="0"/>
                             </p:stCondLst>
                             <p:childTnLst>
-                              <p:set>
-                                <p:cBhvr>
-                                  <p:cTn id="5" dur="1" fill="hold"/>
-                                  <p:tgtEl>
-                                    <p:spTgt spid="3"/>
-                                  </p:tgtEl>
-                                  <p:attrNameLst>
-                                    <p:attrName>style.visibility</p:attrName>
-                                  </p:attrNameLst>
-                                </p:cBhvr>
-                                <p:to>
-                                  <p:strVal val="visible"/>
-                                </p:to>
-                              </p:set>
-                              <p:animEffect transition="in" filter="fly(l)" prLst="dir=l">
-                                <p:cBhvr>
-                                  <p:cTn id="6" dur="500"/>
-                                  <p:tgtEl>
-                                    <p:spTgt spid="3"/>
-                                  </p:tgtEl>
-                                </p:cBhvr>
-                              </p:animEffect>
+                              <p:par>
+                                <p:cTn id="5" presetID="2" presetClass="entr" presetSubtype="8" fill="hold" grpId="0" nodeType="clickEffect">
+                                  <p:stCondLst>
+                                    <p:cond delay="0"/>
+                                  </p:stCondLst>
+                                  <p:childTnLst>
+                                    <p:set>
+                                      <p:cBhvr>
+                                        <p:cTn id="6" dur="1" fill="hold">
+                                          <p:stCondLst>
+                                            <p:cond delay="0"/>
+                                          </p:stCondLst>
+                                        </p:cTn>
+                                        <p:tgtEl>
+                                          <p:spTgt spid="3"/>
+                                        </p:tgtEl>
+                                        <p:attrNameLst>
+                                          <p:attrName>style.visibility</p:attrName>
+                                        </p:attrNameLst>
+                                      </p:cBhvr>
+                                      <p:to>
+                                        <p:strVal val="visible"/>
+                                      </p:to>
+                                    </p:set>
+                                    <p:anim calcmode="lin" valueType="num">
+                                      <p:cBhvr additive="base">
+                                        <p:cTn id="7" dur="500" fill="hold"/>
+                                        <p:tgtEl>
+                                          <p:spTgt spid="3"/>
+                                        </p:tgtEl>
+                                        <p:attrNameLst>
+                                          <p:attrName>ppt_x</p:attrName>
+                                        </p:attrNameLst>
+                                      </p:cBhvr>
+                                      <p:tavLst>
+                                        <p:tav tm="0">
+                                          <p:val>
+                                            <p:strVal val="0-#ppt_w/2"/>
+                                          </p:val>
+                                        </p:tav>
+                                        <p:tav tm="100000">
+                                          <p:val>
+                                            <p:strVal val="#ppt_x"/>
+                                          </p:val>
+                                        </p:tav>
+                                      </p:tavLst>
+                                    </p:anim>
+                                    <p:anim calcmode="lin" valueType="num">
+                                      <p:cBhvr additive="base">
+                                        <p:cTn id="8" dur="500" fill="hold"/>
+                                        <p:tgtEl>
+                                          <p:spTgt spid="3"/>
+                                        </p:tgtEl>
+                                        <p:attrNameLst>
+                                          <p:attrName>ppt_y</p:attrName>
+                                        </p:attrNameLst>
+                                      </p:cBhvr>
+                                      <p:tavLst>
+                                        <p:tav tm="0">
+                                          <p:val>
+                                            <p:strVal val="#ppt_y"/>
+                                          </p:val>
+                                        </p:tav>
+                                        <p:tav tm="100000">
+                                          <p:val>
+                                            <p:strVal val="#ppt_y"/>
+                                          </p:val>
+                                        </p:tav>
+                                      </p:tavLst>
+                                    </p:anim>
+                                  </p:childTnLst>
+                                </p:cTn>
+                              </p:par>
                             </p:childTnLst>
                           </p:cTn>
                         </p:par>
@@ -16527,13 +19938,27 @@
                   </p:par>
                 </p:childTnLst>
               </p:cTn>
+              <p:prevCondLst>
+                <p:cond evt="onPrev" delay="0">
+                  <p:tgtEl>
+                    <p:sldTgt/>
+                  </p:tgtEl>
+                </p:cond>
+              </p:prevCondLst>
+              <p:nextCondLst>
+                <p:cond evt="onNext" delay="0">
+                  <p:tgtEl>
+                    <p:sldTgt/>
+                  </p:tgtEl>
+                </p:cond>
+              </p:nextCondLst>
             </p:seq>
           </p:childTnLst>
         </p:cTn>
       </p:par>
     </p:tnLst>
     <p:bldLst>
-      <p:bldP spid="3" grpId="0" build="allAtOnce"/>
+      <p:bldP spid="3" grpId="0" uiExpand="0" advAuto="indefinite" build="whole" animBg="1"/>
     </p:bldLst>
   </p:timing>
 </p:sld>
@@ -16791,7 +20216,7 @@
   <p:timing>
     <p:tnLst>
       <p:par>
-        <p:cTn id="1" dur="indefinite" restart="never" nodeType="tmRoot">
+        <p:cTn id="1" restart="never" nodeType="tmRoot">
           <p:childTnLst>
             <p:seq concurrent="1" nextAc="seek">
               <p:cTn id="2" dur="indefinite" nodeType="mainSeq">
@@ -16803,33 +20228,84 @@
                       </p:stCondLst>
                       <p:childTnLst>
                         <p:par>
-                          <p:cTn id="4" presetID="2" presetClass="entr" presetSubtype="4" fill="hold" grpId="0" nodeType="clickEffect">
+                          <p:cTn id="4" fill="hold">
                             <p:stCondLst>
                               <p:cond delay="0"/>
                             </p:stCondLst>
                             <p:childTnLst>
-                              <p:set>
-                                <p:cBhvr>
-                                  <p:cTn id="5" dur="1" fill="hold"/>
-                                  <p:tgtEl>
-                                    <p:spTgt spid="3"/>
-                                  </p:tgtEl>
-                                  <p:attrNameLst>
-                                    <p:attrName>style.visibility</p:attrName>
-                                  </p:attrNameLst>
-                                </p:cBhvr>
-                                <p:to>
-                                  <p:strVal val="visible"/>
-                                </p:to>
-                              </p:set>
-                              <p:animEffect transition="in" filter="fly(l)" prLst="dir=l">
-                                <p:cBhvr>
-                                  <p:cTn id="6" dur="500"/>
-                                  <p:tgtEl>
-                                    <p:spTgt spid="3"/>
-                                  </p:tgtEl>
-                                </p:cBhvr>
-                              </p:animEffect>
+                              <p:par>
+                                <p:cTn id="5" presetID="2" presetClass="entr" presetSubtype="8" fill="hold" grpId="0" nodeType="clickEffect">
+                                  <p:stCondLst>
+                                    <p:cond delay="0"/>
+                                  </p:stCondLst>
+                                  <p:childTnLst>
+                                    <p:set>
+                                      <p:cBhvr>
+                                        <p:cTn id="6" dur="1" fill="hold">
+                                          <p:stCondLst>
+                                            <p:cond delay="0"/>
+                                          </p:stCondLst>
+                                        </p:cTn>
+                                        <p:tgtEl>
+                                          <p:spTgt spid="3"/>
+                                        </p:tgtEl>
+                                        <p:attrNameLst>
+                                          <p:attrName>style.visibility</p:attrName>
+                                        </p:attrNameLst>
+                                      </p:cBhvr>
+                                      <p:to>
+                                        <p:strVal val="visible"/>
+                                      </p:to>
+                                    </p:set>
+                                    <p:anim calcmode="lin" valueType="num">
+                                      <p:cBhvr additive="base">
+                                        <p:cTn id="7" dur="500" fill="hold"/>
+                                        <p:tgtEl>
+                                          <p:spTgt spid="3"/>
+                                        </p:tgtEl>
+                                        <p:attrNameLst>
+                                          <p:attrName>ppt_x</p:attrName>
+                                        </p:attrNameLst>
+                                      </p:cBhvr>
+                                      <p:tavLst>
+                                        <p:tav tm="0">
+                                          <p:val>
+                                            <p:strVal val="0-#ppt_w/2"/>
+                                          </p:val>
+                                        </p:tav>
+                                        <p:tav tm="100000">
+                                          <p:val>
+                                            <p:strVal val="#ppt_x"/>
+                                          </p:val>
+                                        </p:tav>
+                                      </p:tavLst>
+                                    </p:anim>
+                                    <p:anim calcmode="lin" valueType="num">
+                                      <p:cBhvr additive="base">
+                                        <p:cTn id="8" dur="500" fill="hold"/>
+                                        <p:tgtEl>
+                                          <p:spTgt spid="3"/>
+                                        </p:tgtEl>
+                                        <p:attrNameLst>
+                                          <p:attrName>ppt_y</p:attrName>
+                                        </p:attrNameLst>
+                                      </p:cBhvr>
+                                      <p:tavLst>
+                                        <p:tav tm="0">
+                                          <p:val>
+                                            <p:strVal val="#ppt_y"/>
+                                          </p:val>
+                                        </p:tav>
+                                        <p:tav tm="100000">
+                                          <p:val>
+                                            <p:strVal val="#ppt_y"/>
+                                          </p:val>
+                                        </p:tav>
+                                      </p:tavLst>
+                                    </p:anim>
+                                  </p:childTnLst>
+                                </p:cTn>
+                              </p:par>
                             </p:childTnLst>
                           </p:cTn>
                         </p:par>
@@ -16838,13 +20314,27 @@
                   </p:par>
                 </p:childTnLst>
               </p:cTn>
+              <p:prevCondLst>
+                <p:cond evt="onPrev" delay="0">
+                  <p:tgtEl>
+                    <p:sldTgt/>
+                  </p:tgtEl>
+                </p:cond>
+              </p:prevCondLst>
+              <p:nextCondLst>
+                <p:cond evt="onNext" delay="0">
+                  <p:tgtEl>
+                    <p:sldTgt/>
+                  </p:tgtEl>
+                </p:cond>
+              </p:nextCondLst>
             </p:seq>
           </p:childTnLst>
         </p:cTn>
       </p:par>
     </p:tnLst>
     <p:bldLst>
-      <p:bldP spid="3" grpId="0" build="allAtOnce"/>
+      <p:bldP spid="3" grpId="0" uiExpand="0" advAuto="indefinite" build="whole" animBg="1"/>
     </p:bldLst>
   </p:timing>
 </p:sld>
@@ -16922,7 +20412,7 @@
   <p:timing>
     <p:tnLst>
       <p:par>
-        <p:cTn id="1" dur="indefinite" restart="never" nodeType="tmRoot">
+        <p:cTn id="1" restart="never" nodeType="tmRoot">
           <p:childTnLst>
             <p:seq concurrent="1" nextAc="seek">
               <p:cTn id="2" dur="indefinite" nodeType="mainSeq">
@@ -16934,33 +20424,84 @@
                       </p:stCondLst>
                       <p:childTnLst>
                         <p:par>
-                          <p:cTn id="4" presetID="2" presetClass="entr" presetSubtype="4" fill="hold" grpId="0" nodeType="clickEffect">
+                          <p:cTn id="4" fill="hold">
                             <p:stCondLst>
                               <p:cond delay="0"/>
                             </p:stCondLst>
                             <p:childTnLst>
-                              <p:set>
-                                <p:cBhvr>
-                                  <p:cTn id="5" dur="1" fill="hold"/>
-                                  <p:tgtEl>
-                                    <p:spTgt spid="2"/>
-                                  </p:tgtEl>
-                                  <p:attrNameLst>
-                                    <p:attrName>style.visibility</p:attrName>
-                                  </p:attrNameLst>
-                                </p:cBhvr>
-                                <p:to>
-                                  <p:strVal val="visible"/>
-                                </p:to>
-                              </p:set>
-                              <p:animEffect transition="in" filter="fly(l)" prLst="dir=l">
-                                <p:cBhvr>
-                                  <p:cTn id="6" dur="500"/>
-                                  <p:tgtEl>
-                                    <p:spTgt spid="2"/>
-                                  </p:tgtEl>
-                                </p:cBhvr>
-                              </p:animEffect>
+                              <p:par>
+                                <p:cTn id="5" presetID="2" presetClass="entr" presetSubtype="8" fill="hold" grpId="0" nodeType="clickEffect">
+                                  <p:stCondLst>
+                                    <p:cond delay="0"/>
+                                  </p:stCondLst>
+                                  <p:childTnLst>
+                                    <p:set>
+                                      <p:cBhvr>
+                                        <p:cTn id="6" dur="1" fill="hold">
+                                          <p:stCondLst>
+                                            <p:cond delay="0"/>
+                                          </p:stCondLst>
+                                        </p:cTn>
+                                        <p:tgtEl>
+                                          <p:spTgt spid="2"/>
+                                        </p:tgtEl>
+                                        <p:attrNameLst>
+                                          <p:attrName>style.visibility</p:attrName>
+                                        </p:attrNameLst>
+                                      </p:cBhvr>
+                                      <p:to>
+                                        <p:strVal val="visible"/>
+                                      </p:to>
+                                    </p:set>
+                                    <p:anim calcmode="lin" valueType="num">
+                                      <p:cBhvr additive="base">
+                                        <p:cTn id="7" dur="500" fill="hold"/>
+                                        <p:tgtEl>
+                                          <p:spTgt spid="2"/>
+                                        </p:tgtEl>
+                                        <p:attrNameLst>
+                                          <p:attrName>ppt_x</p:attrName>
+                                        </p:attrNameLst>
+                                      </p:cBhvr>
+                                      <p:tavLst>
+                                        <p:tav tm="0">
+                                          <p:val>
+                                            <p:strVal val="0-#ppt_w/2"/>
+                                          </p:val>
+                                        </p:tav>
+                                        <p:tav tm="100000">
+                                          <p:val>
+                                            <p:strVal val="#ppt_x"/>
+                                          </p:val>
+                                        </p:tav>
+                                      </p:tavLst>
+                                    </p:anim>
+                                    <p:anim calcmode="lin" valueType="num">
+                                      <p:cBhvr additive="base">
+                                        <p:cTn id="8" dur="500" fill="hold"/>
+                                        <p:tgtEl>
+                                          <p:spTgt spid="2"/>
+                                        </p:tgtEl>
+                                        <p:attrNameLst>
+                                          <p:attrName>ppt_y</p:attrName>
+                                        </p:attrNameLst>
+                                      </p:cBhvr>
+                                      <p:tavLst>
+                                        <p:tav tm="0">
+                                          <p:val>
+                                            <p:strVal val="#ppt_y"/>
+                                          </p:val>
+                                        </p:tav>
+                                        <p:tav tm="100000">
+                                          <p:val>
+                                            <p:strVal val="#ppt_y"/>
+                                          </p:val>
+                                        </p:tav>
+                                      </p:tavLst>
+                                    </p:anim>
+                                  </p:childTnLst>
+                                </p:cTn>
+                              </p:par>
                             </p:childTnLst>
                           </p:cTn>
                         </p:par>
@@ -16969,13 +20510,27 @@
                   </p:par>
                 </p:childTnLst>
               </p:cTn>
+              <p:prevCondLst>
+                <p:cond evt="onPrev" delay="0">
+                  <p:tgtEl>
+                    <p:sldTgt/>
+                  </p:tgtEl>
+                </p:cond>
+              </p:prevCondLst>
+              <p:nextCondLst>
+                <p:cond evt="onNext" delay="0">
+                  <p:tgtEl>
+                    <p:sldTgt/>
+                  </p:tgtEl>
+                </p:cond>
+              </p:nextCondLst>
             </p:seq>
           </p:childTnLst>
         </p:cTn>
       </p:par>
     </p:tnLst>
     <p:bldLst>
-      <p:bldP spid="2" grpId="0" build="allAtOnce"/>
+      <p:bldP spid="2" grpId="0" uiExpand="0" advAuto="indefinite" build="whole" animBg="1"/>
     </p:bldLst>
   </p:timing>
 </p:sld>
@@ -17118,7 +20673,7 @@
   <p:timing>
     <p:tnLst>
       <p:par>
-        <p:cTn id="1" dur="indefinite" restart="never" nodeType="tmRoot">
+        <p:cTn id="1" restart="never" nodeType="tmRoot">
           <p:childTnLst>
             <p:seq concurrent="1" nextAc="seek">
               <p:cTn id="2" dur="indefinite" nodeType="mainSeq">
@@ -17130,33 +20685,84 @@
                       </p:stCondLst>
                       <p:childTnLst>
                         <p:par>
-                          <p:cTn id="4" presetID="2" presetClass="entr" presetSubtype="4" fill="hold" grpId="0" nodeType="clickEffect">
+                          <p:cTn id="4" fill="hold">
                             <p:stCondLst>
                               <p:cond delay="0"/>
                             </p:stCondLst>
                             <p:childTnLst>
-                              <p:set>
-                                <p:cBhvr>
-                                  <p:cTn id="5" dur="1" fill="hold"/>
-                                  <p:tgtEl>
-                                    <p:spTgt spid="3"/>
-                                  </p:tgtEl>
-                                  <p:attrNameLst>
-                                    <p:attrName>style.visibility</p:attrName>
-                                  </p:attrNameLst>
-                                </p:cBhvr>
-                                <p:to>
-                                  <p:strVal val="visible"/>
-                                </p:to>
-                              </p:set>
-                              <p:animEffect transition="in" filter="fly(l)" prLst="dir=l">
-                                <p:cBhvr>
-                                  <p:cTn id="6" dur="500"/>
-                                  <p:tgtEl>
-                                    <p:spTgt spid="3"/>
-                                  </p:tgtEl>
-                                </p:cBhvr>
-                              </p:animEffect>
+                              <p:par>
+                                <p:cTn id="5" presetID="2" presetClass="entr" presetSubtype="8" fill="hold" grpId="0" nodeType="clickEffect">
+                                  <p:stCondLst>
+                                    <p:cond delay="0"/>
+                                  </p:stCondLst>
+                                  <p:childTnLst>
+                                    <p:set>
+                                      <p:cBhvr>
+                                        <p:cTn id="6" dur="1" fill="hold">
+                                          <p:stCondLst>
+                                            <p:cond delay="0"/>
+                                          </p:stCondLst>
+                                        </p:cTn>
+                                        <p:tgtEl>
+                                          <p:spTgt spid="3"/>
+                                        </p:tgtEl>
+                                        <p:attrNameLst>
+                                          <p:attrName>style.visibility</p:attrName>
+                                        </p:attrNameLst>
+                                      </p:cBhvr>
+                                      <p:to>
+                                        <p:strVal val="visible"/>
+                                      </p:to>
+                                    </p:set>
+                                    <p:anim calcmode="lin" valueType="num">
+                                      <p:cBhvr additive="base">
+                                        <p:cTn id="7" dur="500" fill="hold"/>
+                                        <p:tgtEl>
+                                          <p:spTgt spid="3"/>
+                                        </p:tgtEl>
+                                        <p:attrNameLst>
+                                          <p:attrName>ppt_x</p:attrName>
+                                        </p:attrNameLst>
+                                      </p:cBhvr>
+                                      <p:tavLst>
+                                        <p:tav tm="0">
+                                          <p:val>
+                                            <p:strVal val="0-#ppt_w/2"/>
+                                          </p:val>
+                                        </p:tav>
+                                        <p:tav tm="100000">
+                                          <p:val>
+                                            <p:strVal val="#ppt_x"/>
+                                          </p:val>
+                                        </p:tav>
+                                      </p:tavLst>
+                                    </p:anim>
+                                    <p:anim calcmode="lin" valueType="num">
+                                      <p:cBhvr additive="base">
+                                        <p:cTn id="8" dur="500" fill="hold"/>
+                                        <p:tgtEl>
+                                          <p:spTgt spid="3"/>
+                                        </p:tgtEl>
+                                        <p:attrNameLst>
+                                          <p:attrName>ppt_y</p:attrName>
+                                        </p:attrNameLst>
+                                      </p:cBhvr>
+                                      <p:tavLst>
+                                        <p:tav tm="0">
+                                          <p:val>
+                                            <p:strVal val="#ppt_y"/>
+                                          </p:val>
+                                        </p:tav>
+                                        <p:tav tm="100000">
+                                          <p:val>
+                                            <p:strVal val="#ppt_y"/>
+                                          </p:val>
+                                        </p:tav>
+                                      </p:tavLst>
+                                    </p:anim>
+                                  </p:childTnLst>
+                                </p:cTn>
+                              </p:par>
                             </p:childTnLst>
                           </p:cTn>
                         </p:par>
@@ -17165,13 +20771,27 @@
                   </p:par>
                 </p:childTnLst>
               </p:cTn>
+              <p:prevCondLst>
+                <p:cond evt="onPrev" delay="0">
+                  <p:tgtEl>
+                    <p:sldTgt/>
+                  </p:tgtEl>
+                </p:cond>
+              </p:prevCondLst>
+              <p:nextCondLst>
+                <p:cond evt="onNext" delay="0">
+                  <p:tgtEl>
+                    <p:sldTgt/>
+                  </p:tgtEl>
+                </p:cond>
+              </p:nextCondLst>
             </p:seq>
           </p:childTnLst>
         </p:cTn>
       </p:par>
     </p:tnLst>
     <p:bldLst>
-      <p:bldP spid="3" grpId="0" build="allAtOnce"/>
+      <p:bldP spid="3" grpId="0" uiExpand="0" advAuto="indefinite" build="whole" animBg="1"/>
     </p:bldLst>
   </p:timing>
 </p:sld>
@@ -17723,7 +21343,7 @@
   <p:timing>
     <p:tnLst>
       <p:par>
-        <p:cTn id="1" dur="indefinite" restart="never" nodeType="tmRoot">
+        <p:cTn id="1" restart="never" nodeType="tmRoot">
           <p:childTnLst>
             <p:seq concurrent="1" nextAc="seek">
               <p:cTn id="2" dur="indefinite" nodeType="mainSeq">
@@ -17735,33 +21355,84 @@
                       </p:stCondLst>
                       <p:childTnLst>
                         <p:par>
-                          <p:cTn id="4" presetID="2" presetClass="entr" presetSubtype="4" fill="hold" grpId="0" nodeType="clickEffect">
+                          <p:cTn id="4" fill="hold">
                             <p:stCondLst>
                               <p:cond delay="0"/>
                             </p:stCondLst>
                             <p:childTnLst>
-                              <p:set>
-                                <p:cBhvr>
-                                  <p:cTn id="5" dur="1" fill="hold"/>
-                                  <p:tgtEl>
-                                    <p:spTgt spid="3"/>
-                                  </p:tgtEl>
-                                  <p:attrNameLst>
-                                    <p:attrName>style.visibility</p:attrName>
-                                  </p:attrNameLst>
-                                </p:cBhvr>
-                                <p:to>
-                                  <p:strVal val="visible"/>
-                                </p:to>
-                              </p:set>
-                              <p:animEffect transition="in" filter="fly(l)" prLst="dir=l">
-                                <p:cBhvr>
-                                  <p:cTn id="6" dur="500"/>
-                                  <p:tgtEl>
-                                    <p:spTgt spid="3"/>
-                                  </p:tgtEl>
-                                </p:cBhvr>
-                              </p:animEffect>
+                              <p:par>
+                                <p:cTn id="5" presetID="2" presetClass="entr" presetSubtype="8" fill="hold" grpId="0" nodeType="clickEffect">
+                                  <p:stCondLst>
+                                    <p:cond delay="0"/>
+                                  </p:stCondLst>
+                                  <p:childTnLst>
+                                    <p:set>
+                                      <p:cBhvr>
+                                        <p:cTn id="6" dur="1" fill="hold">
+                                          <p:stCondLst>
+                                            <p:cond delay="0"/>
+                                          </p:stCondLst>
+                                        </p:cTn>
+                                        <p:tgtEl>
+                                          <p:spTgt spid="3"/>
+                                        </p:tgtEl>
+                                        <p:attrNameLst>
+                                          <p:attrName>style.visibility</p:attrName>
+                                        </p:attrNameLst>
+                                      </p:cBhvr>
+                                      <p:to>
+                                        <p:strVal val="visible"/>
+                                      </p:to>
+                                    </p:set>
+                                    <p:anim calcmode="lin" valueType="num">
+                                      <p:cBhvr additive="base">
+                                        <p:cTn id="7" dur="500" fill="hold"/>
+                                        <p:tgtEl>
+                                          <p:spTgt spid="3"/>
+                                        </p:tgtEl>
+                                        <p:attrNameLst>
+                                          <p:attrName>ppt_x</p:attrName>
+                                        </p:attrNameLst>
+                                      </p:cBhvr>
+                                      <p:tavLst>
+                                        <p:tav tm="0">
+                                          <p:val>
+                                            <p:strVal val="0-#ppt_w/2"/>
+                                          </p:val>
+                                        </p:tav>
+                                        <p:tav tm="100000">
+                                          <p:val>
+                                            <p:strVal val="#ppt_x"/>
+                                          </p:val>
+                                        </p:tav>
+                                      </p:tavLst>
+                                    </p:anim>
+                                    <p:anim calcmode="lin" valueType="num">
+                                      <p:cBhvr additive="base">
+                                        <p:cTn id="8" dur="500" fill="hold"/>
+                                        <p:tgtEl>
+                                          <p:spTgt spid="3"/>
+                                        </p:tgtEl>
+                                        <p:attrNameLst>
+                                          <p:attrName>ppt_y</p:attrName>
+                                        </p:attrNameLst>
+                                      </p:cBhvr>
+                                      <p:tavLst>
+                                        <p:tav tm="0">
+                                          <p:val>
+                                            <p:strVal val="#ppt_y"/>
+                                          </p:val>
+                                        </p:tav>
+                                        <p:tav tm="100000">
+                                          <p:val>
+                                            <p:strVal val="#ppt_y"/>
+                                          </p:val>
+                                        </p:tav>
+                                      </p:tavLst>
+                                    </p:anim>
+                                  </p:childTnLst>
+                                </p:cTn>
+                              </p:par>
                             </p:childTnLst>
                           </p:cTn>
                         </p:par>
@@ -17770,13 +21441,27 @@
                   </p:par>
                 </p:childTnLst>
               </p:cTn>
+              <p:prevCondLst>
+                <p:cond evt="onPrev" delay="0">
+                  <p:tgtEl>
+                    <p:sldTgt/>
+                  </p:tgtEl>
+                </p:cond>
+              </p:prevCondLst>
+              <p:nextCondLst>
+                <p:cond evt="onNext" delay="0">
+                  <p:tgtEl>
+                    <p:sldTgt/>
+                  </p:tgtEl>
+                </p:cond>
+              </p:nextCondLst>
             </p:seq>
           </p:childTnLst>
         </p:cTn>
       </p:par>
     </p:tnLst>
     <p:bldLst>
-      <p:bldP spid="3" grpId="0" build="allAtOnce"/>
+      <p:bldP spid="3" grpId="0" uiExpand="0" advAuto="indefinite" build="whole" animBg="1"/>
     </p:bldLst>
   </p:timing>
 </p:sld>
@@ -18345,7 +22030,7 @@
   <p:timing>
     <p:tnLst>
       <p:par>
-        <p:cTn id="1" dur="indefinite" restart="never" nodeType="tmRoot">
+        <p:cTn id="1" restart="never" nodeType="tmRoot">
           <p:childTnLst>
             <p:seq concurrent="1" nextAc="seek">
               <p:cTn id="2" dur="indefinite" nodeType="mainSeq">
@@ -18357,33 +22042,84 @@
                       </p:stCondLst>
                       <p:childTnLst>
                         <p:par>
-                          <p:cTn id="4" presetID="2" presetClass="entr" presetSubtype="4" fill="hold" grpId="0" nodeType="clickEffect">
+                          <p:cTn id="4" fill="hold">
                             <p:stCondLst>
                               <p:cond delay="0"/>
                             </p:stCondLst>
                             <p:childTnLst>
-                              <p:set>
-                                <p:cBhvr>
-                                  <p:cTn id="5" dur="1" fill="hold"/>
-                                  <p:tgtEl>
-                                    <p:spTgt spid="3"/>
-                                  </p:tgtEl>
-                                  <p:attrNameLst>
-                                    <p:attrName>style.visibility</p:attrName>
-                                  </p:attrNameLst>
-                                </p:cBhvr>
-                                <p:to>
-                                  <p:strVal val="visible"/>
-                                </p:to>
-                              </p:set>
-                              <p:animEffect transition="in" filter="fly(l)" prLst="dir=l">
-                                <p:cBhvr>
-                                  <p:cTn id="6" dur="500"/>
-                                  <p:tgtEl>
-                                    <p:spTgt spid="3"/>
-                                  </p:tgtEl>
-                                </p:cBhvr>
-                              </p:animEffect>
+                              <p:par>
+                                <p:cTn id="5" presetID="2" presetClass="entr" presetSubtype="8" fill="hold" grpId="0" nodeType="clickEffect">
+                                  <p:stCondLst>
+                                    <p:cond delay="0"/>
+                                  </p:stCondLst>
+                                  <p:childTnLst>
+                                    <p:set>
+                                      <p:cBhvr>
+                                        <p:cTn id="6" dur="1" fill="hold">
+                                          <p:stCondLst>
+                                            <p:cond delay="0"/>
+                                          </p:stCondLst>
+                                        </p:cTn>
+                                        <p:tgtEl>
+                                          <p:spTgt spid="3"/>
+                                        </p:tgtEl>
+                                        <p:attrNameLst>
+                                          <p:attrName>style.visibility</p:attrName>
+                                        </p:attrNameLst>
+                                      </p:cBhvr>
+                                      <p:to>
+                                        <p:strVal val="visible"/>
+                                      </p:to>
+                                    </p:set>
+                                    <p:anim calcmode="lin" valueType="num">
+                                      <p:cBhvr additive="base">
+                                        <p:cTn id="7" dur="500" fill="hold"/>
+                                        <p:tgtEl>
+                                          <p:spTgt spid="3"/>
+                                        </p:tgtEl>
+                                        <p:attrNameLst>
+                                          <p:attrName>ppt_x</p:attrName>
+                                        </p:attrNameLst>
+                                      </p:cBhvr>
+                                      <p:tavLst>
+                                        <p:tav tm="0">
+                                          <p:val>
+                                            <p:strVal val="0-#ppt_w/2"/>
+                                          </p:val>
+                                        </p:tav>
+                                        <p:tav tm="100000">
+                                          <p:val>
+                                            <p:strVal val="#ppt_x"/>
+                                          </p:val>
+                                        </p:tav>
+                                      </p:tavLst>
+                                    </p:anim>
+                                    <p:anim calcmode="lin" valueType="num">
+                                      <p:cBhvr additive="base">
+                                        <p:cTn id="8" dur="500" fill="hold"/>
+                                        <p:tgtEl>
+                                          <p:spTgt spid="3"/>
+                                        </p:tgtEl>
+                                        <p:attrNameLst>
+                                          <p:attrName>ppt_y</p:attrName>
+                                        </p:attrNameLst>
+                                      </p:cBhvr>
+                                      <p:tavLst>
+                                        <p:tav tm="0">
+                                          <p:val>
+                                            <p:strVal val="#ppt_y"/>
+                                          </p:val>
+                                        </p:tav>
+                                        <p:tav tm="100000">
+                                          <p:val>
+                                            <p:strVal val="#ppt_y"/>
+                                          </p:val>
+                                        </p:tav>
+                                      </p:tavLst>
+                                    </p:anim>
+                                  </p:childTnLst>
+                                </p:cTn>
+                              </p:par>
                             </p:childTnLst>
                           </p:cTn>
                         </p:par>
@@ -18392,13 +22128,27 @@
                   </p:par>
                 </p:childTnLst>
               </p:cTn>
+              <p:prevCondLst>
+                <p:cond evt="onPrev" delay="0">
+                  <p:tgtEl>
+                    <p:sldTgt/>
+                  </p:tgtEl>
+                </p:cond>
+              </p:prevCondLst>
+              <p:nextCondLst>
+                <p:cond evt="onNext" delay="0">
+                  <p:tgtEl>
+                    <p:sldTgt/>
+                  </p:tgtEl>
+                </p:cond>
+              </p:nextCondLst>
             </p:seq>
           </p:childTnLst>
         </p:cTn>
       </p:par>
     </p:tnLst>
     <p:bldLst>
-      <p:bldP spid="3" grpId="0" build="allAtOnce"/>
+      <p:bldP spid="3" grpId="0" uiExpand="0" advAuto="indefinite" build="whole" animBg="1"/>
     </p:bldLst>
   </p:timing>
 </p:sld>
@@ -18476,7 +22226,7 @@
   <p:timing>
     <p:tnLst>
       <p:par>
-        <p:cTn id="1" dur="indefinite" restart="never" nodeType="tmRoot">
+        <p:cTn id="1" restart="never" nodeType="tmRoot">
           <p:childTnLst>
             <p:seq concurrent="1" nextAc="seek">
               <p:cTn id="2" dur="indefinite" nodeType="mainSeq">
@@ -18488,33 +22238,84 @@
                       </p:stCondLst>
                       <p:childTnLst>
                         <p:par>
-                          <p:cTn id="4" presetID="2" presetClass="entr" presetSubtype="4" fill="hold" grpId="0" nodeType="clickEffect">
+                          <p:cTn id="4" fill="hold">
                             <p:stCondLst>
                               <p:cond delay="0"/>
                             </p:stCondLst>
                             <p:childTnLst>
-                              <p:set>
-                                <p:cBhvr>
-                                  <p:cTn id="5" dur="1" fill="hold"/>
-                                  <p:tgtEl>
-                                    <p:spTgt spid="2"/>
-                                  </p:tgtEl>
-                                  <p:attrNameLst>
-                                    <p:attrName>style.visibility</p:attrName>
-                                  </p:attrNameLst>
-                                </p:cBhvr>
-                                <p:to>
-                                  <p:strVal val="visible"/>
-                                </p:to>
-                              </p:set>
-                              <p:animEffect transition="in" filter="fly(l)" prLst="dir=l">
-                                <p:cBhvr>
-                                  <p:cTn id="6" dur="500"/>
-                                  <p:tgtEl>
-                                    <p:spTgt spid="2"/>
-                                  </p:tgtEl>
-                                </p:cBhvr>
-                              </p:animEffect>
+                              <p:par>
+                                <p:cTn id="5" presetID="2" presetClass="entr" presetSubtype="8" fill="hold" grpId="0" nodeType="clickEffect">
+                                  <p:stCondLst>
+                                    <p:cond delay="0"/>
+                                  </p:stCondLst>
+                                  <p:childTnLst>
+                                    <p:set>
+                                      <p:cBhvr>
+                                        <p:cTn id="6" dur="1" fill="hold">
+                                          <p:stCondLst>
+                                            <p:cond delay="0"/>
+                                          </p:stCondLst>
+                                        </p:cTn>
+                                        <p:tgtEl>
+                                          <p:spTgt spid="2"/>
+                                        </p:tgtEl>
+                                        <p:attrNameLst>
+                                          <p:attrName>style.visibility</p:attrName>
+                                        </p:attrNameLst>
+                                      </p:cBhvr>
+                                      <p:to>
+                                        <p:strVal val="visible"/>
+                                      </p:to>
+                                    </p:set>
+                                    <p:anim calcmode="lin" valueType="num">
+                                      <p:cBhvr additive="base">
+                                        <p:cTn id="7" dur="500" fill="hold"/>
+                                        <p:tgtEl>
+                                          <p:spTgt spid="2"/>
+                                        </p:tgtEl>
+                                        <p:attrNameLst>
+                                          <p:attrName>ppt_x</p:attrName>
+                                        </p:attrNameLst>
+                                      </p:cBhvr>
+                                      <p:tavLst>
+                                        <p:tav tm="0">
+                                          <p:val>
+                                            <p:strVal val="0-#ppt_w/2"/>
+                                          </p:val>
+                                        </p:tav>
+                                        <p:tav tm="100000">
+                                          <p:val>
+                                            <p:strVal val="#ppt_x"/>
+                                          </p:val>
+                                        </p:tav>
+                                      </p:tavLst>
+                                    </p:anim>
+                                    <p:anim calcmode="lin" valueType="num">
+                                      <p:cBhvr additive="base">
+                                        <p:cTn id="8" dur="500" fill="hold"/>
+                                        <p:tgtEl>
+                                          <p:spTgt spid="2"/>
+                                        </p:tgtEl>
+                                        <p:attrNameLst>
+                                          <p:attrName>ppt_y</p:attrName>
+                                        </p:attrNameLst>
+                                      </p:cBhvr>
+                                      <p:tavLst>
+                                        <p:tav tm="0">
+                                          <p:val>
+                                            <p:strVal val="#ppt_y"/>
+                                          </p:val>
+                                        </p:tav>
+                                        <p:tav tm="100000">
+                                          <p:val>
+                                            <p:strVal val="#ppt_y"/>
+                                          </p:val>
+                                        </p:tav>
+                                      </p:tavLst>
+                                    </p:anim>
+                                  </p:childTnLst>
+                                </p:cTn>
+                              </p:par>
                             </p:childTnLst>
                           </p:cTn>
                         </p:par>
@@ -18523,13 +22324,27 @@
                   </p:par>
                 </p:childTnLst>
               </p:cTn>
+              <p:prevCondLst>
+                <p:cond evt="onPrev" delay="0">
+                  <p:tgtEl>
+                    <p:sldTgt/>
+                  </p:tgtEl>
+                </p:cond>
+              </p:prevCondLst>
+              <p:nextCondLst>
+                <p:cond evt="onNext" delay="0">
+                  <p:tgtEl>
+                    <p:sldTgt/>
+                  </p:tgtEl>
+                </p:cond>
+              </p:nextCondLst>
             </p:seq>
           </p:childTnLst>
         </p:cTn>
       </p:par>
     </p:tnLst>
     <p:bldLst>
-      <p:bldP spid="2" grpId="0" build="allAtOnce"/>
+      <p:bldP spid="2" grpId="0" uiExpand="0" advAuto="indefinite" build="whole" animBg="1"/>
     </p:bldLst>
   </p:timing>
 </p:sld>
@@ -18751,7 +22566,7 @@
   <p:timing>
     <p:tnLst>
       <p:par>
-        <p:cTn id="1" dur="indefinite" restart="never" nodeType="tmRoot">
+        <p:cTn id="1" restart="never" nodeType="tmRoot">
           <p:childTnLst>
             <p:seq concurrent="1" nextAc="seek">
               <p:cTn id="2" dur="indefinite" nodeType="mainSeq">
@@ -18763,33 +22578,84 @@
                       </p:stCondLst>
                       <p:childTnLst>
                         <p:par>
-                          <p:cTn id="4" presetID="2" presetClass="entr" presetSubtype="4" fill="hold" grpId="0" nodeType="clickEffect">
+                          <p:cTn id="4" fill="hold">
                             <p:stCondLst>
                               <p:cond delay="0"/>
                             </p:stCondLst>
                             <p:childTnLst>
-                              <p:set>
-                                <p:cBhvr>
-                                  <p:cTn id="5" dur="1" fill="hold"/>
-                                  <p:tgtEl>
-                                    <p:spTgt spid="3"/>
-                                  </p:tgtEl>
-                                  <p:attrNameLst>
-                                    <p:attrName>style.visibility</p:attrName>
-                                  </p:attrNameLst>
-                                </p:cBhvr>
-                                <p:to>
-                                  <p:strVal val="visible"/>
-                                </p:to>
-                              </p:set>
-                              <p:animEffect transition="in" filter="fly(l)" prLst="dir=l">
-                                <p:cBhvr>
-                                  <p:cTn id="6" dur="500"/>
-                                  <p:tgtEl>
-                                    <p:spTgt spid="3"/>
-                                  </p:tgtEl>
-                                </p:cBhvr>
-                              </p:animEffect>
+                              <p:par>
+                                <p:cTn id="5" presetID="2" presetClass="entr" presetSubtype="8" fill="hold" grpId="0" nodeType="clickEffect">
+                                  <p:stCondLst>
+                                    <p:cond delay="0"/>
+                                  </p:stCondLst>
+                                  <p:childTnLst>
+                                    <p:set>
+                                      <p:cBhvr>
+                                        <p:cTn id="6" dur="1" fill="hold">
+                                          <p:stCondLst>
+                                            <p:cond delay="0"/>
+                                          </p:stCondLst>
+                                        </p:cTn>
+                                        <p:tgtEl>
+                                          <p:spTgt spid="3"/>
+                                        </p:tgtEl>
+                                        <p:attrNameLst>
+                                          <p:attrName>style.visibility</p:attrName>
+                                        </p:attrNameLst>
+                                      </p:cBhvr>
+                                      <p:to>
+                                        <p:strVal val="visible"/>
+                                      </p:to>
+                                    </p:set>
+                                    <p:anim calcmode="lin" valueType="num">
+                                      <p:cBhvr additive="base">
+                                        <p:cTn id="7" dur="500" fill="hold"/>
+                                        <p:tgtEl>
+                                          <p:spTgt spid="3"/>
+                                        </p:tgtEl>
+                                        <p:attrNameLst>
+                                          <p:attrName>ppt_x</p:attrName>
+                                        </p:attrNameLst>
+                                      </p:cBhvr>
+                                      <p:tavLst>
+                                        <p:tav tm="0">
+                                          <p:val>
+                                            <p:strVal val="0-#ppt_w/2"/>
+                                          </p:val>
+                                        </p:tav>
+                                        <p:tav tm="100000">
+                                          <p:val>
+                                            <p:strVal val="#ppt_x"/>
+                                          </p:val>
+                                        </p:tav>
+                                      </p:tavLst>
+                                    </p:anim>
+                                    <p:anim calcmode="lin" valueType="num">
+                                      <p:cBhvr additive="base">
+                                        <p:cTn id="8" dur="500" fill="hold"/>
+                                        <p:tgtEl>
+                                          <p:spTgt spid="3"/>
+                                        </p:tgtEl>
+                                        <p:attrNameLst>
+                                          <p:attrName>ppt_y</p:attrName>
+                                        </p:attrNameLst>
+                                      </p:cBhvr>
+                                      <p:tavLst>
+                                        <p:tav tm="0">
+                                          <p:val>
+                                            <p:strVal val="#ppt_y"/>
+                                          </p:val>
+                                        </p:tav>
+                                        <p:tav tm="100000">
+                                          <p:val>
+                                            <p:strVal val="#ppt_y"/>
+                                          </p:val>
+                                        </p:tav>
+                                      </p:tavLst>
+                                    </p:anim>
+                                  </p:childTnLst>
+                                </p:cTn>
+                              </p:par>
                             </p:childTnLst>
                           </p:cTn>
                         </p:par>
@@ -18798,13 +22664,27 @@
                   </p:par>
                 </p:childTnLst>
               </p:cTn>
+              <p:prevCondLst>
+                <p:cond evt="onPrev" delay="0">
+                  <p:tgtEl>
+                    <p:sldTgt/>
+                  </p:tgtEl>
+                </p:cond>
+              </p:prevCondLst>
+              <p:nextCondLst>
+                <p:cond evt="onNext" delay="0">
+                  <p:tgtEl>
+                    <p:sldTgt/>
+                  </p:tgtEl>
+                </p:cond>
+              </p:nextCondLst>
             </p:seq>
           </p:childTnLst>
         </p:cTn>
       </p:par>
     </p:tnLst>
     <p:bldLst>
-      <p:bldP spid="3" grpId="0" build="allAtOnce"/>
+      <p:bldP spid="3" grpId="0" uiExpand="0" advAuto="indefinite" build="whole" animBg="1"/>
     </p:bldLst>
   </p:timing>
 </p:sld>
